--- a/Documentos Proyecto/Presentacion_Etapa_2_Semana_11.pptx
+++ b/Documentos Proyecto/Presentacion_Etapa_2_Semana_11.pptx
@@ -136,7 +136,7 @@
           <p:cNvPr id="2" name="Título 1">
             <a:extLst>
               <a:ext uri="{FF2B5EF4-FFF2-40B4-BE49-F238E27FC236}">
-                <a16:creationId xmlns:a16="http://schemas.microsoft.com/office/drawing/2014/main" id="{862E5117-7496-8587-85AC-45DC58BA61DA}"/>
+                <a16:creationId xmlns:a16="http://schemas.microsoft.com/office/drawing/2014/main" id="{657A4A8E-2420-6CA3-345A-B730865D92ED}"/>
               </a:ext>
             </a:extLst>
           </p:cNvPr>
@@ -174,7 +174,7 @@
           <p:cNvPr id="3" name="Subtítulo 2">
             <a:extLst>
               <a:ext uri="{FF2B5EF4-FFF2-40B4-BE49-F238E27FC236}">
-                <a16:creationId xmlns:a16="http://schemas.microsoft.com/office/drawing/2014/main" id="{54ABBBF6-6A68-9507-73DB-3BF526497F0E}"/>
+                <a16:creationId xmlns:a16="http://schemas.microsoft.com/office/drawing/2014/main" id="{94845186-06A2-6B3A-210D-B8B8AAE13FF1}"/>
               </a:ext>
             </a:extLst>
           </p:cNvPr>
@@ -245,7 +245,7 @@
           <p:cNvPr id="4" name="Marcador de fecha 3">
             <a:extLst>
               <a:ext uri="{FF2B5EF4-FFF2-40B4-BE49-F238E27FC236}">
-                <a16:creationId xmlns:a16="http://schemas.microsoft.com/office/drawing/2014/main" id="{50C01A64-3174-0AED-B29C-E45785F7D156}"/>
+                <a16:creationId xmlns:a16="http://schemas.microsoft.com/office/drawing/2014/main" id="{588F3F0B-3519-E39A-7346-938CB9046D85}"/>
               </a:ext>
             </a:extLst>
           </p:cNvPr>
@@ -261,7 +261,7 @@
           <a:bodyPr/>
           <a:lstStyle/>
           <a:p>
-            <a:fld id="{713872C1-EEF4-4EC1-B321-FAE689206160}" type="datetimeFigureOut">
+            <a:fld id="{EDAD090C-D836-456F-A55E-931D75A3DB31}" type="datetimeFigureOut">
               <a:rPr lang="es-CL" smtClean="0"/>
               <a:t>21-10-2026</a:t>
             </a:fld>
@@ -274,7 +274,7 @@
           <p:cNvPr id="5" name="Marcador de pie de página 4">
             <a:extLst>
               <a:ext uri="{FF2B5EF4-FFF2-40B4-BE49-F238E27FC236}">
-                <a16:creationId xmlns:a16="http://schemas.microsoft.com/office/drawing/2014/main" id="{43444047-8857-575D-23EA-27BE680A38B6}"/>
+                <a16:creationId xmlns:a16="http://schemas.microsoft.com/office/drawing/2014/main" id="{C10F680B-9764-255F-9413-2DBFE97B12DC}"/>
               </a:ext>
             </a:extLst>
           </p:cNvPr>
@@ -299,7 +299,7 @@
           <p:cNvPr id="6" name="Marcador de número de diapositiva 5">
             <a:extLst>
               <a:ext uri="{FF2B5EF4-FFF2-40B4-BE49-F238E27FC236}">
-                <a16:creationId xmlns:a16="http://schemas.microsoft.com/office/drawing/2014/main" id="{265302B1-F4F1-7473-A742-6F753386F301}"/>
+                <a16:creationId xmlns:a16="http://schemas.microsoft.com/office/drawing/2014/main" id="{53A614B4-C654-AA01-E695-23A8E7FB04DC}"/>
               </a:ext>
             </a:extLst>
           </p:cNvPr>
@@ -315,7 +315,7 @@
           <a:bodyPr/>
           <a:lstStyle/>
           <a:p>
-            <a:fld id="{639B4BBA-2261-4F59-8D00-50A6F4496E4F}" type="slidenum">
+            <a:fld id="{23A8895F-D6D6-4D66-82E9-4E856BD01093}" type="slidenum">
               <a:rPr lang="es-CL" smtClean="0"/>
               <a:t>‹Nº›</a:t>
             </a:fld>
@@ -326,7 +326,7 @@
     </p:spTree>
     <p:extLst>
       <p:ext uri="{BB962C8B-B14F-4D97-AF65-F5344CB8AC3E}">
-        <p14:creationId xmlns:p14="http://schemas.microsoft.com/office/powerpoint/2010/main" val="160859271"/>
+        <p14:creationId xmlns:p14="http://schemas.microsoft.com/office/powerpoint/2010/main" val="3354248585"/>
       </p:ext>
     </p:extLst>
   </p:cSld>
@@ -358,7 +358,7 @@
           <p:cNvPr id="2" name="Título 1">
             <a:extLst>
               <a:ext uri="{FF2B5EF4-FFF2-40B4-BE49-F238E27FC236}">
-                <a16:creationId xmlns:a16="http://schemas.microsoft.com/office/drawing/2014/main" id="{1E8BB457-F92D-1804-8C7F-CA8E0B3D4355}"/>
+                <a16:creationId xmlns:a16="http://schemas.microsoft.com/office/drawing/2014/main" id="{8638A35F-A77E-8884-E31A-39ED63EA7878}"/>
               </a:ext>
             </a:extLst>
           </p:cNvPr>
@@ -387,7 +387,7 @@
           <p:cNvPr id="3" name="Marcador de texto vertical 2">
             <a:extLst>
               <a:ext uri="{FF2B5EF4-FFF2-40B4-BE49-F238E27FC236}">
-                <a16:creationId xmlns:a16="http://schemas.microsoft.com/office/drawing/2014/main" id="{27E813A9-FD3C-4BC4-5B56-F90A6664443F}"/>
+                <a16:creationId xmlns:a16="http://schemas.microsoft.com/office/drawing/2014/main" id="{BBE44CB5-F6CA-7E09-0670-F54109240384}"/>
               </a:ext>
             </a:extLst>
           </p:cNvPr>
@@ -445,7 +445,7 @@
           <p:cNvPr id="4" name="Marcador de fecha 3">
             <a:extLst>
               <a:ext uri="{FF2B5EF4-FFF2-40B4-BE49-F238E27FC236}">
-                <a16:creationId xmlns:a16="http://schemas.microsoft.com/office/drawing/2014/main" id="{49F7E3AC-C383-D493-CC4E-60D6B7C2F08D}"/>
+                <a16:creationId xmlns:a16="http://schemas.microsoft.com/office/drawing/2014/main" id="{AAAFDE4F-3148-6997-1F76-1A16A3C49342}"/>
               </a:ext>
             </a:extLst>
           </p:cNvPr>
@@ -461,7 +461,7 @@
           <a:bodyPr/>
           <a:lstStyle/>
           <a:p>
-            <a:fld id="{713872C1-EEF4-4EC1-B321-FAE689206160}" type="datetimeFigureOut">
+            <a:fld id="{EDAD090C-D836-456F-A55E-931D75A3DB31}" type="datetimeFigureOut">
               <a:rPr lang="es-CL" smtClean="0"/>
               <a:t>21-10-2026</a:t>
             </a:fld>
@@ -474,7 +474,7 @@
           <p:cNvPr id="5" name="Marcador de pie de página 4">
             <a:extLst>
               <a:ext uri="{FF2B5EF4-FFF2-40B4-BE49-F238E27FC236}">
-                <a16:creationId xmlns:a16="http://schemas.microsoft.com/office/drawing/2014/main" id="{673FF6F0-829A-EE3F-BB1A-90FF54174473}"/>
+                <a16:creationId xmlns:a16="http://schemas.microsoft.com/office/drawing/2014/main" id="{175CCE60-1E17-5D78-0AA1-377AA7D8CC2A}"/>
               </a:ext>
             </a:extLst>
           </p:cNvPr>
@@ -499,7 +499,7 @@
           <p:cNvPr id="6" name="Marcador de número de diapositiva 5">
             <a:extLst>
               <a:ext uri="{FF2B5EF4-FFF2-40B4-BE49-F238E27FC236}">
-                <a16:creationId xmlns:a16="http://schemas.microsoft.com/office/drawing/2014/main" id="{01186292-0E6D-2F63-ECD8-72AD6BFDE7E2}"/>
+                <a16:creationId xmlns:a16="http://schemas.microsoft.com/office/drawing/2014/main" id="{C0300AC1-57A8-F959-D43E-5753E6F7AA3E}"/>
               </a:ext>
             </a:extLst>
           </p:cNvPr>
@@ -515,7 +515,7 @@
           <a:bodyPr/>
           <a:lstStyle/>
           <a:p>
-            <a:fld id="{639B4BBA-2261-4F59-8D00-50A6F4496E4F}" type="slidenum">
+            <a:fld id="{23A8895F-D6D6-4D66-82E9-4E856BD01093}" type="slidenum">
               <a:rPr lang="es-CL" smtClean="0"/>
               <a:t>‹Nº›</a:t>
             </a:fld>
@@ -526,7 +526,7 @@
     </p:spTree>
     <p:extLst>
       <p:ext uri="{BB962C8B-B14F-4D97-AF65-F5344CB8AC3E}">
-        <p14:creationId xmlns:p14="http://schemas.microsoft.com/office/powerpoint/2010/main" val="976848316"/>
+        <p14:creationId xmlns:p14="http://schemas.microsoft.com/office/powerpoint/2010/main" val="732396380"/>
       </p:ext>
     </p:extLst>
   </p:cSld>
@@ -558,7 +558,7 @@
           <p:cNvPr id="2" name="Título vertical 1">
             <a:extLst>
               <a:ext uri="{FF2B5EF4-FFF2-40B4-BE49-F238E27FC236}">
-                <a16:creationId xmlns:a16="http://schemas.microsoft.com/office/drawing/2014/main" id="{2DA7BEFC-5FD2-FF21-0CB5-A3334214033A}"/>
+                <a16:creationId xmlns:a16="http://schemas.microsoft.com/office/drawing/2014/main" id="{6F39547A-D9E6-CF6A-5029-3E85ED2D6DC3}"/>
               </a:ext>
             </a:extLst>
           </p:cNvPr>
@@ -592,7 +592,7 @@
           <p:cNvPr id="3" name="Marcador de texto vertical 2">
             <a:extLst>
               <a:ext uri="{FF2B5EF4-FFF2-40B4-BE49-F238E27FC236}">
-                <a16:creationId xmlns:a16="http://schemas.microsoft.com/office/drawing/2014/main" id="{263CAEF9-D4A7-2A18-3423-EC2988A41292}"/>
+                <a16:creationId xmlns:a16="http://schemas.microsoft.com/office/drawing/2014/main" id="{F280AAC6-F1B2-5075-B16F-283032BDDE59}"/>
               </a:ext>
             </a:extLst>
           </p:cNvPr>
@@ -655,7 +655,7 @@
           <p:cNvPr id="4" name="Marcador de fecha 3">
             <a:extLst>
               <a:ext uri="{FF2B5EF4-FFF2-40B4-BE49-F238E27FC236}">
-                <a16:creationId xmlns:a16="http://schemas.microsoft.com/office/drawing/2014/main" id="{9ECAC805-938A-CE52-18C0-FEABFD3E4BC8}"/>
+                <a16:creationId xmlns:a16="http://schemas.microsoft.com/office/drawing/2014/main" id="{A692075E-3232-AEF7-FD9A-89303B47E71C}"/>
               </a:ext>
             </a:extLst>
           </p:cNvPr>
@@ -671,7 +671,7 @@
           <a:bodyPr/>
           <a:lstStyle/>
           <a:p>
-            <a:fld id="{713872C1-EEF4-4EC1-B321-FAE689206160}" type="datetimeFigureOut">
+            <a:fld id="{EDAD090C-D836-456F-A55E-931D75A3DB31}" type="datetimeFigureOut">
               <a:rPr lang="es-CL" smtClean="0"/>
               <a:t>21-10-2026</a:t>
             </a:fld>
@@ -684,7 +684,7 @@
           <p:cNvPr id="5" name="Marcador de pie de página 4">
             <a:extLst>
               <a:ext uri="{FF2B5EF4-FFF2-40B4-BE49-F238E27FC236}">
-                <a16:creationId xmlns:a16="http://schemas.microsoft.com/office/drawing/2014/main" id="{70A24A4F-32CC-DFA1-62C5-6ADBBD1551EC}"/>
+                <a16:creationId xmlns:a16="http://schemas.microsoft.com/office/drawing/2014/main" id="{7C274483-F704-675E-24FE-1E882592036F}"/>
               </a:ext>
             </a:extLst>
           </p:cNvPr>
@@ -709,7 +709,7 @@
           <p:cNvPr id="6" name="Marcador de número de diapositiva 5">
             <a:extLst>
               <a:ext uri="{FF2B5EF4-FFF2-40B4-BE49-F238E27FC236}">
-                <a16:creationId xmlns:a16="http://schemas.microsoft.com/office/drawing/2014/main" id="{ABC963AC-C6B5-E8D2-0074-EED8F9C64CC1}"/>
+                <a16:creationId xmlns:a16="http://schemas.microsoft.com/office/drawing/2014/main" id="{E9D14451-6849-9346-1411-086DEF5FA0DF}"/>
               </a:ext>
             </a:extLst>
           </p:cNvPr>
@@ -725,7 +725,7 @@
           <a:bodyPr/>
           <a:lstStyle/>
           <a:p>
-            <a:fld id="{639B4BBA-2261-4F59-8D00-50A6F4496E4F}" type="slidenum">
+            <a:fld id="{23A8895F-D6D6-4D66-82E9-4E856BD01093}" type="slidenum">
               <a:rPr lang="es-CL" smtClean="0"/>
               <a:t>‹Nº›</a:t>
             </a:fld>
@@ -736,7 +736,7 @@
     </p:spTree>
     <p:extLst>
       <p:ext uri="{BB962C8B-B14F-4D97-AF65-F5344CB8AC3E}">
-        <p14:creationId xmlns:p14="http://schemas.microsoft.com/office/powerpoint/2010/main" val="95188878"/>
+        <p14:creationId xmlns:p14="http://schemas.microsoft.com/office/powerpoint/2010/main" val="2053167385"/>
       </p:ext>
     </p:extLst>
   </p:cSld>
@@ -768,7 +768,7 @@
           <p:cNvPr id="2" name="Título 1">
             <a:extLst>
               <a:ext uri="{FF2B5EF4-FFF2-40B4-BE49-F238E27FC236}">
-                <a16:creationId xmlns:a16="http://schemas.microsoft.com/office/drawing/2014/main" id="{24D11D65-4291-1FA3-F653-9F2AA90545F7}"/>
+                <a16:creationId xmlns:a16="http://schemas.microsoft.com/office/drawing/2014/main" id="{D52E4DF2-58CA-972C-3F30-446E3FEA1FD3}"/>
               </a:ext>
             </a:extLst>
           </p:cNvPr>
@@ -797,7 +797,7 @@
           <p:cNvPr id="3" name="Marcador de contenido 2">
             <a:extLst>
               <a:ext uri="{FF2B5EF4-FFF2-40B4-BE49-F238E27FC236}">
-                <a16:creationId xmlns:a16="http://schemas.microsoft.com/office/drawing/2014/main" id="{206834A2-F6B0-2180-0806-22356F4F8531}"/>
+                <a16:creationId xmlns:a16="http://schemas.microsoft.com/office/drawing/2014/main" id="{44103F2B-10DD-1813-3F75-3F48CB3BB726}"/>
               </a:ext>
             </a:extLst>
           </p:cNvPr>
@@ -855,7 +855,7 @@
           <p:cNvPr id="4" name="Marcador de fecha 3">
             <a:extLst>
               <a:ext uri="{FF2B5EF4-FFF2-40B4-BE49-F238E27FC236}">
-                <a16:creationId xmlns:a16="http://schemas.microsoft.com/office/drawing/2014/main" id="{A179305C-26AB-58B1-C49F-520EA48194F3}"/>
+                <a16:creationId xmlns:a16="http://schemas.microsoft.com/office/drawing/2014/main" id="{C4E11BEC-1155-4D6B-D842-92FA13C389EA}"/>
               </a:ext>
             </a:extLst>
           </p:cNvPr>
@@ -871,7 +871,7 @@
           <a:bodyPr/>
           <a:lstStyle/>
           <a:p>
-            <a:fld id="{713872C1-EEF4-4EC1-B321-FAE689206160}" type="datetimeFigureOut">
+            <a:fld id="{EDAD090C-D836-456F-A55E-931D75A3DB31}" type="datetimeFigureOut">
               <a:rPr lang="es-CL" smtClean="0"/>
               <a:t>21-10-2026</a:t>
             </a:fld>
@@ -884,7 +884,7 @@
           <p:cNvPr id="5" name="Marcador de pie de página 4">
             <a:extLst>
               <a:ext uri="{FF2B5EF4-FFF2-40B4-BE49-F238E27FC236}">
-                <a16:creationId xmlns:a16="http://schemas.microsoft.com/office/drawing/2014/main" id="{F3BECE2E-D9FA-D9BC-5F09-ECAB83F5ECAB}"/>
+                <a16:creationId xmlns:a16="http://schemas.microsoft.com/office/drawing/2014/main" id="{FE91CAEF-9063-5009-5808-23CE0290B6B9}"/>
               </a:ext>
             </a:extLst>
           </p:cNvPr>
@@ -909,7 +909,7 @@
           <p:cNvPr id="6" name="Marcador de número de diapositiva 5">
             <a:extLst>
               <a:ext uri="{FF2B5EF4-FFF2-40B4-BE49-F238E27FC236}">
-                <a16:creationId xmlns:a16="http://schemas.microsoft.com/office/drawing/2014/main" id="{BDC3EA3E-F9A6-F31A-009F-BE8A317C4399}"/>
+                <a16:creationId xmlns:a16="http://schemas.microsoft.com/office/drawing/2014/main" id="{674AD953-7C18-0312-8C48-F7E4623FFD37}"/>
               </a:ext>
             </a:extLst>
           </p:cNvPr>
@@ -925,7 +925,7 @@
           <a:bodyPr/>
           <a:lstStyle/>
           <a:p>
-            <a:fld id="{639B4BBA-2261-4F59-8D00-50A6F4496E4F}" type="slidenum">
+            <a:fld id="{23A8895F-D6D6-4D66-82E9-4E856BD01093}" type="slidenum">
               <a:rPr lang="es-CL" smtClean="0"/>
               <a:t>‹Nº›</a:t>
             </a:fld>
@@ -936,7 +936,7 @@
     </p:spTree>
     <p:extLst>
       <p:ext uri="{BB962C8B-B14F-4D97-AF65-F5344CB8AC3E}">
-        <p14:creationId xmlns:p14="http://schemas.microsoft.com/office/powerpoint/2010/main" val="740006519"/>
+        <p14:creationId xmlns:p14="http://schemas.microsoft.com/office/powerpoint/2010/main" val="2508584576"/>
       </p:ext>
     </p:extLst>
   </p:cSld>
@@ -968,7 +968,7 @@
           <p:cNvPr id="2" name="Título 1">
             <a:extLst>
               <a:ext uri="{FF2B5EF4-FFF2-40B4-BE49-F238E27FC236}">
-                <a16:creationId xmlns:a16="http://schemas.microsoft.com/office/drawing/2014/main" id="{CDA0BCC9-4C3C-E34B-B6B6-A953548FF941}"/>
+                <a16:creationId xmlns:a16="http://schemas.microsoft.com/office/drawing/2014/main" id="{337F1D4C-3689-4EFB-A238-24FEF764B67F}"/>
               </a:ext>
             </a:extLst>
           </p:cNvPr>
@@ -1006,7 +1006,7 @@
           <p:cNvPr id="3" name="Marcador de texto 2">
             <a:extLst>
               <a:ext uri="{FF2B5EF4-FFF2-40B4-BE49-F238E27FC236}">
-                <a16:creationId xmlns:a16="http://schemas.microsoft.com/office/drawing/2014/main" id="{E7D7B5D3-E45F-ED37-3A78-15EFB0F74F2A}"/>
+                <a16:creationId xmlns:a16="http://schemas.microsoft.com/office/drawing/2014/main" id="{044A5A68-DEE1-288C-8B63-BA84E5F212B8}"/>
               </a:ext>
             </a:extLst>
           </p:cNvPr>
@@ -1131,7 +1131,7 @@
           <p:cNvPr id="4" name="Marcador de fecha 3">
             <a:extLst>
               <a:ext uri="{FF2B5EF4-FFF2-40B4-BE49-F238E27FC236}">
-                <a16:creationId xmlns:a16="http://schemas.microsoft.com/office/drawing/2014/main" id="{796AAD3A-D95D-45B5-244D-5D14DCDA4D19}"/>
+                <a16:creationId xmlns:a16="http://schemas.microsoft.com/office/drawing/2014/main" id="{C7CAFD39-6410-F968-1E94-B71E34056B22}"/>
               </a:ext>
             </a:extLst>
           </p:cNvPr>
@@ -1147,7 +1147,7 @@
           <a:bodyPr/>
           <a:lstStyle/>
           <a:p>
-            <a:fld id="{713872C1-EEF4-4EC1-B321-FAE689206160}" type="datetimeFigureOut">
+            <a:fld id="{EDAD090C-D836-456F-A55E-931D75A3DB31}" type="datetimeFigureOut">
               <a:rPr lang="es-CL" smtClean="0"/>
               <a:t>21-10-2026</a:t>
             </a:fld>
@@ -1160,7 +1160,7 @@
           <p:cNvPr id="5" name="Marcador de pie de página 4">
             <a:extLst>
               <a:ext uri="{FF2B5EF4-FFF2-40B4-BE49-F238E27FC236}">
-                <a16:creationId xmlns:a16="http://schemas.microsoft.com/office/drawing/2014/main" id="{0DD3AE39-EAC2-EA8A-5B33-ED86D6EDDC69}"/>
+                <a16:creationId xmlns:a16="http://schemas.microsoft.com/office/drawing/2014/main" id="{E2DE6828-F482-C722-1D25-87794F531D0F}"/>
               </a:ext>
             </a:extLst>
           </p:cNvPr>
@@ -1185,7 +1185,7 @@
           <p:cNvPr id="6" name="Marcador de número de diapositiva 5">
             <a:extLst>
               <a:ext uri="{FF2B5EF4-FFF2-40B4-BE49-F238E27FC236}">
-                <a16:creationId xmlns:a16="http://schemas.microsoft.com/office/drawing/2014/main" id="{F730D092-D478-6DDA-94A4-6F501040F922}"/>
+                <a16:creationId xmlns:a16="http://schemas.microsoft.com/office/drawing/2014/main" id="{C686B481-DDB3-42CB-1ED7-95FB206CD984}"/>
               </a:ext>
             </a:extLst>
           </p:cNvPr>
@@ -1201,7 +1201,7 @@
           <a:bodyPr/>
           <a:lstStyle/>
           <a:p>
-            <a:fld id="{639B4BBA-2261-4F59-8D00-50A6F4496E4F}" type="slidenum">
+            <a:fld id="{23A8895F-D6D6-4D66-82E9-4E856BD01093}" type="slidenum">
               <a:rPr lang="es-CL" smtClean="0"/>
               <a:t>‹Nº›</a:t>
             </a:fld>
@@ -1212,7 +1212,7 @@
     </p:spTree>
     <p:extLst>
       <p:ext uri="{BB962C8B-B14F-4D97-AF65-F5344CB8AC3E}">
-        <p14:creationId xmlns:p14="http://schemas.microsoft.com/office/powerpoint/2010/main" val="2141749985"/>
+        <p14:creationId xmlns:p14="http://schemas.microsoft.com/office/powerpoint/2010/main" val="1370110944"/>
       </p:ext>
     </p:extLst>
   </p:cSld>
@@ -1244,7 +1244,7 @@
           <p:cNvPr id="2" name="Título 1">
             <a:extLst>
               <a:ext uri="{FF2B5EF4-FFF2-40B4-BE49-F238E27FC236}">
-                <a16:creationId xmlns:a16="http://schemas.microsoft.com/office/drawing/2014/main" id="{5915487D-1812-BE52-0CB1-2C2F37E45B42}"/>
+                <a16:creationId xmlns:a16="http://schemas.microsoft.com/office/drawing/2014/main" id="{8C503372-44B5-EB61-1F05-B9F3AF3B9EAA}"/>
               </a:ext>
             </a:extLst>
           </p:cNvPr>
@@ -1273,7 +1273,7 @@
           <p:cNvPr id="3" name="Marcador de contenido 2">
             <a:extLst>
               <a:ext uri="{FF2B5EF4-FFF2-40B4-BE49-F238E27FC236}">
-                <a16:creationId xmlns:a16="http://schemas.microsoft.com/office/drawing/2014/main" id="{19A8DCE8-0988-1122-6602-47B30F07088C}"/>
+                <a16:creationId xmlns:a16="http://schemas.microsoft.com/office/drawing/2014/main" id="{C03BA8E2-D513-C0F9-312B-C4EA3A5E9A8E}"/>
               </a:ext>
             </a:extLst>
           </p:cNvPr>
@@ -1336,7 +1336,7 @@
           <p:cNvPr id="4" name="Marcador de contenido 3">
             <a:extLst>
               <a:ext uri="{FF2B5EF4-FFF2-40B4-BE49-F238E27FC236}">
-                <a16:creationId xmlns:a16="http://schemas.microsoft.com/office/drawing/2014/main" id="{B7DD1455-66B7-3686-29D0-925028965ABE}"/>
+                <a16:creationId xmlns:a16="http://schemas.microsoft.com/office/drawing/2014/main" id="{5B302D6F-D670-0CFA-1612-5CFF54B149E9}"/>
               </a:ext>
             </a:extLst>
           </p:cNvPr>
@@ -1399,7 +1399,7 @@
           <p:cNvPr id="5" name="Marcador de fecha 4">
             <a:extLst>
               <a:ext uri="{FF2B5EF4-FFF2-40B4-BE49-F238E27FC236}">
-                <a16:creationId xmlns:a16="http://schemas.microsoft.com/office/drawing/2014/main" id="{AC54DEAF-68BF-786A-4BD2-FC80E75DC180}"/>
+                <a16:creationId xmlns:a16="http://schemas.microsoft.com/office/drawing/2014/main" id="{70259A6B-E6E3-C371-0F1A-67DDEB1F5C25}"/>
               </a:ext>
             </a:extLst>
           </p:cNvPr>
@@ -1415,7 +1415,7 @@
           <a:bodyPr/>
           <a:lstStyle/>
           <a:p>
-            <a:fld id="{713872C1-EEF4-4EC1-B321-FAE689206160}" type="datetimeFigureOut">
+            <a:fld id="{EDAD090C-D836-456F-A55E-931D75A3DB31}" type="datetimeFigureOut">
               <a:rPr lang="es-CL" smtClean="0"/>
               <a:t>21-10-2026</a:t>
             </a:fld>
@@ -1428,7 +1428,7 @@
           <p:cNvPr id="6" name="Marcador de pie de página 5">
             <a:extLst>
               <a:ext uri="{FF2B5EF4-FFF2-40B4-BE49-F238E27FC236}">
-                <a16:creationId xmlns:a16="http://schemas.microsoft.com/office/drawing/2014/main" id="{EE59666C-2D19-8829-372C-88C8997650D1}"/>
+                <a16:creationId xmlns:a16="http://schemas.microsoft.com/office/drawing/2014/main" id="{FA8BC878-B8CA-1F3D-9EEE-622153356141}"/>
               </a:ext>
             </a:extLst>
           </p:cNvPr>
@@ -1453,7 +1453,7 @@
           <p:cNvPr id="7" name="Marcador de número de diapositiva 6">
             <a:extLst>
               <a:ext uri="{FF2B5EF4-FFF2-40B4-BE49-F238E27FC236}">
-                <a16:creationId xmlns:a16="http://schemas.microsoft.com/office/drawing/2014/main" id="{72FB209B-E8B5-C452-DF4C-F35378144171}"/>
+                <a16:creationId xmlns:a16="http://schemas.microsoft.com/office/drawing/2014/main" id="{0F79D789-6304-6C53-37CF-7DE3D5665BAE}"/>
               </a:ext>
             </a:extLst>
           </p:cNvPr>
@@ -1469,7 +1469,7 @@
           <a:bodyPr/>
           <a:lstStyle/>
           <a:p>
-            <a:fld id="{639B4BBA-2261-4F59-8D00-50A6F4496E4F}" type="slidenum">
+            <a:fld id="{23A8895F-D6D6-4D66-82E9-4E856BD01093}" type="slidenum">
               <a:rPr lang="es-CL" smtClean="0"/>
               <a:t>‹Nº›</a:t>
             </a:fld>
@@ -1480,7 +1480,7 @@
     </p:spTree>
     <p:extLst>
       <p:ext uri="{BB962C8B-B14F-4D97-AF65-F5344CB8AC3E}">
-        <p14:creationId xmlns:p14="http://schemas.microsoft.com/office/powerpoint/2010/main" val="494255562"/>
+        <p14:creationId xmlns:p14="http://schemas.microsoft.com/office/powerpoint/2010/main" val="627979903"/>
       </p:ext>
     </p:extLst>
   </p:cSld>
@@ -1512,7 +1512,7 @@
           <p:cNvPr id="2" name="Título 1">
             <a:extLst>
               <a:ext uri="{FF2B5EF4-FFF2-40B4-BE49-F238E27FC236}">
-                <a16:creationId xmlns:a16="http://schemas.microsoft.com/office/drawing/2014/main" id="{578D5CCA-1F79-DA8F-22BA-D25957BB0EB8}"/>
+                <a16:creationId xmlns:a16="http://schemas.microsoft.com/office/drawing/2014/main" id="{F21A8EC7-D110-D610-EAB0-6B18E4ADA445}"/>
               </a:ext>
             </a:extLst>
           </p:cNvPr>
@@ -1546,7 +1546,7 @@
           <p:cNvPr id="3" name="Marcador de texto 2">
             <a:extLst>
               <a:ext uri="{FF2B5EF4-FFF2-40B4-BE49-F238E27FC236}">
-                <a16:creationId xmlns:a16="http://schemas.microsoft.com/office/drawing/2014/main" id="{788D6D83-3F71-EC8F-6EA8-FCB64D48B4B5}"/>
+                <a16:creationId xmlns:a16="http://schemas.microsoft.com/office/drawing/2014/main" id="{40A38E50-07AC-2256-F102-52794990C49D}"/>
               </a:ext>
             </a:extLst>
           </p:cNvPr>
@@ -1617,7 +1617,7 @@
           <p:cNvPr id="4" name="Marcador de contenido 3">
             <a:extLst>
               <a:ext uri="{FF2B5EF4-FFF2-40B4-BE49-F238E27FC236}">
-                <a16:creationId xmlns:a16="http://schemas.microsoft.com/office/drawing/2014/main" id="{515DAB60-4F55-483D-F354-B5E0A9F0CB49}"/>
+                <a16:creationId xmlns:a16="http://schemas.microsoft.com/office/drawing/2014/main" id="{02FCB78D-8E41-F498-AE7A-20C7FB882C67}"/>
               </a:ext>
             </a:extLst>
           </p:cNvPr>
@@ -1680,7 +1680,7 @@
           <p:cNvPr id="5" name="Marcador de texto 4">
             <a:extLst>
               <a:ext uri="{FF2B5EF4-FFF2-40B4-BE49-F238E27FC236}">
-                <a16:creationId xmlns:a16="http://schemas.microsoft.com/office/drawing/2014/main" id="{D7BA9A06-6BBF-92DD-9AC8-A53A232746ED}"/>
+                <a16:creationId xmlns:a16="http://schemas.microsoft.com/office/drawing/2014/main" id="{EF806580-A3C3-F9C7-79C9-C2125D4BEA30}"/>
               </a:ext>
             </a:extLst>
           </p:cNvPr>
@@ -1751,7 +1751,7 @@
           <p:cNvPr id="6" name="Marcador de contenido 5">
             <a:extLst>
               <a:ext uri="{FF2B5EF4-FFF2-40B4-BE49-F238E27FC236}">
-                <a16:creationId xmlns:a16="http://schemas.microsoft.com/office/drawing/2014/main" id="{B8043A2F-A3D3-22D5-E2C8-B277DA5BB656}"/>
+                <a16:creationId xmlns:a16="http://schemas.microsoft.com/office/drawing/2014/main" id="{0CA9D524-A2D7-3F2D-B96E-9064B75D391C}"/>
               </a:ext>
             </a:extLst>
           </p:cNvPr>
@@ -1814,7 +1814,7 @@
           <p:cNvPr id="7" name="Marcador de fecha 6">
             <a:extLst>
               <a:ext uri="{FF2B5EF4-FFF2-40B4-BE49-F238E27FC236}">
-                <a16:creationId xmlns:a16="http://schemas.microsoft.com/office/drawing/2014/main" id="{A2555A3D-965A-671B-6B87-E1B7500F30AC}"/>
+                <a16:creationId xmlns:a16="http://schemas.microsoft.com/office/drawing/2014/main" id="{E0A96DC4-854E-4EE7-0D30-89735A442F74}"/>
               </a:ext>
             </a:extLst>
           </p:cNvPr>
@@ -1830,7 +1830,7 @@
           <a:bodyPr/>
           <a:lstStyle/>
           <a:p>
-            <a:fld id="{713872C1-EEF4-4EC1-B321-FAE689206160}" type="datetimeFigureOut">
+            <a:fld id="{EDAD090C-D836-456F-A55E-931D75A3DB31}" type="datetimeFigureOut">
               <a:rPr lang="es-CL" smtClean="0"/>
               <a:t>21-10-2026</a:t>
             </a:fld>
@@ -1843,7 +1843,7 @@
           <p:cNvPr id="8" name="Marcador de pie de página 7">
             <a:extLst>
               <a:ext uri="{FF2B5EF4-FFF2-40B4-BE49-F238E27FC236}">
-                <a16:creationId xmlns:a16="http://schemas.microsoft.com/office/drawing/2014/main" id="{A5BD894D-4C6D-1D34-81DD-8977E704AB0C}"/>
+                <a16:creationId xmlns:a16="http://schemas.microsoft.com/office/drawing/2014/main" id="{F5243607-816B-10DE-9E9C-31ED7A1A87A5}"/>
               </a:ext>
             </a:extLst>
           </p:cNvPr>
@@ -1868,7 +1868,7 @@
           <p:cNvPr id="9" name="Marcador de número de diapositiva 8">
             <a:extLst>
               <a:ext uri="{FF2B5EF4-FFF2-40B4-BE49-F238E27FC236}">
-                <a16:creationId xmlns:a16="http://schemas.microsoft.com/office/drawing/2014/main" id="{68E4A4B9-51FF-5C4B-BCF0-A426CA595A10}"/>
+                <a16:creationId xmlns:a16="http://schemas.microsoft.com/office/drawing/2014/main" id="{068D247C-2922-CDB2-D128-C31315EE6F70}"/>
               </a:ext>
             </a:extLst>
           </p:cNvPr>
@@ -1884,7 +1884,7 @@
           <a:bodyPr/>
           <a:lstStyle/>
           <a:p>
-            <a:fld id="{639B4BBA-2261-4F59-8D00-50A6F4496E4F}" type="slidenum">
+            <a:fld id="{23A8895F-D6D6-4D66-82E9-4E856BD01093}" type="slidenum">
               <a:rPr lang="es-CL" smtClean="0"/>
               <a:t>‹Nº›</a:t>
             </a:fld>
@@ -1895,7 +1895,7 @@
     </p:spTree>
     <p:extLst>
       <p:ext uri="{BB962C8B-B14F-4D97-AF65-F5344CB8AC3E}">
-        <p14:creationId xmlns:p14="http://schemas.microsoft.com/office/powerpoint/2010/main" val="1144722874"/>
+        <p14:creationId xmlns:p14="http://schemas.microsoft.com/office/powerpoint/2010/main" val="1319537692"/>
       </p:ext>
     </p:extLst>
   </p:cSld>
@@ -1927,7 +1927,7 @@
           <p:cNvPr id="2" name="Título 1">
             <a:extLst>
               <a:ext uri="{FF2B5EF4-FFF2-40B4-BE49-F238E27FC236}">
-                <a16:creationId xmlns:a16="http://schemas.microsoft.com/office/drawing/2014/main" id="{5159AA41-AE57-83F8-7BFA-FCC8881FC800}"/>
+                <a16:creationId xmlns:a16="http://schemas.microsoft.com/office/drawing/2014/main" id="{EAF2EE96-EDAB-5F53-3308-6E720BB96BB4}"/>
               </a:ext>
             </a:extLst>
           </p:cNvPr>
@@ -1956,7 +1956,7 @@
           <p:cNvPr id="3" name="Marcador de fecha 2">
             <a:extLst>
               <a:ext uri="{FF2B5EF4-FFF2-40B4-BE49-F238E27FC236}">
-                <a16:creationId xmlns:a16="http://schemas.microsoft.com/office/drawing/2014/main" id="{E78B0383-CCF6-A320-B3DF-0B3959A592E4}"/>
+                <a16:creationId xmlns:a16="http://schemas.microsoft.com/office/drawing/2014/main" id="{84A2C0D0-5DF1-A8D6-3151-79A3C2BAE5E3}"/>
               </a:ext>
             </a:extLst>
           </p:cNvPr>
@@ -1972,7 +1972,7 @@
           <a:bodyPr/>
           <a:lstStyle/>
           <a:p>
-            <a:fld id="{713872C1-EEF4-4EC1-B321-FAE689206160}" type="datetimeFigureOut">
+            <a:fld id="{EDAD090C-D836-456F-A55E-931D75A3DB31}" type="datetimeFigureOut">
               <a:rPr lang="es-CL" smtClean="0"/>
               <a:t>21-10-2026</a:t>
             </a:fld>
@@ -1985,7 +1985,7 @@
           <p:cNvPr id="4" name="Marcador de pie de página 3">
             <a:extLst>
               <a:ext uri="{FF2B5EF4-FFF2-40B4-BE49-F238E27FC236}">
-                <a16:creationId xmlns:a16="http://schemas.microsoft.com/office/drawing/2014/main" id="{EEE94B96-88A9-BAA9-23AE-A56C4670EDE0}"/>
+                <a16:creationId xmlns:a16="http://schemas.microsoft.com/office/drawing/2014/main" id="{FF319C39-F7D0-C5B5-65E7-1A0C938DC44B}"/>
               </a:ext>
             </a:extLst>
           </p:cNvPr>
@@ -2010,7 +2010,7 @@
           <p:cNvPr id="5" name="Marcador de número de diapositiva 4">
             <a:extLst>
               <a:ext uri="{FF2B5EF4-FFF2-40B4-BE49-F238E27FC236}">
-                <a16:creationId xmlns:a16="http://schemas.microsoft.com/office/drawing/2014/main" id="{7DDDEE50-2439-0BB5-3CFD-AF95663E14B0}"/>
+                <a16:creationId xmlns:a16="http://schemas.microsoft.com/office/drawing/2014/main" id="{5F088A65-4BE3-773A-51DA-148074532E82}"/>
               </a:ext>
             </a:extLst>
           </p:cNvPr>
@@ -2026,7 +2026,7 @@
           <a:bodyPr/>
           <a:lstStyle/>
           <a:p>
-            <a:fld id="{639B4BBA-2261-4F59-8D00-50A6F4496E4F}" type="slidenum">
+            <a:fld id="{23A8895F-D6D6-4D66-82E9-4E856BD01093}" type="slidenum">
               <a:rPr lang="es-CL" smtClean="0"/>
               <a:t>‹Nº›</a:t>
             </a:fld>
@@ -2037,7 +2037,7 @@
     </p:spTree>
     <p:extLst>
       <p:ext uri="{BB962C8B-B14F-4D97-AF65-F5344CB8AC3E}">
-        <p14:creationId xmlns:p14="http://schemas.microsoft.com/office/powerpoint/2010/main" val="3665009151"/>
+        <p14:creationId xmlns:p14="http://schemas.microsoft.com/office/powerpoint/2010/main" val="4117342454"/>
       </p:ext>
     </p:extLst>
   </p:cSld>
@@ -2069,7 +2069,7 @@
           <p:cNvPr id="2" name="Marcador de fecha 1">
             <a:extLst>
               <a:ext uri="{FF2B5EF4-FFF2-40B4-BE49-F238E27FC236}">
-                <a16:creationId xmlns:a16="http://schemas.microsoft.com/office/drawing/2014/main" id="{CB85FD95-DBD4-5BB2-C7AA-49171E2904E2}"/>
+                <a16:creationId xmlns:a16="http://schemas.microsoft.com/office/drawing/2014/main" id="{C9305D52-3B40-AD2F-D746-59B6A67C5B35}"/>
               </a:ext>
             </a:extLst>
           </p:cNvPr>
@@ -2085,7 +2085,7 @@
           <a:bodyPr/>
           <a:lstStyle/>
           <a:p>
-            <a:fld id="{713872C1-EEF4-4EC1-B321-FAE689206160}" type="datetimeFigureOut">
+            <a:fld id="{EDAD090C-D836-456F-A55E-931D75A3DB31}" type="datetimeFigureOut">
               <a:rPr lang="es-CL" smtClean="0"/>
               <a:t>21-10-2026</a:t>
             </a:fld>
@@ -2098,7 +2098,7 @@
           <p:cNvPr id="3" name="Marcador de pie de página 2">
             <a:extLst>
               <a:ext uri="{FF2B5EF4-FFF2-40B4-BE49-F238E27FC236}">
-                <a16:creationId xmlns:a16="http://schemas.microsoft.com/office/drawing/2014/main" id="{2E615C1C-3FBE-9237-DB2D-72F9840BA7AF}"/>
+                <a16:creationId xmlns:a16="http://schemas.microsoft.com/office/drawing/2014/main" id="{7D87F4A7-01E9-849B-5A02-4F46377BC541}"/>
               </a:ext>
             </a:extLst>
           </p:cNvPr>
@@ -2123,7 +2123,7 @@
           <p:cNvPr id="4" name="Marcador de número de diapositiva 3">
             <a:extLst>
               <a:ext uri="{FF2B5EF4-FFF2-40B4-BE49-F238E27FC236}">
-                <a16:creationId xmlns:a16="http://schemas.microsoft.com/office/drawing/2014/main" id="{22DBD410-BBB9-7D61-3DAC-FA0086C11E99}"/>
+                <a16:creationId xmlns:a16="http://schemas.microsoft.com/office/drawing/2014/main" id="{E87A31DF-969A-ED18-5693-E53BCAD4D336}"/>
               </a:ext>
             </a:extLst>
           </p:cNvPr>
@@ -2139,7 +2139,7 @@
           <a:bodyPr/>
           <a:lstStyle/>
           <a:p>
-            <a:fld id="{639B4BBA-2261-4F59-8D00-50A6F4496E4F}" type="slidenum">
+            <a:fld id="{23A8895F-D6D6-4D66-82E9-4E856BD01093}" type="slidenum">
               <a:rPr lang="es-CL" smtClean="0"/>
               <a:t>‹Nº›</a:t>
             </a:fld>
@@ -2150,7 +2150,7 @@
     </p:spTree>
     <p:extLst>
       <p:ext uri="{BB962C8B-B14F-4D97-AF65-F5344CB8AC3E}">
-        <p14:creationId xmlns:p14="http://schemas.microsoft.com/office/powerpoint/2010/main" val="2268042355"/>
+        <p14:creationId xmlns:p14="http://schemas.microsoft.com/office/powerpoint/2010/main" val="3186306006"/>
       </p:ext>
     </p:extLst>
   </p:cSld>
@@ -2182,7 +2182,7 @@
           <p:cNvPr id="2" name="Título 1">
             <a:extLst>
               <a:ext uri="{FF2B5EF4-FFF2-40B4-BE49-F238E27FC236}">
-                <a16:creationId xmlns:a16="http://schemas.microsoft.com/office/drawing/2014/main" id="{5B113D16-7917-CBFF-7BE5-BD047519D2FE}"/>
+                <a16:creationId xmlns:a16="http://schemas.microsoft.com/office/drawing/2014/main" id="{85F2E880-2606-DC0C-67CD-D50517FA9097}"/>
               </a:ext>
             </a:extLst>
           </p:cNvPr>
@@ -2220,7 +2220,7 @@
           <p:cNvPr id="3" name="Marcador de contenido 2">
             <a:extLst>
               <a:ext uri="{FF2B5EF4-FFF2-40B4-BE49-F238E27FC236}">
-                <a16:creationId xmlns:a16="http://schemas.microsoft.com/office/drawing/2014/main" id="{F031DC21-9352-E52E-CC2B-26EA495F1611}"/>
+                <a16:creationId xmlns:a16="http://schemas.microsoft.com/office/drawing/2014/main" id="{03B817A8-1A2D-56CF-A4A4-0D28B82B1EF3}"/>
               </a:ext>
             </a:extLst>
           </p:cNvPr>
@@ -2311,7 +2311,7 @@
           <p:cNvPr id="4" name="Marcador de texto 3">
             <a:extLst>
               <a:ext uri="{FF2B5EF4-FFF2-40B4-BE49-F238E27FC236}">
-                <a16:creationId xmlns:a16="http://schemas.microsoft.com/office/drawing/2014/main" id="{BE0BD597-28DA-517F-F59F-84FC4655C8A0}"/>
+                <a16:creationId xmlns:a16="http://schemas.microsoft.com/office/drawing/2014/main" id="{879A8073-FA36-4ADE-5E9E-68903D47240E}"/>
               </a:ext>
             </a:extLst>
           </p:cNvPr>
@@ -2382,7 +2382,7 @@
           <p:cNvPr id="5" name="Marcador de fecha 4">
             <a:extLst>
               <a:ext uri="{FF2B5EF4-FFF2-40B4-BE49-F238E27FC236}">
-                <a16:creationId xmlns:a16="http://schemas.microsoft.com/office/drawing/2014/main" id="{AD7DA7FB-F345-96A2-0749-A987F22A5566}"/>
+                <a16:creationId xmlns:a16="http://schemas.microsoft.com/office/drawing/2014/main" id="{0BF43CCA-8A1D-57D8-9167-8BF8F4FA2488}"/>
               </a:ext>
             </a:extLst>
           </p:cNvPr>
@@ -2398,7 +2398,7 @@
           <a:bodyPr/>
           <a:lstStyle/>
           <a:p>
-            <a:fld id="{713872C1-EEF4-4EC1-B321-FAE689206160}" type="datetimeFigureOut">
+            <a:fld id="{EDAD090C-D836-456F-A55E-931D75A3DB31}" type="datetimeFigureOut">
               <a:rPr lang="es-CL" smtClean="0"/>
               <a:t>21-10-2026</a:t>
             </a:fld>
@@ -2411,7 +2411,7 @@
           <p:cNvPr id="6" name="Marcador de pie de página 5">
             <a:extLst>
               <a:ext uri="{FF2B5EF4-FFF2-40B4-BE49-F238E27FC236}">
-                <a16:creationId xmlns:a16="http://schemas.microsoft.com/office/drawing/2014/main" id="{F00AC54F-7AA0-2916-325A-541DC6214F68}"/>
+                <a16:creationId xmlns:a16="http://schemas.microsoft.com/office/drawing/2014/main" id="{519D8245-E50C-CB63-4BB0-D3FD61973B51}"/>
               </a:ext>
             </a:extLst>
           </p:cNvPr>
@@ -2436,7 +2436,7 @@
           <p:cNvPr id="7" name="Marcador de número de diapositiva 6">
             <a:extLst>
               <a:ext uri="{FF2B5EF4-FFF2-40B4-BE49-F238E27FC236}">
-                <a16:creationId xmlns:a16="http://schemas.microsoft.com/office/drawing/2014/main" id="{B45FB7D7-DF70-F349-99F0-838691E5DD09}"/>
+                <a16:creationId xmlns:a16="http://schemas.microsoft.com/office/drawing/2014/main" id="{987B163D-3DCF-28B8-2E25-CEB81480AB38}"/>
               </a:ext>
             </a:extLst>
           </p:cNvPr>
@@ -2452,7 +2452,7 @@
           <a:bodyPr/>
           <a:lstStyle/>
           <a:p>
-            <a:fld id="{639B4BBA-2261-4F59-8D00-50A6F4496E4F}" type="slidenum">
+            <a:fld id="{23A8895F-D6D6-4D66-82E9-4E856BD01093}" type="slidenum">
               <a:rPr lang="es-CL" smtClean="0"/>
               <a:t>‹Nº›</a:t>
             </a:fld>
@@ -2463,7 +2463,7 @@
     </p:spTree>
     <p:extLst>
       <p:ext uri="{BB962C8B-B14F-4D97-AF65-F5344CB8AC3E}">
-        <p14:creationId xmlns:p14="http://schemas.microsoft.com/office/powerpoint/2010/main" val="234561711"/>
+        <p14:creationId xmlns:p14="http://schemas.microsoft.com/office/powerpoint/2010/main" val="2080107383"/>
       </p:ext>
     </p:extLst>
   </p:cSld>
@@ -2495,7 +2495,7 @@
           <p:cNvPr id="2" name="Título 1">
             <a:extLst>
               <a:ext uri="{FF2B5EF4-FFF2-40B4-BE49-F238E27FC236}">
-                <a16:creationId xmlns:a16="http://schemas.microsoft.com/office/drawing/2014/main" id="{F29C22EB-9FE3-1BAE-D374-8DFAE8A5DF30}"/>
+                <a16:creationId xmlns:a16="http://schemas.microsoft.com/office/drawing/2014/main" id="{0A551A47-C5F4-1E9D-0EA7-0CA86495B3A1}"/>
               </a:ext>
             </a:extLst>
           </p:cNvPr>
@@ -2533,7 +2533,7 @@
           <p:cNvPr id="3" name="Marcador de posición de imagen 2">
             <a:extLst>
               <a:ext uri="{FF2B5EF4-FFF2-40B4-BE49-F238E27FC236}">
-                <a16:creationId xmlns:a16="http://schemas.microsoft.com/office/drawing/2014/main" id="{A93E1A6E-BBE3-535B-E3CC-91A820216B10}"/>
+                <a16:creationId xmlns:a16="http://schemas.microsoft.com/office/drawing/2014/main" id="{E17A3AFC-E385-BF0C-EC71-7A3C6921213B}"/>
               </a:ext>
             </a:extLst>
           </p:cNvPr>
@@ -2600,7 +2600,7 @@
           <p:cNvPr id="4" name="Marcador de texto 3">
             <a:extLst>
               <a:ext uri="{FF2B5EF4-FFF2-40B4-BE49-F238E27FC236}">
-                <a16:creationId xmlns:a16="http://schemas.microsoft.com/office/drawing/2014/main" id="{59756972-684D-FAA4-C9AA-E2836A88F85B}"/>
+                <a16:creationId xmlns:a16="http://schemas.microsoft.com/office/drawing/2014/main" id="{B17904CD-3296-3F52-21F3-D44486F1B87F}"/>
               </a:ext>
             </a:extLst>
           </p:cNvPr>
@@ -2671,7 +2671,7 @@
           <p:cNvPr id="5" name="Marcador de fecha 4">
             <a:extLst>
               <a:ext uri="{FF2B5EF4-FFF2-40B4-BE49-F238E27FC236}">
-                <a16:creationId xmlns:a16="http://schemas.microsoft.com/office/drawing/2014/main" id="{CC42D21A-5B92-C57D-CC84-878C54F16BD4}"/>
+                <a16:creationId xmlns:a16="http://schemas.microsoft.com/office/drawing/2014/main" id="{CFABD289-2847-52A8-670C-57F437334CA0}"/>
               </a:ext>
             </a:extLst>
           </p:cNvPr>
@@ -2687,7 +2687,7 @@
           <a:bodyPr/>
           <a:lstStyle/>
           <a:p>
-            <a:fld id="{713872C1-EEF4-4EC1-B321-FAE689206160}" type="datetimeFigureOut">
+            <a:fld id="{EDAD090C-D836-456F-A55E-931D75A3DB31}" type="datetimeFigureOut">
               <a:rPr lang="es-CL" smtClean="0"/>
               <a:t>21-10-2026</a:t>
             </a:fld>
@@ -2700,7 +2700,7 @@
           <p:cNvPr id="6" name="Marcador de pie de página 5">
             <a:extLst>
               <a:ext uri="{FF2B5EF4-FFF2-40B4-BE49-F238E27FC236}">
-                <a16:creationId xmlns:a16="http://schemas.microsoft.com/office/drawing/2014/main" id="{6FA12486-2254-5447-1FA9-F365A38552CB}"/>
+                <a16:creationId xmlns:a16="http://schemas.microsoft.com/office/drawing/2014/main" id="{D75FFCAB-9CF2-4A1A-5132-34768F73869B}"/>
               </a:ext>
             </a:extLst>
           </p:cNvPr>
@@ -2725,7 +2725,7 @@
           <p:cNvPr id="7" name="Marcador de número de diapositiva 6">
             <a:extLst>
               <a:ext uri="{FF2B5EF4-FFF2-40B4-BE49-F238E27FC236}">
-                <a16:creationId xmlns:a16="http://schemas.microsoft.com/office/drawing/2014/main" id="{40F0BC90-72AA-94E8-3D9B-A62BE38C457B}"/>
+                <a16:creationId xmlns:a16="http://schemas.microsoft.com/office/drawing/2014/main" id="{42E6761F-F760-A3BA-699E-FAE602C64C1D}"/>
               </a:ext>
             </a:extLst>
           </p:cNvPr>
@@ -2741,7 +2741,7 @@
           <a:bodyPr/>
           <a:lstStyle/>
           <a:p>
-            <a:fld id="{639B4BBA-2261-4F59-8D00-50A6F4496E4F}" type="slidenum">
+            <a:fld id="{23A8895F-D6D6-4D66-82E9-4E856BD01093}" type="slidenum">
               <a:rPr lang="es-CL" smtClean="0"/>
               <a:t>‹Nº›</a:t>
             </a:fld>
@@ -2752,7 +2752,7 @@
     </p:spTree>
     <p:extLst>
       <p:ext uri="{BB962C8B-B14F-4D97-AF65-F5344CB8AC3E}">
-        <p14:creationId xmlns:p14="http://schemas.microsoft.com/office/powerpoint/2010/main" val="347505304"/>
+        <p14:creationId xmlns:p14="http://schemas.microsoft.com/office/powerpoint/2010/main" val="2324806173"/>
       </p:ext>
     </p:extLst>
   </p:cSld>
@@ -2789,7 +2789,7 @@
           <p:cNvPr id="2" name="Marcador de título 1">
             <a:extLst>
               <a:ext uri="{FF2B5EF4-FFF2-40B4-BE49-F238E27FC236}">
-                <a16:creationId xmlns:a16="http://schemas.microsoft.com/office/drawing/2014/main" id="{68993C95-E21B-2C0D-C6EB-0048F449E177}"/>
+                <a16:creationId xmlns:a16="http://schemas.microsoft.com/office/drawing/2014/main" id="{A6DCE3C5-E0DB-211D-2601-0A566042EFEB}"/>
               </a:ext>
             </a:extLst>
           </p:cNvPr>
@@ -2828,7 +2828,7 @@
           <p:cNvPr id="3" name="Marcador de texto 2">
             <a:extLst>
               <a:ext uri="{FF2B5EF4-FFF2-40B4-BE49-F238E27FC236}">
-                <a16:creationId xmlns:a16="http://schemas.microsoft.com/office/drawing/2014/main" id="{61687B7B-7957-18B1-FE3C-844495D2248E}"/>
+                <a16:creationId xmlns:a16="http://schemas.microsoft.com/office/drawing/2014/main" id="{72355588-863C-CA83-E327-98AB70A8B89F}"/>
               </a:ext>
             </a:extLst>
           </p:cNvPr>
@@ -2896,7 +2896,7 @@
           <p:cNvPr id="4" name="Marcador de fecha 3">
             <a:extLst>
               <a:ext uri="{FF2B5EF4-FFF2-40B4-BE49-F238E27FC236}">
-                <a16:creationId xmlns:a16="http://schemas.microsoft.com/office/drawing/2014/main" id="{E4A43089-B74A-C469-82E9-B80E9C9BFD5D}"/>
+                <a16:creationId xmlns:a16="http://schemas.microsoft.com/office/drawing/2014/main" id="{7202154E-E57A-8331-916A-530575EF4F64}"/>
               </a:ext>
             </a:extLst>
           </p:cNvPr>
@@ -2930,7 +2930,7 @@
             </a:lvl1pPr>
           </a:lstStyle>
           <a:p>
-            <a:fld id="{713872C1-EEF4-4EC1-B321-FAE689206160}" type="datetimeFigureOut">
+            <a:fld id="{EDAD090C-D836-456F-A55E-931D75A3DB31}" type="datetimeFigureOut">
               <a:rPr lang="es-CL" smtClean="0"/>
               <a:t>21-10-2026</a:t>
             </a:fld>
@@ -2943,7 +2943,7 @@
           <p:cNvPr id="5" name="Marcador de pie de página 4">
             <a:extLst>
               <a:ext uri="{FF2B5EF4-FFF2-40B4-BE49-F238E27FC236}">
-                <a16:creationId xmlns:a16="http://schemas.microsoft.com/office/drawing/2014/main" id="{5051472E-EA28-187A-2077-29F29660BD3E}"/>
+                <a16:creationId xmlns:a16="http://schemas.microsoft.com/office/drawing/2014/main" id="{2431956F-299D-4548-10D8-FC72AAEC38F4}"/>
               </a:ext>
             </a:extLst>
           </p:cNvPr>
@@ -2986,7 +2986,7 @@
           <p:cNvPr id="6" name="Marcador de número de diapositiva 5">
             <a:extLst>
               <a:ext uri="{FF2B5EF4-FFF2-40B4-BE49-F238E27FC236}">
-                <a16:creationId xmlns:a16="http://schemas.microsoft.com/office/drawing/2014/main" id="{5B50ECBC-8CEA-59ED-2309-0118936A66F7}"/>
+                <a16:creationId xmlns:a16="http://schemas.microsoft.com/office/drawing/2014/main" id="{C144AA0D-2220-072E-DBE9-9CE1229B2B9D}"/>
               </a:ext>
             </a:extLst>
           </p:cNvPr>
@@ -3020,7 +3020,7 @@
             </a:lvl1pPr>
           </a:lstStyle>
           <a:p>
-            <a:fld id="{639B4BBA-2261-4F59-8D00-50A6F4496E4F}" type="slidenum">
+            <a:fld id="{23A8895F-D6D6-4D66-82E9-4E856BD01093}" type="slidenum">
               <a:rPr lang="es-CL" smtClean="0"/>
               <a:t>‹Nº›</a:t>
             </a:fld>
@@ -3031,7 +3031,7 @@
     </p:spTree>
     <p:extLst>
       <p:ext uri="{BB962C8B-B14F-4D97-AF65-F5344CB8AC3E}">
-        <p14:creationId xmlns:p14="http://schemas.microsoft.com/office/powerpoint/2010/main" val="3203218579"/>
+        <p14:creationId xmlns:p14="http://schemas.microsoft.com/office/powerpoint/2010/main" val="1406168095"/>
       </p:ext>
     </p:extLst>
   </p:cSld>
@@ -3354,7 +3354,7 @@
           <p:cNvPr id="2" name="Rectángulo 1">
             <a:extLst>
               <a:ext uri="{FF2B5EF4-FFF2-40B4-BE49-F238E27FC236}">
-                <a16:creationId xmlns:a16="http://schemas.microsoft.com/office/drawing/2014/main" id="{48BBBF4E-17FD-382E-31DE-29ABA5CB7D94}"/>
+                <a16:creationId xmlns:a16="http://schemas.microsoft.com/office/drawing/2014/main" id="{4983CFFA-EEAF-C816-FCF8-E6E854F4286A}"/>
               </a:ext>
             </a:extLst>
           </p:cNvPr>
@@ -3422,7 +3422,7 @@
           <p:cNvPr id="3" name="Rectángulo 2">
             <a:extLst>
               <a:ext uri="{FF2B5EF4-FFF2-40B4-BE49-F238E27FC236}">
-                <a16:creationId xmlns:a16="http://schemas.microsoft.com/office/drawing/2014/main" id="{7567580F-27E5-540E-A788-3911BC708A4D}"/>
+                <a16:creationId xmlns:a16="http://schemas.microsoft.com/office/drawing/2014/main" id="{686D0046-0DEB-2A50-0715-D2C737D31CD1}"/>
               </a:ext>
             </a:extLst>
           </p:cNvPr>
@@ -3490,7 +3490,7 @@
           <p:cNvPr id="4" name="Rectángulo 3">
             <a:extLst>
               <a:ext uri="{FF2B5EF4-FFF2-40B4-BE49-F238E27FC236}">
-                <a16:creationId xmlns:a16="http://schemas.microsoft.com/office/drawing/2014/main" id="{A6684B02-F290-A354-9B50-9751C297931C}"/>
+                <a16:creationId xmlns:a16="http://schemas.microsoft.com/office/drawing/2014/main" id="{E1D8064A-736F-19B4-73D9-01C97427BD65}"/>
               </a:ext>
             </a:extLst>
           </p:cNvPr>
@@ -3499,8 +3499,8 @@
         </p:nvSpPr>
         <p:spPr>
           <a:xfrm>
-            <a:off x="762000" y="1016000"/>
-            <a:ext cx="10668000" cy="4826000"/>
+            <a:off x="635000" y="635000"/>
+            <a:ext cx="10922000" cy="5588000"/>
           </a:xfrm>
           <a:prstGeom prst="rect">
             <a:avLst/>
@@ -3544,7 +3544,7 @@
           <p:cNvPr id="5" name="CuadroTexto 4">
             <a:extLst>
               <a:ext uri="{FF2B5EF4-FFF2-40B4-BE49-F238E27FC236}">
-                <a16:creationId xmlns:a16="http://schemas.microsoft.com/office/drawing/2014/main" id="{C327827B-4268-1BF7-5CC8-10C86A168BE4}"/>
+                <a16:creationId xmlns:a16="http://schemas.microsoft.com/office/drawing/2014/main" id="{1426A2A6-89B7-8DB5-08B4-D659B92F5408}"/>
               </a:ext>
             </a:extLst>
           </p:cNvPr>
@@ -3553,8 +3553,8 @@
         </p:nvSpPr>
         <p:spPr>
           <a:xfrm>
-            <a:off x="1143000" y="1270000"/>
-            <a:ext cx="9906000" cy="1292662"/>
+            <a:off x="1016000" y="952500"/>
+            <a:ext cx="10160000" cy="523220"/>
           </a:xfrm>
           <a:prstGeom prst="rect">
             <a:avLst/>
@@ -3568,14 +3568,13 @@
           <a:lstStyle/>
           <a:p>
             <a:r>
-              <a:rPr lang="es-CL" sz="2600" b="1">
+              <a:rPr lang="es-CL" sz="2800" b="1">
                 <a:solidFill>
                   <a:srgbClr val="00D2FF"/>
                 </a:solidFill>
                 <a:latin typeface="Segoe UI" panose="020B0502040204020203" pitchFamily="34" charset="0"/>
               </a:rPr>
-              <a:t>SISTEMA DE CONTROL DE ASISTENCIA
-EvaluaciÃ³n PrÃ¡ctica Etapa 2 - Continuidad Operacional (Semana 11)</a:t>
+              <a:t>SISTEMA DE CONTROL DE ASISTENCIA</a:t>
             </a:r>
           </a:p>
         </p:txBody>
@@ -3585,7 +3584,7 @@
           <p:cNvPr id="6" name="CuadroTexto 5">
             <a:extLst>
               <a:ext uri="{FF2B5EF4-FFF2-40B4-BE49-F238E27FC236}">
-                <a16:creationId xmlns:a16="http://schemas.microsoft.com/office/drawing/2014/main" id="{083102E3-1BE6-5B13-66CB-D37966EE061E}"/>
+                <a16:creationId xmlns:a16="http://schemas.microsoft.com/office/drawing/2014/main" id="{7765A762-1805-6269-287B-A38036495868}"/>
               </a:ext>
             </a:extLst>
           </p:cNvPr>
@@ -3594,8 +3593,8 @@
         </p:nvSpPr>
         <p:spPr>
           <a:xfrm>
-            <a:off x="1143000" y="3048000"/>
-            <a:ext cx="9906000" cy="1600438"/>
+            <a:off x="1016000" y="1651000"/>
+            <a:ext cx="10160000" cy="338554"/>
           </a:xfrm>
           <a:prstGeom prst="rect">
             <a:avLst/>
@@ -3609,27 +3608,194 @@
           <a:lstStyle/>
           <a:p>
             <a:r>
-              <a:rPr lang="es-CL" sz="1400">
+              <a:rPr lang="es-MX" sz="1600" b="1">
                 <a:solidFill>
                   <a:srgbClr val="FFFFFF"/>
                 </a:solidFill>
                 <a:latin typeface="Segoe UI" panose="020B0502040204020203" pitchFamily="34" charset="0"/>
               </a:rPr>
-              <a:t>â€¢ Asignatura: Taller de IntegraciÃ³n de Competencias II (IEI-094)
-â€¢ Integrantes del Equipo:
-    - FabiÃ¡n Mora (Infraestructura, BD SQLite y Continuidad Operacional)
-    - AgustÃ­n CaÃ±as (Desarrollo Frontend WPF MVVM y LÃ³gica de Negocio)
-    - Paul Ferrada (ValidaciÃ³n QA, Pruebas xUnit y ExportaciÃ³n OfimÃ¡tica)
-â€¢ InstituciÃ³n: Instituto Profesional Santo TomÃ¡s
-â€¢ Fecha: Octubre 2026</a:t>
+              <a:t>Evaluación Práctica Etapa 2 - Continuidad Operacional (Semana 11)</a:t>
             </a:r>
+            <a:endParaRPr lang="es-CL" sz="1600" b="1">
+              <a:solidFill>
+                <a:srgbClr val="FFFFFF"/>
+              </a:solidFill>
+              <a:latin typeface="Segoe UI" panose="020B0502040204020203" pitchFamily="34" charset="0"/>
+            </a:endParaRPr>
+          </a:p>
+        </p:txBody>
+      </p:sp>
+      <p:sp>
+        <p:nvSpPr>
+          <p:cNvPr id="7" name="Rectángulo 6">
+            <a:extLst>
+              <a:ext uri="{FF2B5EF4-FFF2-40B4-BE49-F238E27FC236}">
+                <a16:creationId xmlns:a16="http://schemas.microsoft.com/office/drawing/2014/main" id="{F6FA31E1-BFBC-638A-443F-FEF350AC65E7}"/>
+              </a:ext>
+            </a:extLst>
+          </p:cNvPr>
+          <p:cNvSpPr/>
+          <p:nvPr/>
+        </p:nvSpPr>
+        <p:spPr>
+          <a:xfrm>
+            <a:off x="1016000" y="2222500"/>
+            <a:ext cx="10160000" cy="25400"/>
+          </a:xfrm>
+          <a:prstGeom prst="rect">
+            <a:avLst/>
+          </a:prstGeom>
+          <a:solidFill>
+            <a:srgbClr val="2A2A4A"/>
+          </a:solidFill>
+          <a:ln w="19050" cap="flat" cmpd="sng" algn="ctr">
+            <a:noFill/>
+            <a:prstDash val="solid"/>
+            <a:miter lim="800000"/>
+          </a:ln>
+          <a:effectLst/>
+          <a:extLst>
+            <a:ext uri="{91240B29-F687-4F45-9708-019B960494DF}">
+              <a14:hiddenLine xmlns:a14="http://schemas.microsoft.com/office/drawing/2010/main" w="19050" cap="flat" cmpd="sng" algn="ctr">
+                <a:solidFill>
+                  <a:schemeClr val="accent1">
+                    <a:shade val="15000"/>
+                  </a:schemeClr>
+                </a:solidFill>
+                <a:prstDash val="solid"/>
+                <a:miter lim="800000"/>
+              </a14:hiddenLine>
+            </a:ext>
+          </a:extLst>
+        </p:spPr>
+        <p:style>
+          <a:lnRef idx="2">
+            <a:schemeClr val="accent1">
+              <a:shade val="15000"/>
+            </a:schemeClr>
+          </a:lnRef>
+          <a:fillRef idx="1">
+            <a:schemeClr val="accent1"/>
+          </a:fillRef>
+          <a:effectRef idx="0">
+            <a:schemeClr val="accent1"/>
+          </a:effectRef>
+          <a:fontRef idx="minor">
+            <a:schemeClr val="lt1"/>
+          </a:fontRef>
+        </p:style>
+        <p:txBody>
+          <a:bodyPr rtlCol="0" anchor="ctr"/>
+          <a:lstStyle/>
+          <a:p>
+            <a:pPr algn="ctr"/>
+            <a:endParaRPr lang="es-CL"/>
+          </a:p>
+        </p:txBody>
+      </p:sp>
+      <p:sp>
+        <p:nvSpPr>
+          <p:cNvPr id="8" name="CuadroTexto 7">
+            <a:extLst>
+              <a:ext uri="{FF2B5EF4-FFF2-40B4-BE49-F238E27FC236}">
+                <a16:creationId xmlns:a16="http://schemas.microsoft.com/office/drawing/2014/main" id="{95BA8D76-5A1B-F9A3-CD25-72E46848329C}"/>
+              </a:ext>
+            </a:extLst>
+          </p:cNvPr>
+          <p:cNvSpPr txBox="1"/>
+          <p:nvPr/>
+        </p:nvSpPr>
+        <p:spPr>
+          <a:xfrm>
+            <a:off x="1016000" y="2476500"/>
+            <a:ext cx="4826000" cy="1754326"/>
+          </a:xfrm>
+          <a:prstGeom prst="rect">
+            <a:avLst/>
+          </a:prstGeom>
+          <a:noFill/>
+        </p:spPr>
+        <p:txBody>
+          <a:bodyPr vert="horz" wrap="square" rtlCol="0">
+            <a:spAutoFit/>
+          </a:bodyPr>
+          <a:lstStyle/>
+          <a:p>
+            <a:r>
+              <a:rPr lang="es-MX" sz="1350">
+                <a:solidFill>
+                  <a:srgbClr val="8892B0"/>
+                </a:solidFill>
+                <a:latin typeface="Segoe UI" panose="020B0502040204020203" pitchFamily="34" charset="0"/>
+              </a:rPr>
+              <a:t>• Asignatura: Taller de Integración de Competencias II (IEI-094)
+• Institución: Instituto Profesional Santo Tomás
+• Fecha: Semana 11 / Octubre 2026
+</a:t>
+            </a:r>
+            <a:endParaRPr lang="es-CL" sz="1350">
+              <a:solidFill>
+                <a:srgbClr val="8892B0"/>
+              </a:solidFill>
+              <a:latin typeface="Segoe UI" panose="020B0502040204020203" pitchFamily="34" charset="0"/>
+            </a:endParaRPr>
+          </a:p>
+        </p:txBody>
+      </p:sp>
+      <p:sp>
+        <p:nvSpPr>
+          <p:cNvPr id="9" name="CuadroTexto 8">
+            <a:extLst>
+              <a:ext uri="{FF2B5EF4-FFF2-40B4-BE49-F238E27FC236}">
+                <a16:creationId xmlns:a16="http://schemas.microsoft.com/office/drawing/2014/main" id="{A3A8FF83-3A18-76A2-8B4F-AE6C01968877}"/>
+              </a:ext>
+            </a:extLst>
+          </p:cNvPr>
+          <p:cNvSpPr txBox="1"/>
+          <p:nvPr/>
+        </p:nvSpPr>
+        <p:spPr>
+          <a:xfrm>
+            <a:off x="6096000" y="2476500"/>
+            <a:ext cx="5207000" cy="1823576"/>
+          </a:xfrm>
+          <a:prstGeom prst="rect">
+            <a:avLst/>
+          </a:prstGeom>
+          <a:noFill/>
+        </p:spPr>
+        <p:txBody>
+          <a:bodyPr vert="horz" wrap="square" rtlCol="0">
+            <a:spAutoFit/>
+          </a:bodyPr>
+          <a:lstStyle/>
+          <a:p>
+            <a:r>
+              <a:rPr lang="es-MX" sz="1250">
+                <a:solidFill>
+                  <a:srgbClr val="FFFFFF"/>
+                </a:solidFill>
+                <a:latin typeface="Segoe UI" panose="020B0502040204020203" pitchFamily="34" charset="0"/>
+              </a:rPr>
+              <a:t>Equipo de Desarrollo:
+• Fabián Mora - Infraestructura, BD SQLite y Continuidad Operacional
+• Agustín Cañas - Desarrollo Frontend WPF MVVM y Lógica de Negocio
+• Paul Ferrada - Validación QA, Pruebas xUnit y Exportación Ofimática
+</a:t>
+            </a:r>
+            <a:endParaRPr lang="es-CL" sz="1250">
+              <a:solidFill>
+                <a:srgbClr val="FFFFFF"/>
+              </a:solidFill>
+              <a:latin typeface="Segoe UI" panose="020B0502040204020203" pitchFamily="34" charset="0"/>
+            </a:endParaRPr>
           </a:p>
         </p:txBody>
       </p:sp>
     </p:spTree>
     <p:extLst>
       <p:ext uri="{BB962C8B-B14F-4D97-AF65-F5344CB8AC3E}">
-        <p14:creationId xmlns:p14="http://schemas.microsoft.com/office/powerpoint/2010/main" val="3079682715"/>
+        <p14:creationId xmlns:p14="http://schemas.microsoft.com/office/powerpoint/2010/main" val="844616036"/>
       </p:ext>
     </p:extLst>
   </p:cSld>
@@ -3661,7 +3827,7 @@
           <p:cNvPr id="2" name="Rectángulo 1">
             <a:extLst>
               <a:ext uri="{FF2B5EF4-FFF2-40B4-BE49-F238E27FC236}">
-                <a16:creationId xmlns:a16="http://schemas.microsoft.com/office/drawing/2014/main" id="{B2B33AC8-8DA8-7311-302A-F627E99A4204}"/>
+                <a16:creationId xmlns:a16="http://schemas.microsoft.com/office/drawing/2014/main" id="{AE7DF633-69CE-3743-3386-85B031A3D1EF}"/>
               </a:ext>
             </a:extLst>
           </p:cNvPr>
@@ -3729,7 +3895,7 @@
           <p:cNvPr id="3" name="Rectángulo 2">
             <a:extLst>
               <a:ext uri="{FF2B5EF4-FFF2-40B4-BE49-F238E27FC236}">
-                <a16:creationId xmlns:a16="http://schemas.microsoft.com/office/drawing/2014/main" id="{BEAD5863-4725-168C-CC0F-3767E80B87E4}"/>
+                <a16:creationId xmlns:a16="http://schemas.microsoft.com/office/drawing/2014/main" id="{7872524B-FB74-447B-4F56-284ADC3604D9}"/>
               </a:ext>
             </a:extLst>
           </p:cNvPr>
@@ -3738,8 +3904,8 @@
         </p:nvSpPr>
         <p:spPr>
           <a:xfrm>
-            <a:off x="508000" y="317500"/>
-            <a:ext cx="76200" cy="571500"/>
+            <a:off x="0" y="0"/>
+            <a:ext cx="12192000" cy="50800"/>
           </a:xfrm>
           <a:prstGeom prst="rect">
             <a:avLst/>
@@ -3794,106 +3960,26 @@
       </p:sp>
       <p:sp>
         <p:nvSpPr>
-          <p:cNvPr id="4" name="CuadroTexto 3">
-            <a:extLst>
-              <a:ext uri="{FF2B5EF4-FFF2-40B4-BE49-F238E27FC236}">
-                <a16:creationId xmlns:a16="http://schemas.microsoft.com/office/drawing/2014/main" id="{10568D0A-D120-F40E-CAA0-065495DA2067}"/>
-              </a:ext>
-            </a:extLst>
-          </p:cNvPr>
-          <p:cNvSpPr txBox="1"/>
+          <p:cNvPr id="4" name="Rectángulo 3">
+            <a:extLst>
+              <a:ext uri="{FF2B5EF4-FFF2-40B4-BE49-F238E27FC236}">
+                <a16:creationId xmlns:a16="http://schemas.microsoft.com/office/drawing/2014/main" id="{88DFA1F8-519C-34A0-9548-3D6E16960FC5}"/>
+              </a:ext>
+            </a:extLst>
+          </p:cNvPr>
+          <p:cNvSpPr/>
           <p:nvPr/>
         </p:nvSpPr>
         <p:spPr>
           <a:xfrm>
-            <a:off x="698500" y="254000"/>
-            <a:ext cx="10795000" cy="430887"/>
-          </a:xfrm>
-          <a:prstGeom prst="rect">
-            <a:avLst/>
-          </a:prstGeom>
-          <a:noFill/>
-        </p:spPr>
-        <p:txBody>
-          <a:bodyPr vert="horz" rtlCol="0">
-            <a:spAutoFit/>
-          </a:bodyPr>
-          <a:lstStyle/>
-          <a:p>
-            <a:r>
-              <a:rPr lang="es-CL" sz="2200" b="1">
-                <a:solidFill>
-                  <a:srgbClr val="FFFFFF"/>
-                </a:solidFill>
-                <a:latin typeface="Segoe UI" panose="020B0502040204020203" pitchFamily="34" charset="0"/>
-              </a:rPr>
-              <a:t>1. Contexto Empresarial y Continuidad Operacional</a:t>
-            </a:r>
-          </a:p>
-        </p:txBody>
-      </p:sp>
-      <p:sp>
-        <p:nvSpPr>
-          <p:cNvPr id="5" name="CuadroTexto 4">
-            <a:extLst>
-              <a:ext uri="{FF2B5EF4-FFF2-40B4-BE49-F238E27FC236}">
-                <a16:creationId xmlns:a16="http://schemas.microsoft.com/office/drawing/2014/main" id="{91E4B627-17F4-1CAD-B9D1-F79A201AF368}"/>
-              </a:ext>
-            </a:extLst>
-          </p:cNvPr>
-          <p:cNvSpPr txBox="1"/>
-          <p:nvPr/>
-        </p:nvSpPr>
-        <p:spPr>
-          <a:xfrm>
-            <a:off x="698500" y="660400"/>
-            <a:ext cx="10795000" cy="276999"/>
-          </a:xfrm>
-          <a:prstGeom prst="rect">
-            <a:avLst/>
-          </a:prstGeom>
-          <a:noFill/>
-        </p:spPr>
-        <p:txBody>
-          <a:bodyPr vert="horz" rtlCol="0">
-            <a:spAutoFit/>
-          </a:bodyPr>
-          <a:lstStyle/>
-          <a:p>
-            <a:r>
-              <a:rPr lang="es-CL" sz="1200">
-                <a:solidFill>
-                  <a:srgbClr val="8892B0"/>
-                </a:solidFill>
-                <a:latin typeface="Segoe UI" panose="020B0502040204020203" pitchFamily="34" charset="0"/>
-              </a:rPr>
-              <a:t>Caso: SoluciÃ³n de Asistencia para 25 trabajadores de empresa de productos quÃ­micos</a:t>
-            </a:r>
-          </a:p>
-        </p:txBody>
-      </p:sp>
-      <p:sp>
-        <p:nvSpPr>
-          <p:cNvPr id="6" name="Rectángulo 5">
-            <a:extLst>
-              <a:ext uri="{FF2B5EF4-FFF2-40B4-BE49-F238E27FC236}">
-                <a16:creationId xmlns:a16="http://schemas.microsoft.com/office/drawing/2014/main" id="{4847784C-8E69-EAF7-2535-32CF5F8F0270}"/>
-              </a:ext>
-            </a:extLst>
-          </p:cNvPr>
-          <p:cNvSpPr/>
-          <p:nvPr/>
-        </p:nvSpPr>
-        <p:spPr>
-          <a:xfrm>
-            <a:off x="762000" y="1270000"/>
-            <a:ext cx="5080000" cy="4953000"/>
+            <a:off x="508000" y="304800"/>
+            <a:ext cx="76200" cy="533400"/>
           </a:xfrm>
           <a:prstGeom prst="rect">
             <a:avLst/>
           </a:prstGeom>
           <a:solidFill>
-            <a:srgbClr val="1A1A2E"/>
+            <a:srgbClr val="00D2FF"/>
           </a:solidFill>
           <a:ln w="19050" cap="flat" cmpd="sng" algn="ctr">
             <a:noFill/>
@@ -3942,10 +4028,10 @@
       </p:sp>
       <p:sp>
         <p:nvSpPr>
-          <p:cNvPr id="7" name="CuadroTexto 6">
-            <a:extLst>
-              <a:ext uri="{FF2B5EF4-FFF2-40B4-BE49-F238E27FC236}">
-                <a16:creationId xmlns:a16="http://schemas.microsoft.com/office/drawing/2014/main" id="{92425197-00B8-EA8B-4AFD-8EEB2EF1E8C1}"/>
+          <p:cNvPr id="5" name="CuadroTexto 4">
+            <a:extLst>
+              <a:ext uri="{FF2B5EF4-FFF2-40B4-BE49-F238E27FC236}">
+                <a16:creationId xmlns:a16="http://schemas.microsoft.com/office/drawing/2014/main" id="{9B4A49EE-AF45-86D7-C2B4-FEBFF973DB7D}"/>
               </a:ext>
             </a:extLst>
           </p:cNvPr>
@@ -3954,8 +4040,8 @@
         </p:nvSpPr>
         <p:spPr>
           <a:xfrm>
-            <a:off x="1016000" y="1524000"/>
-            <a:ext cx="4572000" cy="2893100"/>
+            <a:off x="698500" y="228600"/>
+            <a:ext cx="10922000" cy="415498"/>
           </a:xfrm>
           <a:prstGeom prst="rect">
             <a:avLst/>
@@ -3963,34 +4049,75 @@
           <a:noFill/>
         </p:spPr>
         <p:txBody>
-          <a:bodyPr vert="horz" wrap="square" rtlCol="0">
+          <a:bodyPr vert="horz" rtlCol="0">
             <a:spAutoFit/>
           </a:bodyPr>
           <a:lstStyle/>
           <a:p>
             <a:r>
-              <a:rPr lang="es-CL" sz="1300">
+              <a:rPr lang="es-CL" sz="2100" b="1">
                 <a:solidFill>
                   <a:srgbClr val="FFFFFF"/>
                 </a:solidFill>
                 <a:latin typeface="Segoe UI" panose="020B0502040204020203" pitchFamily="34" charset="0"/>
               </a:rPr>
-              <a:t>REQUERIMIENTOS DEL CLIENTE
-â€¢ DotaciÃ³n: 25 colaboradores con necesidad de marcaje expedito de entrada y salida.
-â€¢ Normativa Laboral: Cumplimiento legal de registro horario fidedigno.
-â€¢ ReporterÃ­a de RRHH: DetecciÃ³n automÃ¡tica de atrasos (&gt; 9:30 AM), salidas anticipadas (&lt; 17:30 PM) e inasistencias en dÃ­as laborables.
-â€¢ IntegraciÃ³n OfimÃ¡tica: ExportaciÃ³n de planillas compatibles directamente con Microsoft Excel para cÃ¡lculo de nÃ³minas.
-â€¢ Resiliencia: Continuidad operativa aun ante caÃ­das temporales de la red externa.</a:t>
+              <a:t>1. Contexto Empresarial y Continuidad Operacional</a:t>
             </a:r>
           </a:p>
         </p:txBody>
       </p:sp>
       <p:sp>
         <p:nvSpPr>
-          <p:cNvPr id="8" name="Rectángulo 7">
-            <a:extLst>
-              <a:ext uri="{FF2B5EF4-FFF2-40B4-BE49-F238E27FC236}">
-                <a16:creationId xmlns:a16="http://schemas.microsoft.com/office/drawing/2014/main" id="{4AFFAD6D-C4BE-2C91-9134-D4347ACDEDE8}"/>
+          <p:cNvPr id="6" name="CuadroTexto 5">
+            <a:extLst>
+              <a:ext uri="{FF2B5EF4-FFF2-40B4-BE49-F238E27FC236}">
+                <a16:creationId xmlns:a16="http://schemas.microsoft.com/office/drawing/2014/main" id="{0D14FE14-C90F-2BDC-74CF-70E4B5AE56D0}"/>
+              </a:ext>
+            </a:extLst>
+          </p:cNvPr>
+          <p:cNvSpPr txBox="1"/>
+          <p:nvPr/>
+        </p:nvSpPr>
+        <p:spPr>
+          <a:xfrm>
+            <a:off x="698500" y="609600"/>
+            <a:ext cx="10922000" cy="269304"/>
+          </a:xfrm>
+          <a:prstGeom prst="rect">
+            <a:avLst/>
+          </a:prstGeom>
+          <a:noFill/>
+        </p:spPr>
+        <p:txBody>
+          <a:bodyPr vert="horz" rtlCol="0">
+            <a:spAutoFit/>
+          </a:bodyPr>
+          <a:lstStyle/>
+          <a:p>
+            <a:r>
+              <a:rPr lang="es-MX" sz="1150">
+                <a:solidFill>
+                  <a:srgbClr val="00D2FF"/>
+                </a:solidFill>
+                <a:latin typeface="Segoe UI" panose="020B0502040204020203" pitchFamily="34" charset="0"/>
+              </a:rPr>
+              <a:t>Caso de Aplicación: Empresa de productos químicos (25 trabajadores)</a:t>
+            </a:r>
+            <a:endParaRPr lang="es-CL" sz="1150">
+              <a:solidFill>
+                <a:srgbClr val="00D2FF"/>
+              </a:solidFill>
+              <a:latin typeface="Segoe UI" panose="020B0502040204020203" pitchFamily="34" charset="0"/>
+            </a:endParaRPr>
+          </a:p>
+        </p:txBody>
+      </p:sp>
+      <p:sp>
+        <p:nvSpPr>
+          <p:cNvPr id="7" name="Rectángulo 6">
+            <a:extLst>
+              <a:ext uri="{FF2B5EF4-FFF2-40B4-BE49-F238E27FC236}">
+                <a16:creationId xmlns:a16="http://schemas.microsoft.com/office/drawing/2014/main" id="{75607F3F-6848-42EE-067D-677A5B9432ED}"/>
               </a:ext>
             </a:extLst>
           </p:cNvPr>
@@ -3999,8 +4126,8 @@
         </p:nvSpPr>
         <p:spPr>
           <a:xfrm>
-            <a:off x="6350000" y="1270000"/>
-            <a:ext cx="5080000" cy="4953000"/>
+            <a:off x="635000" y="1143000"/>
+            <a:ext cx="5270500" cy="5207000"/>
           </a:xfrm>
           <a:prstGeom prst="rect">
             <a:avLst/>
@@ -4008,25 +4135,11 @@
           <a:solidFill>
             <a:srgbClr val="1A1A2E"/>
           </a:solidFill>
-          <a:ln w="19050" cap="flat" cmpd="sng" algn="ctr">
-            <a:noFill/>
-            <a:prstDash val="solid"/>
-            <a:miter lim="800000"/>
+          <a:ln>
+            <a:solidFill>
+              <a:srgbClr val="2A2A4A"/>
+            </a:solidFill>
           </a:ln>
-          <a:effectLst/>
-          <a:extLst>
-            <a:ext uri="{91240B29-F687-4F45-9708-019B960494DF}">
-              <a14:hiddenLine xmlns:a14="http://schemas.microsoft.com/office/drawing/2010/main" w="19050" cap="flat" cmpd="sng" algn="ctr">
-                <a:solidFill>
-                  <a:schemeClr val="accent1">
-                    <a:shade val="15000"/>
-                  </a:schemeClr>
-                </a:solidFill>
-                <a:prstDash val="solid"/>
-                <a:miter lim="800000"/>
-              </a14:hiddenLine>
-            </a:ext>
-          </a:extLst>
         </p:spPr>
         <p:style>
           <a:lnRef idx="2">
@@ -4055,10 +4168,10 @@
       </p:sp>
       <p:sp>
         <p:nvSpPr>
-          <p:cNvPr id="9" name="CuadroTexto 8">
-            <a:extLst>
-              <a:ext uri="{FF2B5EF4-FFF2-40B4-BE49-F238E27FC236}">
-                <a16:creationId xmlns:a16="http://schemas.microsoft.com/office/drawing/2014/main" id="{7495D0E6-1FE5-B10C-B0F8-5DEF97BFA4CF}"/>
+          <p:cNvPr id="8" name="CuadroTexto 7">
+            <a:extLst>
+              <a:ext uri="{FF2B5EF4-FFF2-40B4-BE49-F238E27FC236}">
+                <a16:creationId xmlns:a16="http://schemas.microsoft.com/office/drawing/2014/main" id="{F7F9C114-7E8B-43F1-BC48-FF9CBF76B9C5}"/>
               </a:ext>
             </a:extLst>
           </p:cNvPr>
@@ -4067,8 +4180,8 @@
         </p:nvSpPr>
         <p:spPr>
           <a:xfrm>
-            <a:off x="6604000" y="1524000"/>
-            <a:ext cx="4572000" cy="2492990"/>
+            <a:off x="889000" y="1333500"/>
+            <a:ext cx="4762500" cy="3416320"/>
           </a:xfrm>
           <a:prstGeom prst="rect">
             <a:avLst/>
@@ -4082,26 +4195,139 @@
           <a:lstStyle/>
           <a:p>
             <a:r>
-              <a:rPr lang="es-CL" sz="1300">
+              <a:rPr lang="es-MX" sz="1200">
                 <a:solidFill>
                   <a:srgbClr val="FFFFFF"/>
                 </a:solidFill>
                 <a:latin typeface="Segoe UI" panose="020B0502040204020203" pitchFamily="34" charset="0"/>
               </a:rPr>
-              <a:t>GARANTÃA DE CONTINUIDAD (CE3N2)
-â€¢ SO Estandarizado: Windows 10/11 Pro 64-bit con runtime .NET 10 verificado.
-â€¢ Persistencia Local SQLite: Motor relacional embebido libre de latencias y con cero configuraciÃ³n de servidor.
-â€¢ Seguridad de Accesos: ContraseÃ±as encriptadas con algoritmo hash BCrypt.
-â€¢ Manejo Robusto de Excepciones: Captura global de eventos no controlados con registro en crash.log.
-â€¢ SincronizaciÃ³n Horaria: Reloj local sincronizado por protocolo NTP oficial para registros inalterables.</a:t>
+              <a:t>REQUERIMIENTOS DEL CLIENTE
+• Dotación: 25 colaboradores con necesidad de marcaje expedito de entrada y salida.
+• Normativa Laboral: Cumplimiento legal de registro fidedigno de jornada de trabajo.
+• Reportería para RRHH: Detección automática de atrasos (&gt; 9:30 AM), salidas anticipadas (&lt; 17:30 PM) e inasistencias.
+• Integración con Ofimática: Exportación de planillas compatibles con Microsoft Excel para liquidaciones.
+• Resiliencia: Operatividad garantizada aun ante interrupciones de conectividad externa.
+</a:t>
             </a:r>
+            <a:endParaRPr lang="es-CL" sz="1200">
+              <a:solidFill>
+                <a:srgbClr val="FFFFFF"/>
+              </a:solidFill>
+              <a:latin typeface="Segoe UI" panose="020B0502040204020203" pitchFamily="34" charset="0"/>
+            </a:endParaRPr>
+          </a:p>
+        </p:txBody>
+      </p:sp>
+      <p:sp>
+        <p:nvSpPr>
+          <p:cNvPr id="9" name="Rectángulo 8">
+            <a:extLst>
+              <a:ext uri="{FF2B5EF4-FFF2-40B4-BE49-F238E27FC236}">
+                <a16:creationId xmlns:a16="http://schemas.microsoft.com/office/drawing/2014/main" id="{B64CCD59-A44A-2CB2-F577-61BBAC78F4D9}"/>
+              </a:ext>
+            </a:extLst>
+          </p:cNvPr>
+          <p:cNvSpPr/>
+          <p:nvPr/>
+        </p:nvSpPr>
+        <p:spPr>
+          <a:xfrm>
+            <a:off x="6286500" y="1143000"/>
+            <a:ext cx="5270500" cy="5207000"/>
+          </a:xfrm>
+          <a:prstGeom prst="rect">
+            <a:avLst/>
+          </a:prstGeom>
+          <a:solidFill>
+            <a:srgbClr val="1A1A2E"/>
+          </a:solidFill>
+          <a:ln>
+            <a:solidFill>
+              <a:srgbClr val="2A2A4A"/>
+            </a:solidFill>
+          </a:ln>
+        </p:spPr>
+        <p:style>
+          <a:lnRef idx="2">
+            <a:schemeClr val="accent1">
+              <a:shade val="15000"/>
+            </a:schemeClr>
+          </a:lnRef>
+          <a:fillRef idx="1">
+            <a:schemeClr val="accent1"/>
+          </a:fillRef>
+          <a:effectRef idx="0">
+            <a:schemeClr val="accent1"/>
+          </a:effectRef>
+          <a:fontRef idx="minor">
+            <a:schemeClr val="lt1"/>
+          </a:fontRef>
+        </p:style>
+        <p:txBody>
+          <a:bodyPr rtlCol="0" anchor="ctr"/>
+          <a:lstStyle/>
+          <a:p>
+            <a:pPr algn="ctr"/>
+            <a:endParaRPr lang="es-CL"/>
+          </a:p>
+        </p:txBody>
+      </p:sp>
+      <p:sp>
+        <p:nvSpPr>
+          <p:cNvPr id="10" name="CuadroTexto 9">
+            <a:extLst>
+              <a:ext uri="{FF2B5EF4-FFF2-40B4-BE49-F238E27FC236}">
+                <a16:creationId xmlns:a16="http://schemas.microsoft.com/office/drawing/2014/main" id="{3AC0E44F-68C4-5CB4-9603-6E08995B97CA}"/>
+              </a:ext>
+            </a:extLst>
+          </p:cNvPr>
+          <p:cNvSpPr txBox="1"/>
+          <p:nvPr/>
+        </p:nvSpPr>
+        <p:spPr>
+          <a:xfrm>
+            <a:off x="6540500" y="1333500"/>
+            <a:ext cx="4762500" cy="3416320"/>
+          </a:xfrm>
+          <a:prstGeom prst="rect">
+            <a:avLst/>
+          </a:prstGeom>
+          <a:noFill/>
+        </p:spPr>
+        <p:txBody>
+          <a:bodyPr vert="horz" wrap="square" rtlCol="0">
+            <a:spAutoFit/>
+          </a:bodyPr>
+          <a:lstStyle/>
+          <a:p>
+            <a:r>
+              <a:rPr lang="es-MX" sz="1200">
+                <a:solidFill>
+                  <a:srgbClr val="FFFFFF"/>
+                </a:solidFill>
+                <a:latin typeface="Segoe UI" panose="020B0502040204020203" pitchFamily="34" charset="0"/>
+              </a:rPr>
+              <a:t>GARANTÍA DE CONTINUIDAD (CE3N2)
+• SO Estandarizado: Windows 10/11 Pro 64-bit con runtime .NET 10 verificado.
+• Persistencia Local SQLite: Motor relacional embebido local, libre de caídas de red y latencias.
+• Seguridad de Credenciales: Contraseñas cifradas con algoritmo unidireccional BCrypt.
+• Manejo Global de Errores: Captura de excepciones no controladas con registro en crash.log.
+• Sincronización Horaria: Reloj local sincronizado por protocolo NTP para registros inalterables.
+</a:t>
+            </a:r>
+            <a:endParaRPr lang="es-CL" sz="1200">
+              <a:solidFill>
+                <a:srgbClr val="FFFFFF"/>
+              </a:solidFill>
+              <a:latin typeface="Segoe UI" panose="020B0502040204020203" pitchFamily="34" charset="0"/>
+            </a:endParaRPr>
           </a:p>
         </p:txBody>
       </p:sp>
     </p:spTree>
     <p:extLst>
       <p:ext uri="{BB962C8B-B14F-4D97-AF65-F5344CB8AC3E}">
-        <p14:creationId xmlns:p14="http://schemas.microsoft.com/office/powerpoint/2010/main" val="4064820013"/>
+        <p14:creationId xmlns:p14="http://schemas.microsoft.com/office/powerpoint/2010/main" val="407047150"/>
       </p:ext>
     </p:extLst>
   </p:cSld>
@@ -4133,7 +4359,7 @@
           <p:cNvPr id="2" name="Rectángulo 1">
             <a:extLst>
               <a:ext uri="{FF2B5EF4-FFF2-40B4-BE49-F238E27FC236}">
-                <a16:creationId xmlns:a16="http://schemas.microsoft.com/office/drawing/2014/main" id="{24C5F626-F9D2-EF2E-67FF-AF3997097E1D}"/>
+                <a16:creationId xmlns:a16="http://schemas.microsoft.com/office/drawing/2014/main" id="{5031738A-6FA5-4E5D-21CC-B5FD6E36895F}"/>
               </a:ext>
             </a:extLst>
           </p:cNvPr>
@@ -4201,7 +4427,7 @@
           <p:cNvPr id="3" name="Rectángulo 2">
             <a:extLst>
               <a:ext uri="{FF2B5EF4-FFF2-40B4-BE49-F238E27FC236}">
-                <a16:creationId xmlns:a16="http://schemas.microsoft.com/office/drawing/2014/main" id="{CA70C8B2-2EE5-21C0-015B-8B205BDFC36B}"/>
+                <a16:creationId xmlns:a16="http://schemas.microsoft.com/office/drawing/2014/main" id="{47D18BEF-FF4B-F548-118A-71118B481C61}"/>
               </a:ext>
             </a:extLst>
           </p:cNvPr>
@@ -4210,8 +4436,8 @@
         </p:nvSpPr>
         <p:spPr>
           <a:xfrm>
-            <a:off x="508000" y="317500"/>
-            <a:ext cx="76200" cy="571500"/>
+            <a:off x="0" y="0"/>
+            <a:ext cx="12192000" cy="50800"/>
           </a:xfrm>
           <a:prstGeom prst="rect">
             <a:avLst/>
@@ -4266,10 +4492,78 @@
       </p:sp>
       <p:sp>
         <p:nvSpPr>
-          <p:cNvPr id="4" name="CuadroTexto 3">
-            <a:extLst>
-              <a:ext uri="{FF2B5EF4-FFF2-40B4-BE49-F238E27FC236}">
-                <a16:creationId xmlns:a16="http://schemas.microsoft.com/office/drawing/2014/main" id="{777A33BA-8E6E-C97D-1E24-4BDCE7CAD961}"/>
+          <p:cNvPr id="4" name="Rectángulo 3">
+            <a:extLst>
+              <a:ext uri="{FF2B5EF4-FFF2-40B4-BE49-F238E27FC236}">
+                <a16:creationId xmlns:a16="http://schemas.microsoft.com/office/drawing/2014/main" id="{E3CBC24F-58E6-9630-67A6-3948D2761C4E}"/>
+              </a:ext>
+            </a:extLst>
+          </p:cNvPr>
+          <p:cNvSpPr/>
+          <p:nvPr/>
+        </p:nvSpPr>
+        <p:spPr>
+          <a:xfrm>
+            <a:off x="508000" y="304800"/>
+            <a:ext cx="76200" cy="533400"/>
+          </a:xfrm>
+          <a:prstGeom prst="rect">
+            <a:avLst/>
+          </a:prstGeom>
+          <a:solidFill>
+            <a:srgbClr val="00D2FF"/>
+          </a:solidFill>
+          <a:ln w="19050" cap="flat" cmpd="sng" algn="ctr">
+            <a:noFill/>
+            <a:prstDash val="solid"/>
+            <a:miter lim="800000"/>
+          </a:ln>
+          <a:effectLst/>
+          <a:extLst>
+            <a:ext uri="{91240B29-F687-4F45-9708-019B960494DF}">
+              <a14:hiddenLine xmlns:a14="http://schemas.microsoft.com/office/drawing/2010/main" w="19050" cap="flat" cmpd="sng" algn="ctr">
+                <a:solidFill>
+                  <a:schemeClr val="accent1">
+                    <a:shade val="15000"/>
+                  </a:schemeClr>
+                </a:solidFill>
+                <a:prstDash val="solid"/>
+                <a:miter lim="800000"/>
+              </a14:hiddenLine>
+            </a:ext>
+          </a:extLst>
+        </p:spPr>
+        <p:style>
+          <a:lnRef idx="2">
+            <a:schemeClr val="accent1">
+              <a:shade val="15000"/>
+            </a:schemeClr>
+          </a:lnRef>
+          <a:fillRef idx="1">
+            <a:schemeClr val="accent1"/>
+          </a:fillRef>
+          <a:effectRef idx="0">
+            <a:schemeClr val="accent1"/>
+          </a:effectRef>
+          <a:fontRef idx="minor">
+            <a:schemeClr val="lt1"/>
+          </a:fontRef>
+        </p:style>
+        <p:txBody>
+          <a:bodyPr rtlCol="0" anchor="ctr"/>
+          <a:lstStyle/>
+          <a:p>
+            <a:pPr algn="ctr"/>
+            <a:endParaRPr lang="es-CL"/>
+          </a:p>
+        </p:txBody>
+      </p:sp>
+      <p:sp>
+        <p:nvSpPr>
+          <p:cNvPr id="5" name="CuadroTexto 4">
+            <a:extLst>
+              <a:ext uri="{FF2B5EF4-FFF2-40B4-BE49-F238E27FC236}">
+                <a16:creationId xmlns:a16="http://schemas.microsoft.com/office/drawing/2014/main" id="{F5087B0B-4035-3CA7-02F8-E919E35BD53F}"/>
               </a:ext>
             </a:extLst>
           </p:cNvPr>
@@ -4278,8 +4572,8 @@
         </p:nvSpPr>
         <p:spPr>
           <a:xfrm>
-            <a:off x="698500" y="254000"/>
-            <a:ext cx="10795000" cy="430887"/>
+            <a:off x="698500" y="228600"/>
+            <a:ext cx="10922000" cy="415498"/>
           </a:xfrm>
           <a:prstGeom prst="rect">
             <a:avLst/>
@@ -4293,15 +4587,15 @@
           <a:lstStyle/>
           <a:p>
             <a:r>
-              <a:rPr lang="es-MX" sz="2200" b="1">
+              <a:rPr lang="es-MX" sz="2100" b="1">
                 <a:solidFill>
                   <a:srgbClr val="FFFFFF"/>
                 </a:solidFill>
                 <a:latin typeface="Segoe UI" panose="020B0502040204020203" pitchFamily="34" charset="0"/>
               </a:rPr>
-              <a:t>2. Carta Gantt de la PlanificaciÃ³n (Actividad 2.2)</a:t>
+              <a:t>2. Carta Gantt de la Planificación (Actividad 2.2)</a:t>
             </a:r>
-            <a:endParaRPr lang="es-CL" sz="2200" b="1">
+            <a:endParaRPr lang="es-CL" sz="2100" b="1">
               <a:solidFill>
                 <a:srgbClr val="FFFFFF"/>
               </a:solidFill>
@@ -4312,10 +4606,10 @@
       </p:sp>
       <p:sp>
         <p:nvSpPr>
-          <p:cNvPr id="5" name="CuadroTexto 4">
-            <a:extLst>
-              <a:ext uri="{FF2B5EF4-FFF2-40B4-BE49-F238E27FC236}">
-                <a16:creationId xmlns:a16="http://schemas.microsoft.com/office/drawing/2014/main" id="{89CB0BEA-C654-715C-4834-BEF8C8DB579B}"/>
+          <p:cNvPr id="6" name="CuadroTexto 5">
+            <a:extLst>
+              <a:ext uri="{FF2B5EF4-FFF2-40B4-BE49-F238E27FC236}">
+                <a16:creationId xmlns:a16="http://schemas.microsoft.com/office/drawing/2014/main" id="{92C409AB-2696-589B-0832-59ED30FA740C}"/>
               </a:ext>
             </a:extLst>
           </p:cNvPr>
@@ -4324,8 +4618,8 @@
         </p:nvSpPr>
         <p:spPr>
           <a:xfrm>
-            <a:off x="698500" y="660400"/>
-            <a:ext cx="10795000" cy="276999"/>
+            <a:off x="698500" y="609600"/>
+            <a:ext cx="10922000" cy="269304"/>
           </a:xfrm>
           <a:prstGeom prst="rect">
             <a:avLst/>
@@ -4339,23 +4633,29 @@
           <a:lstStyle/>
           <a:p>
             <a:r>
-              <a:rPr lang="es-CL" sz="1200">
+              <a:rPr lang="es-MX" sz="1150">
                 <a:solidFill>
-                  <a:srgbClr val="8892B0"/>
+                  <a:srgbClr val="00D2FF"/>
                 </a:solidFill>
                 <a:latin typeface="Segoe UI" panose="020B0502040204020203" pitchFamily="34" charset="0"/>
               </a:rPr>
-              <a:t>PlanificaciÃ³n cronolÃ³gica de actividades 2.2 a 2.6 y distribuciÃ³n de responsabilidades</a:t>
+              <a:t>Cronograma de ejecución de actividades 2.2 a 2.6 y distribución de responsabilidades</a:t>
             </a:r>
+            <a:endParaRPr lang="es-CL" sz="1150">
+              <a:solidFill>
+                <a:srgbClr val="00D2FF"/>
+              </a:solidFill>
+              <a:latin typeface="Segoe UI" panose="020B0502040204020203" pitchFamily="34" charset="0"/>
+            </a:endParaRPr>
           </a:p>
         </p:txBody>
       </p:sp>
       <p:graphicFrame>
         <p:nvGraphicFramePr>
-          <p:cNvPr id="6" name="Tabla 5">
-            <a:extLst>
-              <a:ext uri="{FF2B5EF4-FFF2-40B4-BE49-F238E27FC236}">
-                <a16:creationId xmlns:a16="http://schemas.microsoft.com/office/drawing/2014/main" id="{BCEC3CFC-706B-35C4-895C-6D6B462BE1A4}"/>
+          <p:cNvPr id="7" name="Tabla 6">
+            <a:extLst>
+              <a:ext uri="{FF2B5EF4-FFF2-40B4-BE49-F238E27FC236}">
+                <a16:creationId xmlns:a16="http://schemas.microsoft.com/office/drawing/2014/main" id="{81990D4B-DD5A-6966-F61F-6D8BA906B2CB}"/>
               </a:ext>
             </a:extLst>
           </p:cNvPr>
@@ -4365,14 +4665,14 @@
           <p:nvPr>
             <p:extLst>
               <p:ext uri="{D42A27DB-BD31-4B8C-83A1-F6EECF244321}">
-                <p14:modId xmlns:p14="http://schemas.microsoft.com/office/powerpoint/2010/main" val="3729349169"/>
+                <p14:modId xmlns:p14="http://schemas.microsoft.com/office/powerpoint/2010/main" val="1718941773"/>
               </p:ext>
             </p:extLst>
           </p:nvPr>
         </p:nvGraphicFramePr>
         <p:xfrm>
-          <a:off x="762000" y="1397000"/>
-          <a:ext cx="10668000" cy="4572000"/>
+          <a:off x="635000" y="1206500"/>
+          <a:ext cx="10922000" cy="5016500"/>
         </p:xfrm>
         <a:graphic>
           <a:graphicData uri="http://schemas.openxmlformats.org/drawingml/2006/table">
@@ -4381,60 +4681,61 @@
                 <a:tableStyleId>{5C22544A-7EE6-4342-B048-85BDC9FD1C3A}</a:tableStyleId>
               </a:tblPr>
               <a:tblGrid>
-                <a:gridCol w="1778000">
+                <a:gridCol w="1820333">
                   <a:extLst>
                     <a:ext uri="{9D8B030D-6E8A-4147-A177-3AD203B41FA5}">
-                      <a16:colId xmlns:a16="http://schemas.microsoft.com/office/drawing/2014/main" val="2661273418"/>
+                      <a16:colId xmlns:a16="http://schemas.microsoft.com/office/drawing/2014/main" val="584075803"/>
                     </a:ext>
                   </a:extLst>
                 </a:gridCol>
-                <a:gridCol w="1778000">
+                <a:gridCol w="1820333">
                   <a:extLst>
                     <a:ext uri="{9D8B030D-6E8A-4147-A177-3AD203B41FA5}">
-                      <a16:colId xmlns:a16="http://schemas.microsoft.com/office/drawing/2014/main" val="1046518715"/>
+                      <a16:colId xmlns:a16="http://schemas.microsoft.com/office/drawing/2014/main" val="1912443238"/>
                     </a:ext>
                   </a:extLst>
                 </a:gridCol>
-                <a:gridCol w="1778000">
+                <a:gridCol w="1820333">
                   <a:extLst>
                     <a:ext uri="{9D8B030D-6E8A-4147-A177-3AD203B41FA5}">
-                      <a16:colId xmlns:a16="http://schemas.microsoft.com/office/drawing/2014/main" val="751614453"/>
+                      <a16:colId xmlns:a16="http://schemas.microsoft.com/office/drawing/2014/main" val="636760165"/>
                     </a:ext>
                   </a:extLst>
                 </a:gridCol>
-                <a:gridCol w="1778000">
+                <a:gridCol w="1820333">
                   <a:extLst>
                     <a:ext uri="{9D8B030D-6E8A-4147-A177-3AD203B41FA5}">
-                      <a16:colId xmlns:a16="http://schemas.microsoft.com/office/drawing/2014/main" val="1006926694"/>
+                      <a16:colId xmlns:a16="http://schemas.microsoft.com/office/drawing/2014/main" val="1800392034"/>
                     </a:ext>
                   </a:extLst>
                 </a:gridCol>
-                <a:gridCol w="1778000">
+                <a:gridCol w="1820333">
                   <a:extLst>
                     <a:ext uri="{9D8B030D-6E8A-4147-A177-3AD203B41FA5}">
-                      <a16:colId xmlns:a16="http://schemas.microsoft.com/office/drawing/2014/main" val="710165805"/>
+                      <a16:colId xmlns:a16="http://schemas.microsoft.com/office/drawing/2014/main" val="718888393"/>
                     </a:ext>
                   </a:extLst>
                 </a:gridCol>
-                <a:gridCol w="1778000">
+                <a:gridCol w="1820333">
                   <a:extLst>
                     <a:ext uri="{9D8B030D-6E8A-4147-A177-3AD203B41FA5}">
-                      <a16:colId xmlns:a16="http://schemas.microsoft.com/office/drawing/2014/main" val="3659446256"/>
+                      <a16:colId xmlns:a16="http://schemas.microsoft.com/office/drawing/2014/main" val="2419231022"/>
                     </a:ext>
                   </a:extLst>
                 </a:gridCol>
               </a:tblGrid>
-              <a:tr h="762000">
+              <a:tr h="836083">
                 <a:tc>
                   <a:txBody>
                     <a:bodyPr/>
                     <a:lstStyle/>
                     <a:p>
                       <a:r>
-                        <a:rPr lang="es-CL" sz="1200" b="1">
+                        <a:rPr lang="es-CL" sz="1150" b="1">
                           <a:solidFill>
                             <a:srgbClr val="00D2FF"/>
                           </a:solidFill>
+                          <a:latin typeface="Segoe UI" panose="020B0502040204020203" pitchFamily="34" charset="0"/>
                         </a:rPr>
                         <a:t>Fase / Actividad</a:t>
                       </a:r>
@@ -4452,10 +4753,11 @@
                     <a:lstStyle/>
                     <a:p>
                       <a:r>
-                        <a:rPr lang="es-CL" sz="1200" b="1">
+                        <a:rPr lang="es-CL" sz="1150" b="1">
                           <a:solidFill>
                             <a:srgbClr val="00D2FF"/>
                           </a:solidFill>
+                          <a:latin typeface="Segoe UI" panose="020B0502040204020203" pitchFamily="34" charset="0"/>
                         </a:rPr>
                         <a:t>Semana</a:t>
                       </a:r>
@@ -4473,12 +4775,13 @@
                     <a:lstStyle/>
                     <a:p>
                       <a:r>
-                        <a:rPr lang="es-CL" sz="1200" b="1">
+                        <a:rPr lang="es-CL" sz="1150" b="1">
                           <a:solidFill>
                             <a:srgbClr val="00D2FF"/>
                           </a:solidFill>
+                          <a:latin typeface="Segoe UI" panose="020B0502040204020203" pitchFamily="34" charset="0"/>
                         </a:rPr>
-                        <a:t>DuraciÃ³n</a:t>
+                        <a:t>Duración</a:t>
                       </a:r>
                     </a:p>
                   </a:txBody>
@@ -4494,10 +4797,11 @@
                     <a:lstStyle/>
                     <a:p>
                       <a:r>
-                        <a:rPr lang="es-CL" sz="1200" b="1">
+                        <a:rPr lang="es-CL" sz="1150" b="1">
                           <a:solidFill>
                             <a:srgbClr val="00D2FF"/>
                           </a:solidFill>
+                          <a:latin typeface="Segoe UI" panose="020B0502040204020203" pitchFamily="34" charset="0"/>
                         </a:rPr>
                         <a:t>Entregable Principal</a:t>
                       </a:r>
@@ -4515,10 +4819,11 @@
                     <a:lstStyle/>
                     <a:p>
                       <a:r>
-                        <a:rPr lang="es-CL" sz="1200" b="1">
+                        <a:rPr lang="es-CL" sz="1150" b="1">
                           <a:solidFill>
                             <a:srgbClr val="00D2FF"/>
                           </a:solidFill>
+                          <a:latin typeface="Segoe UI" panose="020B0502040204020203" pitchFamily="34" charset="0"/>
                         </a:rPr>
                         <a:t>Responsable</a:t>
                       </a:r>
@@ -4536,10 +4841,11 @@
                     <a:lstStyle/>
                     <a:p>
                       <a:r>
-                        <a:rPr lang="es-CL" sz="1200" b="1">
+                        <a:rPr lang="es-CL" sz="1150" b="1">
                           <a:solidFill>
                             <a:srgbClr val="00D2FF"/>
                           </a:solidFill>
+                          <a:latin typeface="Segoe UI" panose="020B0502040204020203" pitchFamily="34" charset="0"/>
                         </a:rPr>
                         <a:t>Estado</a:t>
                       </a:r>
@@ -4553,24 +4859,31 @@
                 </a:tc>
                 <a:extLst>
                   <a:ext uri="{0D108BD9-81ED-4DB2-BD59-A6C34878D82A}">
-                    <a16:rowId xmlns:a16="http://schemas.microsoft.com/office/drawing/2014/main" val="2152701494"/>
+                    <a16:rowId xmlns:a16="http://schemas.microsoft.com/office/drawing/2014/main" val="715524024"/>
                   </a:ext>
                 </a:extLst>
               </a:tr>
-              <a:tr h="762000">
+              <a:tr h="836083">
                 <a:tc>
                   <a:txBody>
                     <a:bodyPr/>
                     <a:lstStyle/>
                     <a:p>
                       <a:r>
-                        <a:rPr lang="es-CL" sz="1100">
+                        <a:rPr lang="es-MX" sz="1100">
                           <a:solidFill>
                             <a:srgbClr val="FFFFFF"/>
                           </a:solidFill>
+                          <a:latin typeface="Segoe UI" panose="020B0502040204020203" pitchFamily="34" charset="0"/>
                         </a:rPr>
-                        <a:t>Actividad 2.2: PlanificaciÃ³n e Inventario</a:t>
+                        <a:t>Actividad 2.2: Planificación e Inventario</a:t>
                       </a:r>
+                      <a:endParaRPr lang="es-CL" sz="1100">
+                        <a:solidFill>
+                          <a:srgbClr val="FFFFFF"/>
+                        </a:solidFill>
+                        <a:latin typeface="Segoe UI" panose="020B0502040204020203" pitchFamily="34" charset="0"/>
+                      </a:endParaRPr>
                     </a:p>
                   </a:txBody>
                   <a:tcPr>
@@ -4589,6 +4902,7 @@
                           <a:solidFill>
                             <a:srgbClr val="FFFFFF"/>
                           </a:solidFill>
+                          <a:latin typeface="Segoe UI" panose="020B0502040204020203" pitchFamily="34" charset="0"/>
                         </a:rPr>
                         <a:t>Semana 7-8</a:t>
                       </a:r>
@@ -4610,8 +4924,9 @@
                           <a:solidFill>
                             <a:srgbClr val="FFFFFF"/>
                           </a:solidFill>
+                          <a:latin typeface="Segoe UI" panose="020B0502040204020203" pitchFamily="34" charset="0"/>
                         </a:rPr>
-                        <a:t>7 dÃ­as</a:t>
+                        <a:t>7 días</a:t>
                       </a:r>
                     </a:p>
                   </a:txBody>
@@ -4631,6 +4946,7 @@
                           <a:solidFill>
                             <a:srgbClr val="FFFFFF"/>
                           </a:solidFill>
+                          <a:latin typeface="Segoe UI" panose="020B0502040204020203" pitchFamily="34" charset="0"/>
                         </a:rPr>
                         <a:t>Catastro de Recursos y Matriz de Riesgos</a:t>
                       </a:r>
@@ -4638,6 +4954,7 @@
                         <a:solidFill>
                           <a:srgbClr val="FFFFFF"/>
                         </a:solidFill>
+                        <a:latin typeface="Segoe UI" panose="020B0502040204020203" pitchFamily="34" charset="0"/>
                       </a:endParaRPr>
                     </a:p>
                   </a:txBody>
@@ -4657,8 +4974,9 @@
                           <a:solidFill>
                             <a:srgbClr val="FFFFFF"/>
                           </a:solidFill>
+                          <a:latin typeface="Segoe UI" panose="020B0502040204020203" pitchFamily="34" charset="0"/>
                         </a:rPr>
-                        <a:t>FabiÃ¡n Mora</a:t>
+                        <a:t>Fabián Mora</a:t>
                       </a:r>
                     </a:p>
                   </a:txBody>
@@ -4678,8 +4996,9 @@
                           <a:solidFill>
                             <a:srgbClr val="64FFDA"/>
                           </a:solidFill>
+                          <a:latin typeface="Segoe UI" panose="020B0502040204020203" pitchFamily="34" charset="0"/>
                         </a:rPr>
-                        <a:t>100% Completado</a:t>
+                        <a:t>100% Conforme</a:t>
                       </a:r>
                     </a:p>
                   </a:txBody>
@@ -4691,24 +5010,31 @@
                 </a:tc>
                 <a:extLst>
                   <a:ext uri="{0D108BD9-81ED-4DB2-BD59-A6C34878D82A}">
-                    <a16:rowId xmlns:a16="http://schemas.microsoft.com/office/drawing/2014/main" val="3907362891"/>
+                    <a16:rowId xmlns:a16="http://schemas.microsoft.com/office/drawing/2014/main" val="4212385178"/>
                   </a:ext>
                 </a:extLst>
               </a:tr>
-              <a:tr h="762000">
+              <a:tr h="836083">
                 <a:tc>
                   <a:txBody>
                     <a:bodyPr/>
                     <a:lstStyle/>
                     <a:p>
                       <a:r>
-                        <a:rPr lang="es-CL" sz="1100">
+                        <a:rPr lang="es-MX" sz="1100">
                           <a:solidFill>
                             <a:srgbClr val="FFFFFF"/>
                           </a:solidFill>
+                          <a:latin typeface="Segoe UI" panose="020B0502040204020203" pitchFamily="34" charset="0"/>
                         </a:rPr>
-                        <a:t>Actividad 2.3: Manual de InstalaciÃ³n y SO</a:t>
+                        <a:t>Actividad 2.3: Manual de Instalación y SO</a:t>
                       </a:r>
+                      <a:endParaRPr lang="es-CL" sz="1100">
+                        <a:solidFill>
+                          <a:srgbClr val="FFFFFF"/>
+                        </a:solidFill>
+                        <a:latin typeface="Segoe UI" panose="020B0502040204020203" pitchFamily="34" charset="0"/>
+                      </a:endParaRPr>
                     </a:p>
                   </a:txBody>
                   <a:tcPr>
@@ -4727,6 +5053,7 @@
                           <a:solidFill>
                             <a:srgbClr val="FFFFFF"/>
                           </a:solidFill>
+                          <a:latin typeface="Segoe UI" panose="020B0502040204020203" pitchFamily="34" charset="0"/>
                         </a:rPr>
                         <a:t>Semana 9</a:t>
                       </a:r>
@@ -4748,9 +5075,38 @@
                           <a:solidFill>
                             <a:srgbClr val="FFFFFF"/>
                           </a:solidFill>
+                          <a:latin typeface="Segoe UI" panose="020B0502040204020203" pitchFamily="34" charset="0"/>
                         </a:rPr>
-                        <a:t>4 dÃ­as</a:t>
+                        <a:t>4 días</a:t>
                       </a:r>
+                    </a:p>
+                  </a:txBody>
+                  <a:tcPr>
+                    <a:solidFill>
+                      <a:srgbClr val="161622"/>
+                    </a:solidFill>
+                  </a:tcPr>
+                </a:tc>
+                <a:tc>
+                  <a:txBody>
+                    <a:bodyPr/>
+                    <a:lstStyle/>
+                    <a:p>
+                      <a:r>
+                        <a:rPr lang="es-MX" sz="1100">
+                          <a:solidFill>
+                            <a:srgbClr val="FFFFFF"/>
+                          </a:solidFill>
+                          <a:latin typeface="Segoe UI" panose="020B0502040204020203" pitchFamily="34" charset="0"/>
+                        </a:rPr>
+                        <a:t>Manual Técnico de Despliegue y Configuración</a:t>
+                      </a:r>
+                      <a:endParaRPr lang="es-CL" sz="1100">
+                        <a:solidFill>
+                          <a:srgbClr val="FFFFFF"/>
+                        </a:solidFill>
+                        <a:latin typeface="Segoe UI" panose="020B0502040204020203" pitchFamily="34" charset="0"/>
+                      </a:endParaRPr>
                     </a:p>
                   </a:txBody>
                   <a:tcPr>
@@ -4769,29 +5125,9 @@
                           <a:solidFill>
                             <a:srgbClr val="FFFFFF"/>
                           </a:solidFill>
+                          <a:latin typeface="Segoe UI" panose="020B0502040204020203" pitchFamily="34" charset="0"/>
                         </a:rPr>
-                        <a:t>Manual TÃ©cnico de Despliegue y ConfiguraciÃ³n</a:t>
-                      </a:r>
-                    </a:p>
-                  </a:txBody>
-                  <a:tcPr>
-                    <a:solidFill>
-                      <a:srgbClr val="161622"/>
-                    </a:solidFill>
-                  </a:tcPr>
-                </a:tc>
-                <a:tc>
-                  <a:txBody>
-                    <a:bodyPr/>
-                    <a:lstStyle/>
-                    <a:p>
-                      <a:r>
-                        <a:rPr lang="es-CL" sz="1100">
-                          <a:solidFill>
-                            <a:srgbClr val="FFFFFF"/>
-                          </a:solidFill>
-                        </a:rPr>
-                        <a:t>FabiÃ¡n Mora</a:t>
+                        <a:t>Fabián Mora</a:t>
                       </a:r>
                     </a:p>
                   </a:txBody>
@@ -4811,8 +5147,9 @@
                           <a:solidFill>
                             <a:srgbClr val="64FFDA"/>
                           </a:solidFill>
+                          <a:latin typeface="Segoe UI" panose="020B0502040204020203" pitchFamily="34" charset="0"/>
                         </a:rPr>
-                        <a:t>100% Completado</a:t>
+                        <a:t>100% Conforme</a:t>
                       </a:r>
                     </a:p>
                   </a:txBody>
@@ -4824,11 +5161,11 @@
                 </a:tc>
                 <a:extLst>
                   <a:ext uri="{0D108BD9-81ED-4DB2-BD59-A6C34878D82A}">
-                    <a16:rowId xmlns:a16="http://schemas.microsoft.com/office/drawing/2014/main" val="715347798"/>
+                    <a16:rowId xmlns:a16="http://schemas.microsoft.com/office/drawing/2014/main" val="2608146342"/>
                   </a:ext>
                 </a:extLst>
               </a:tr>
-              <a:tr h="762000">
+              <a:tr h="836083">
                 <a:tc>
                   <a:txBody>
                     <a:bodyPr/>
@@ -4839,8 +5176,9 @@
                           <a:solidFill>
                             <a:srgbClr val="FFFFFF"/>
                           </a:solidFill>
+                          <a:latin typeface="Segoe UI" panose="020B0502040204020203" pitchFamily="34" charset="0"/>
                         </a:rPr>
-                        <a:t>Actividad 2.4: BitÃ¡cora de Despliegue</a:t>
+                        <a:t>Actividad 2.4: Bitácora de Despliegue</a:t>
                       </a:r>
                     </a:p>
                   </a:txBody>
@@ -4860,6 +5198,7 @@
                           <a:solidFill>
                             <a:srgbClr val="FFFFFF"/>
                           </a:solidFill>
+                          <a:latin typeface="Segoe UI" panose="020B0502040204020203" pitchFamily="34" charset="0"/>
                         </a:rPr>
                         <a:t>Semana 9</a:t>
                       </a:r>
@@ -4881,8 +5220,9 @@
                           <a:solidFill>
                             <a:srgbClr val="FFFFFF"/>
                           </a:solidFill>
+                          <a:latin typeface="Segoe UI" panose="020B0502040204020203" pitchFamily="34" charset="0"/>
                         </a:rPr>
-                        <a:t>3 dÃ­as</a:t>
+                        <a:t>3 días</a:t>
                       </a:r>
                     </a:p>
                   </a:txBody>
@@ -4902,8 +5242,9 @@
                           <a:solidFill>
                             <a:srgbClr val="FFFFFF"/>
                           </a:solidFill>
+                          <a:latin typeface="Segoe UI" panose="020B0502040204020203" pitchFamily="34" charset="0"/>
                         </a:rPr>
-                        <a:t>Registro de Procedimientos y Tareas TÃ©cnicas</a:t>
+                        <a:t>Registro de Procedimientos Técnicos</a:t>
                       </a:r>
                     </a:p>
                   </a:txBody>
@@ -4923,6 +5264,7 @@
                           <a:solidFill>
                             <a:srgbClr val="FFFFFF"/>
                           </a:solidFill>
+                          <a:latin typeface="Segoe UI" panose="020B0502040204020203" pitchFamily="34" charset="0"/>
                         </a:rPr>
                         <a:t>Paul Ferrada</a:t>
                       </a:r>
@@ -4944,8 +5286,9 @@
                           <a:solidFill>
                             <a:srgbClr val="64FFDA"/>
                           </a:solidFill>
+                          <a:latin typeface="Segoe UI" panose="020B0502040204020203" pitchFamily="34" charset="0"/>
                         </a:rPr>
-                        <a:t>100% Completado</a:t>
+                        <a:t>100% Conforme</a:t>
                       </a:r>
                     </a:p>
                   </a:txBody>
@@ -4957,11 +5300,11 @@
                 </a:tc>
                 <a:extLst>
                   <a:ext uri="{0D108BD9-81ED-4DB2-BD59-A6C34878D82A}">
-                    <a16:rowId xmlns:a16="http://schemas.microsoft.com/office/drawing/2014/main" val="593193633"/>
+                    <a16:rowId xmlns:a16="http://schemas.microsoft.com/office/drawing/2014/main" val="3786894809"/>
                   </a:ext>
                 </a:extLst>
               </a:tr>
-              <a:tr h="762000">
+              <a:tr h="836083">
                 <a:tc>
                   <a:txBody>
                     <a:bodyPr/>
@@ -4972,13 +5315,15 @@
                           <a:solidFill>
                             <a:srgbClr val="FFFFFF"/>
                           </a:solidFill>
+                          <a:latin typeface="Segoe UI" panose="020B0502040204020203" pitchFamily="34" charset="0"/>
                         </a:rPr>
-                        <a:t>Actividad 2.5: ValidaciÃ³n y Pruebas Unitarias</a:t>
+                        <a:t>Actividad 2.5: Validación y Pruebas xUnit</a:t>
                       </a:r>
                       <a:endParaRPr lang="es-CL" sz="1100">
                         <a:solidFill>
                           <a:srgbClr val="FFFFFF"/>
                         </a:solidFill>
+                        <a:latin typeface="Segoe UI" panose="020B0502040204020203" pitchFamily="34" charset="0"/>
                       </a:endParaRPr>
                     </a:p>
                   </a:txBody>
@@ -4998,6 +5343,7 @@
                           <a:solidFill>
                             <a:srgbClr val="FFFFFF"/>
                           </a:solidFill>
+                          <a:latin typeface="Segoe UI" panose="020B0502040204020203" pitchFamily="34" charset="0"/>
                         </a:rPr>
                         <a:t>Semana 10</a:t>
                       </a:r>
@@ -5019,9 +5365,38 @@
                           <a:solidFill>
                             <a:srgbClr val="FFFFFF"/>
                           </a:solidFill>
+                          <a:latin typeface="Segoe UI" panose="020B0502040204020203" pitchFamily="34" charset="0"/>
                         </a:rPr>
-                        <a:t>5 dÃ­as</a:t>
+                        <a:t>5 días</a:t>
                       </a:r>
+                    </a:p>
+                  </a:txBody>
+                  <a:tcPr>
+                    <a:solidFill>
+                      <a:srgbClr val="161622"/>
+                    </a:solidFill>
+                  </a:tcPr>
+                </a:tc>
+                <a:tc>
+                  <a:txBody>
+                    <a:bodyPr/>
+                    <a:lstStyle/>
+                    <a:p>
+                      <a:r>
+                        <a:rPr lang="es-MX" sz="1100">
+                          <a:solidFill>
+                            <a:srgbClr val="FFFFFF"/>
+                          </a:solidFill>
+                          <a:latin typeface="Segoe UI" panose="020B0502040204020203" pitchFamily="34" charset="0"/>
+                        </a:rPr>
+                        <a:t>19 Pruebas Unitarias y Módulo Ofimática</a:t>
+                      </a:r>
+                      <a:endParaRPr lang="es-CL" sz="1100">
+                        <a:solidFill>
+                          <a:srgbClr val="FFFFFF"/>
+                        </a:solidFill>
+                        <a:latin typeface="Segoe UI" panose="020B0502040204020203" pitchFamily="34" charset="0"/>
+                      </a:endParaRPr>
                     </a:p>
                   </a:txBody>
                   <a:tcPr>
@@ -5040,27 +5415,7 @@
                           <a:solidFill>
                             <a:srgbClr val="FFFFFF"/>
                           </a:solidFill>
-                        </a:rPr>
-                        <a:t>19 Pruebas xUnit y MÃ³dulo ExportaciÃ³n OfimÃ¡tica</a:t>
-                      </a:r>
-                    </a:p>
-                  </a:txBody>
-                  <a:tcPr>
-                    <a:solidFill>
-                      <a:srgbClr val="161622"/>
-                    </a:solidFill>
-                  </a:tcPr>
-                </a:tc>
-                <a:tc>
-                  <a:txBody>
-                    <a:bodyPr/>
-                    <a:lstStyle/>
-                    <a:p>
-                      <a:r>
-                        <a:rPr lang="es-CL" sz="1100">
-                          <a:solidFill>
-                            <a:srgbClr val="FFFFFF"/>
-                          </a:solidFill>
+                          <a:latin typeface="Segoe UI" panose="020B0502040204020203" pitchFamily="34" charset="0"/>
                         </a:rPr>
                         <a:t>Paul Ferrada</a:t>
                       </a:r>
@@ -5082,8 +5437,9 @@
                           <a:solidFill>
                             <a:srgbClr val="64FFDA"/>
                           </a:solidFill>
+                          <a:latin typeface="Segoe UI" panose="020B0502040204020203" pitchFamily="34" charset="0"/>
                         </a:rPr>
-                        <a:t>100% Completado</a:t>
+                        <a:t>100% Conforme</a:t>
                       </a:r>
                     </a:p>
                   </a:txBody>
@@ -5095,11 +5451,11 @@
                 </a:tc>
                 <a:extLst>
                   <a:ext uri="{0D108BD9-81ED-4DB2-BD59-A6C34878D82A}">
-                    <a16:rowId xmlns:a16="http://schemas.microsoft.com/office/drawing/2014/main" val="251395143"/>
+                    <a16:rowId xmlns:a16="http://schemas.microsoft.com/office/drawing/2014/main" val="2461160748"/>
                   </a:ext>
                 </a:extLst>
               </a:tr>
-              <a:tr h="762000">
+              <a:tr h="836083">
                 <a:tc>
                   <a:txBody>
                     <a:bodyPr/>
@@ -5110,6 +5466,7 @@
                           <a:solidFill>
                             <a:srgbClr val="FFFFFF"/>
                           </a:solidFill>
+                          <a:latin typeface="Segoe UI" panose="020B0502040204020203" pitchFamily="34" charset="0"/>
                         </a:rPr>
                         <a:t>Actividad 2.6: Lista de Chequeo y Video</a:t>
                       </a:r>
@@ -5117,6 +5474,7 @@
                         <a:solidFill>
                           <a:srgbClr val="FFFFFF"/>
                         </a:solidFill>
+                        <a:latin typeface="Segoe UI" panose="020B0502040204020203" pitchFamily="34" charset="0"/>
                       </a:endParaRPr>
                     </a:p>
                   </a:txBody>
@@ -5136,6 +5494,7 @@
                           <a:solidFill>
                             <a:srgbClr val="FFFFFF"/>
                           </a:solidFill>
+                          <a:latin typeface="Segoe UI" panose="020B0502040204020203" pitchFamily="34" charset="0"/>
                         </a:rPr>
                         <a:t>Semana 11</a:t>
                       </a:r>
@@ -5157,8 +5516,9 @@
                           <a:solidFill>
                             <a:srgbClr val="FFFFFF"/>
                           </a:solidFill>
+                          <a:latin typeface="Segoe UI" panose="020B0502040204020203" pitchFamily="34" charset="0"/>
                         </a:rPr>
-                        <a:t>4 dÃ­as</a:t>
+                        <a:t>4 días</a:t>
                       </a:r>
                     </a:p>
                   </a:txBody>
@@ -5178,6 +5538,7 @@
                           <a:solidFill>
                             <a:srgbClr val="FFFFFF"/>
                           </a:solidFill>
+                          <a:latin typeface="Segoe UI" panose="020B0502040204020203" pitchFamily="34" charset="0"/>
                         </a:rPr>
                         <a:t>Checklist Operacional, Video Tutorial y PPT</a:t>
                       </a:r>
@@ -5185,6 +5546,7 @@
                         <a:solidFill>
                           <a:srgbClr val="FFFFFF"/>
                         </a:solidFill>
+                        <a:latin typeface="Segoe UI" panose="020B0502040204020203" pitchFamily="34" charset="0"/>
                       </a:endParaRPr>
                     </a:p>
                   </a:txBody>
@@ -5204,6 +5566,7 @@
                           <a:solidFill>
                             <a:srgbClr val="FFFFFF"/>
                           </a:solidFill>
+                          <a:latin typeface="Segoe UI" panose="020B0502040204020203" pitchFamily="34" charset="0"/>
                         </a:rPr>
                         <a:t>Equipo Completo</a:t>
                       </a:r>
@@ -5225,8 +5588,9 @@
                           <a:solidFill>
                             <a:srgbClr val="64FFDA"/>
                           </a:solidFill>
+                          <a:latin typeface="Segoe UI" panose="020B0502040204020203" pitchFamily="34" charset="0"/>
                         </a:rPr>
-                        <a:t>100% Completado</a:t>
+                        <a:t>100% Conforme</a:t>
                       </a:r>
                     </a:p>
                   </a:txBody>
@@ -5238,7 +5602,7 @@
                 </a:tc>
                 <a:extLst>
                   <a:ext uri="{0D108BD9-81ED-4DB2-BD59-A6C34878D82A}">
-                    <a16:rowId xmlns:a16="http://schemas.microsoft.com/office/drawing/2014/main" val="4016132330"/>
+                    <a16:rowId xmlns:a16="http://schemas.microsoft.com/office/drawing/2014/main" val="922740398"/>
                   </a:ext>
                 </a:extLst>
               </a:tr>
@@ -5249,7 +5613,7 @@
     </p:spTree>
     <p:extLst>
       <p:ext uri="{BB962C8B-B14F-4D97-AF65-F5344CB8AC3E}">
-        <p14:creationId xmlns:p14="http://schemas.microsoft.com/office/powerpoint/2010/main" val="1654349225"/>
+        <p14:creationId xmlns:p14="http://schemas.microsoft.com/office/powerpoint/2010/main" val="3941085615"/>
       </p:ext>
     </p:extLst>
   </p:cSld>
@@ -5281,7 +5645,7 @@
           <p:cNvPr id="2" name="Rectángulo 1">
             <a:extLst>
               <a:ext uri="{FF2B5EF4-FFF2-40B4-BE49-F238E27FC236}">
-                <a16:creationId xmlns:a16="http://schemas.microsoft.com/office/drawing/2014/main" id="{3C308853-39C3-AD60-CA2E-025930D7B8A3}"/>
+                <a16:creationId xmlns:a16="http://schemas.microsoft.com/office/drawing/2014/main" id="{272C7A3F-381C-A10A-6E4E-DE836A33BAAD}"/>
               </a:ext>
             </a:extLst>
           </p:cNvPr>
@@ -5349,7 +5713,7 @@
           <p:cNvPr id="3" name="Rectángulo 2">
             <a:extLst>
               <a:ext uri="{FF2B5EF4-FFF2-40B4-BE49-F238E27FC236}">
-                <a16:creationId xmlns:a16="http://schemas.microsoft.com/office/drawing/2014/main" id="{49F2D5E3-DBC1-055B-754A-B5A928A3F702}"/>
+                <a16:creationId xmlns:a16="http://schemas.microsoft.com/office/drawing/2014/main" id="{2B6E2E5B-0E6A-72B3-5711-770EE91F2E03}"/>
               </a:ext>
             </a:extLst>
           </p:cNvPr>
@@ -5358,8 +5722,8 @@
         </p:nvSpPr>
         <p:spPr>
           <a:xfrm>
-            <a:off x="508000" y="317500"/>
-            <a:ext cx="76200" cy="571500"/>
+            <a:off x="0" y="0"/>
+            <a:ext cx="12192000" cy="50800"/>
           </a:xfrm>
           <a:prstGeom prst="rect">
             <a:avLst/>
@@ -5414,112 +5778,26 @@
       </p:sp>
       <p:sp>
         <p:nvSpPr>
-          <p:cNvPr id="4" name="CuadroTexto 3">
-            <a:extLst>
-              <a:ext uri="{FF2B5EF4-FFF2-40B4-BE49-F238E27FC236}">
-                <a16:creationId xmlns:a16="http://schemas.microsoft.com/office/drawing/2014/main" id="{13E2E528-FD09-1B5D-F1D5-B207E6251779}"/>
-              </a:ext>
-            </a:extLst>
-          </p:cNvPr>
-          <p:cNvSpPr txBox="1"/>
+          <p:cNvPr id="4" name="Rectángulo 3">
+            <a:extLst>
+              <a:ext uri="{FF2B5EF4-FFF2-40B4-BE49-F238E27FC236}">
+                <a16:creationId xmlns:a16="http://schemas.microsoft.com/office/drawing/2014/main" id="{6E678487-01E3-5E5D-026F-4ED8DA4DC835}"/>
+              </a:ext>
+            </a:extLst>
+          </p:cNvPr>
+          <p:cNvSpPr/>
           <p:nvPr/>
         </p:nvSpPr>
         <p:spPr>
           <a:xfrm>
-            <a:off x="698500" y="254000"/>
-            <a:ext cx="10795000" cy="430887"/>
-          </a:xfrm>
-          <a:prstGeom prst="rect">
-            <a:avLst/>
-          </a:prstGeom>
-          <a:noFill/>
-        </p:spPr>
-        <p:txBody>
-          <a:bodyPr vert="horz" rtlCol="0">
-            <a:spAutoFit/>
-          </a:bodyPr>
-          <a:lstStyle/>
-          <a:p>
-            <a:r>
-              <a:rPr lang="es-CL" sz="2200" b="1">
-                <a:solidFill>
-                  <a:srgbClr val="FFFFFF"/>
-                </a:solidFill>
-                <a:latin typeface="Segoe UI" panose="020B0502040204020203" pitchFamily="34" charset="0"/>
-              </a:rPr>
-              <a:t>3. InstalaciÃ³n y ConfiguraciÃ³n del Entorno (Actividad 2.3)</a:t>
-            </a:r>
-          </a:p>
-        </p:txBody>
-      </p:sp>
-      <p:sp>
-        <p:nvSpPr>
-          <p:cNvPr id="5" name="CuadroTexto 4">
-            <a:extLst>
-              <a:ext uri="{FF2B5EF4-FFF2-40B4-BE49-F238E27FC236}">
-                <a16:creationId xmlns:a16="http://schemas.microsoft.com/office/drawing/2014/main" id="{D1CE8392-362B-DE87-DA9D-197EB7033FAE}"/>
-              </a:ext>
-            </a:extLst>
-          </p:cNvPr>
-          <p:cNvSpPr txBox="1"/>
-          <p:nvPr/>
-        </p:nvSpPr>
-        <p:spPr>
-          <a:xfrm>
-            <a:off x="698500" y="660400"/>
-            <a:ext cx="10795000" cy="276999"/>
-          </a:xfrm>
-          <a:prstGeom prst="rect">
-            <a:avLst/>
-          </a:prstGeom>
-          <a:noFill/>
-        </p:spPr>
-        <p:txBody>
-          <a:bodyPr vert="horz" rtlCol="0">
-            <a:spAutoFit/>
-          </a:bodyPr>
-          <a:lstStyle/>
-          <a:p>
-            <a:r>
-              <a:rPr lang="es-MX" sz="1200">
-                <a:solidFill>
-                  <a:srgbClr val="8892B0"/>
-                </a:solidFill>
-                <a:latin typeface="Segoe UI" panose="020B0502040204020203" pitchFamily="34" charset="0"/>
-              </a:rPr>
-              <a:t>EstandarizaciÃ³n tÃ©cnica para asegurar la compatibilidad y continuidad del servicio</a:t>
-            </a:r>
-            <a:endParaRPr lang="es-CL" sz="1200">
-              <a:solidFill>
-                <a:srgbClr val="8892B0"/>
-              </a:solidFill>
-              <a:latin typeface="Segoe UI" panose="020B0502040204020203" pitchFamily="34" charset="0"/>
-            </a:endParaRPr>
-          </a:p>
-        </p:txBody>
-      </p:sp>
-      <p:sp>
-        <p:nvSpPr>
-          <p:cNvPr id="6" name="Rectángulo 5">
-            <a:extLst>
-              <a:ext uri="{FF2B5EF4-FFF2-40B4-BE49-F238E27FC236}">
-                <a16:creationId xmlns:a16="http://schemas.microsoft.com/office/drawing/2014/main" id="{815894A2-DA63-E290-CD16-88099D622847}"/>
-              </a:ext>
-            </a:extLst>
-          </p:cNvPr>
-          <p:cNvSpPr/>
-          <p:nvPr/>
-        </p:nvSpPr>
-        <p:spPr>
-          <a:xfrm>
-            <a:off x="762000" y="1397000"/>
-            <a:ext cx="3302000" cy="4699000"/>
+            <a:off x="508000" y="304800"/>
+            <a:ext cx="76200" cy="533400"/>
           </a:xfrm>
           <a:prstGeom prst="rect">
             <a:avLst/>
           </a:prstGeom>
           <a:solidFill>
-            <a:srgbClr val="1A1A2E"/>
+            <a:srgbClr val="00D2FF"/>
           </a:solidFill>
           <a:ln w="19050" cap="flat" cmpd="sng" algn="ctr">
             <a:noFill/>
@@ -5568,10 +5846,10 @@
       </p:sp>
       <p:sp>
         <p:nvSpPr>
-          <p:cNvPr id="7" name="CuadroTexto 6">
-            <a:extLst>
-              <a:ext uri="{FF2B5EF4-FFF2-40B4-BE49-F238E27FC236}">
-                <a16:creationId xmlns:a16="http://schemas.microsoft.com/office/drawing/2014/main" id="{E85D2B13-3016-47DC-8E31-DF2DC0B0FD7E}"/>
+          <p:cNvPr id="5" name="CuadroTexto 4">
+            <a:extLst>
+              <a:ext uri="{FF2B5EF4-FFF2-40B4-BE49-F238E27FC236}">
+                <a16:creationId xmlns:a16="http://schemas.microsoft.com/office/drawing/2014/main" id="{19E31216-F93B-A9D7-8FC4-961F458F6F21}"/>
               </a:ext>
             </a:extLst>
           </p:cNvPr>
@@ -5580,8 +5858,8 @@
         </p:nvSpPr>
         <p:spPr>
           <a:xfrm>
-            <a:off x="952500" y="1587500"/>
-            <a:ext cx="2921000" cy="1938992"/>
+            <a:off x="698500" y="228600"/>
+            <a:ext cx="10922000" cy="415498"/>
           </a:xfrm>
           <a:prstGeom prst="rect">
             <a:avLst/>
@@ -5589,33 +5867,81 @@
           <a:noFill/>
         </p:spPr>
         <p:txBody>
-          <a:bodyPr vert="horz" wrap="square" rtlCol="0">
+          <a:bodyPr vert="horz" rtlCol="0">
             <a:spAutoFit/>
           </a:bodyPr>
           <a:lstStyle/>
           <a:p>
             <a:r>
-              <a:rPr lang="es-CL" sz="1200">
+              <a:rPr lang="es-MX" sz="2100" b="1">
                 <a:solidFill>
                   <a:srgbClr val="FFFFFF"/>
                 </a:solidFill>
                 <a:latin typeface="Segoe UI" panose="020B0502040204020203" pitchFamily="34" charset="0"/>
               </a:rPr>
-              <a:t>ENTORNO SISTEMA OPERATIVO
-â€¢ SO: Windows 11 / 10 Pro 64-bit.
-â€¢ Runtime: .NET 10 Desktop Runtime x64.
-â€¢ Permisos: Permisos NTFS de lectura y modificaciÃ³n en directorio local de la aplicaciÃ³n.
-â€¢ ResoluciÃ³n: 1920x1080 @ 100% escalado DPI verificado sin distorsiÃ³n.</a:t>
+              <a:t>3. Instalación y Configuración del Entorno (Actividad 2.3)</a:t>
             </a:r>
-          </a:p>
-        </p:txBody>
-      </p:sp>
-      <p:sp>
-        <p:nvSpPr>
-          <p:cNvPr id="8" name="Rectángulo 7">
-            <a:extLst>
-              <a:ext uri="{FF2B5EF4-FFF2-40B4-BE49-F238E27FC236}">
-                <a16:creationId xmlns:a16="http://schemas.microsoft.com/office/drawing/2014/main" id="{C17E6A43-8F2B-C3F0-20A5-1BBDCD233A33}"/>
+            <a:endParaRPr lang="es-CL" sz="2100" b="1">
+              <a:solidFill>
+                <a:srgbClr val="FFFFFF"/>
+              </a:solidFill>
+              <a:latin typeface="Segoe UI" panose="020B0502040204020203" pitchFamily="34" charset="0"/>
+            </a:endParaRPr>
+          </a:p>
+        </p:txBody>
+      </p:sp>
+      <p:sp>
+        <p:nvSpPr>
+          <p:cNvPr id="6" name="CuadroTexto 5">
+            <a:extLst>
+              <a:ext uri="{FF2B5EF4-FFF2-40B4-BE49-F238E27FC236}">
+                <a16:creationId xmlns:a16="http://schemas.microsoft.com/office/drawing/2014/main" id="{B9C12CA6-1073-F98B-67C5-4DC9F85F7D32}"/>
+              </a:ext>
+            </a:extLst>
+          </p:cNvPr>
+          <p:cNvSpPr txBox="1"/>
+          <p:nvPr/>
+        </p:nvSpPr>
+        <p:spPr>
+          <a:xfrm>
+            <a:off x="698500" y="609600"/>
+            <a:ext cx="10922000" cy="269304"/>
+          </a:xfrm>
+          <a:prstGeom prst="rect">
+            <a:avLst/>
+          </a:prstGeom>
+          <a:noFill/>
+        </p:spPr>
+        <p:txBody>
+          <a:bodyPr vert="horz" rtlCol="0">
+            <a:spAutoFit/>
+          </a:bodyPr>
+          <a:lstStyle/>
+          <a:p>
+            <a:r>
+              <a:rPr lang="es-MX" sz="1150">
+                <a:solidFill>
+                  <a:srgbClr val="00D2FF"/>
+                </a:solidFill>
+                <a:latin typeface="Segoe UI" panose="020B0502040204020203" pitchFamily="34" charset="0"/>
+              </a:rPr>
+              <a:t>Estandarización técnica para asegurar la compatibilidad y continuidad operacional</a:t>
+            </a:r>
+            <a:endParaRPr lang="es-CL" sz="1150">
+              <a:solidFill>
+                <a:srgbClr val="00D2FF"/>
+              </a:solidFill>
+              <a:latin typeface="Segoe UI" panose="020B0502040204020203" pitchFamily="34" charset="0"/>
+            </a:endParaRPr>
+          </a:p>
+        </p:txBody>
+      </p:sp>
+      <p:sp>
+        <p:nvSpPr>
+          <p:cNvPr id="7" name="Rectángulo 6">
+            <a:extLst>
+              <a:ext uri="{FF2B5EF4-FFF2-40B4-BE49-F238E27FC236}">
+                <a16:creationId xmlns:a16="http://schemas.microsoft.com/office/drawing/2014/main" id="{C307530F-BE11-4972-1E96-BB793BDC59FB}"/>
               </a:ext>
             </a:extLst>
           </p:cNvPr>
@@ -5624,8 +5950,8 @@
         </p:nvSpPr>
         <p:spPr>
           <a:xfrm>
-            <a:off x="4445000" y="1397000"/>
-            <a:ext cx="3302000" cy="4699000"/>
+            <a:off x="635000" y="1143000"/>
+            <a:ext cx="3467100" cy="5207000"/>
           </a:xfrm>
           <a:prstGeom prst="rect">
             <a:avLst/>
@@ -5633,25 +5959,11 @@
           <a:solidFill>
             <a:srgbClr val="1A1A2E"/>
           </a:solidFill>
-          <a:ln w="19050" cap="flat" cmpd="sng" algn="ctr">
-            <a:noFill/>
-            <a:prstDash val="solid"/>
-            <a:miter lim="800000"/>
+          <a:ln>
+            <a:solidFill>
+              <a:srgbClr val="2A2A4A"/>
+            </a:solidFill>
           </a:ln>
-          <a:effectLst/>
-          <a:extLst>
-            <a:ext uri="{91240B29-F687-4F45-9708-019B960494DF}">
-              <a14:hiddenLine xmlns:a14="http://schemas.microsoft.com/office/drawing/2010/main" w="19050" cap="flat" cmpd="sng" algn="ctr">
-                <a:solidFill>
-                  <a:schemeClr val="accent1">
-                    <a:shade val="15000"/>
-                  </a:schemeClr>
-                </a:solidFill>
-                <a:prstDash val="solid"/>
-                <a:miter lim="800000"/>
-              </a14:hiddenLine>
-            </a:ext>
-          </a:extLst>
         </p:spPr>
         <p:style>
           <a:lnRef idx="2">
@@ -5680,10 +5992,10 @@
       </p:sp>
       <p:sp>
         <p:nvSpPr>
-          <p:cNvPr id="9" name="CuadroTexto 8">
-            <a:extLst>
-              <a:ext uri="{FF2B5EF4-FFF2-40B4-BE49-F238E27FC236}">
-                <a16:creationId xmlns:a16="http://schemas.microsoft.com/office/drawing/2014/main" id="{24D41646-1CD0-9C8E-E123-4F91B932F742}"/>
+          <p:cNvPr id="8" name="CuadroTexto 7">
+            <a:extLst>
+              <a:ext uri="{FF2B5EF4-FFF2-40B4-BE49-F238E27FC236}">
+                <a16:creationId xmlns:a16="http://schemas.microsoft.com/office/drawing/2014/main" id="{F099BBA2-3BD6-E6E8-A76C-0C557F53E1CB}"/>
               </a:ext>
             </a:extLst>
           </p:cNvPr>
@@ -5692,8 +6004,8 @@
         </p:nvSpPr>
         <p:spPr>
           <a:xfrm>
-            <a:off x="4635500" y="1587500"/>
-            <a:ext cx="2921000" cy="2308324"/>
+            <a:off x="825500" y="1333500"/>
+            <a:ext cx="3086100" cy="2746906"/>
           </a:xfrm>
           <a:prstGeom prst="rect">
             <a:avLst/>
@@ -5707,28 +6019,28 @@
           <a:lstStyle/>
           <a:p>
             <a:r>
-              <a:rPr lang="es-CL" sz="1200">
+              <a:rPr lang="es-CL" sz="1150">
                 <a:solidFill>
                   <a:srgbClr val="FFFFFF"/>
                 </a:solidFill>
                 <a:latin typeface="Segoe UI" panose="020B0502040204020203" pitchFamily="34" charset="0"/>
               </a:rPr>
-              <a:t>BASE DE DATOS Y PERSISTENCIA
-â€¢ Motor: SQLite 3 relacional local.
-â€¢ ORM: Entity Framework Core 10.
-â€¢ Inicializador: DatabaseInitializer genera tablas e Ã­ndices automÃ¡ticamente.
-â€¢ Usuario Semilla: Administrador admin@empresa.cl generado con BCrypt en primera carga.
-â€¢ Integridad: RestricciÃ³n Ãºnica que impide entradas duplicadas por dÃ­a.</a:t>
+              <a:t>SISTEMA OPERATIVO Y RUNTIME
+• SO: Windows 11 / Windows 10 Pro 64-bit.
+• Runtime: .NET 10 Desktop Runtime (x64) verificado con dotnet --list-runtimes.
+• Permisos: Lectura y escritura NTFS en el directorio de ejecución de la aplicación.
+• Resolución: Optimizado para 1080p (1920x1080) con escalado DPI al 100% sin distorsión.
+</a:t>
             </a:r>
           </a:p>
         </p:txBody>
       </p:sp>
       <p:sp>
         <p:nvSpPr>
-          <p:cNvPr id="10" name="Rectángulo 9">
-            <a:extLst>
-              <a:ext uri="{FF2B5EF4-FFF2-40B4-BE49-F238E27FC236}">
-                <a16:creationId xmlns:a16="http://schemas.microsoft.com/office/drawing/2014/main" id="{989FECE5-CC8C-178D-C1FF-37F2646A5975}"/>
+          <p:cNvPr id="9" name="Rectángulo 8">
+            <a:extLst>
+              <a:ext uri="{FF2B5EF4-FFF2-40B4-BE49-F238E27FC236}">
+                <a16:creationId xmlns:a16="http://schemas.microsoft.com/office/drawing/2014/main" id="{2FDB6528-2DD3-91F1-58C9-D018047C7C56}"/>
               </a:ext>
             </a:extLst>
           </p:cNvPr>
@@ -5737,8 +6049,8 @@
         </p:nvSpPr>
         <p:spPr>
           <a:xfrm>
-            <a:off x="8128000" y="1397000"/>
-            <a:ext cx="3302000" cy="4699000"/>
+            <a:off x="4356100" y="1143000"/>
+            <a:ext cx="3467100" cy="5207000"/>
           </a:xfrm>
           <a:prstGeom prst="rect">
             <a:avLst/>
@@ -5746,25 +6058,11 @@
           <a:solidFill>
             <a:srgbClr val="1A1A2E"/>
           </a:solidFill>
-          <a:ln w="19050" cap="flat" cmpd="sng" algn="ctr">
-            <a:noFill/>
-            <a:prstDash val="solid"/>
-            <a:miter lim="800000"/>
+          <a:ln>
+            <a:solidFill>
+              <a:srgbClr val="2A2A4A"/>
+            </a:solidFill>
           </a:ln>
-          <a:effectLst/>
-          <a:extLst>
-            <a:ext uri="{91240B29-F687-4F45-9708-019B960494DF}">
-              <a14:hiddenLine xmlns:a14="http://schemas.microsoft.com/office/drawing/2010/main" w="19050" cap="flat" cmpd="sng" algn="ctr">
-                <a:solidFill>
-                  <a:schemeClr val="accent1">
-                    <a:shade val="15000"/>
-                  </a:schemeClr>
-                </a:solidFill>
-                <a:prstDash val="solid"/>
-                <a:miter lim="800000"/>
-              </a14:hiddenLine>
-            </a:ext>
-          </a:extLst>
         </p:spPr>
         <p:style>
           <a:lnRef idx="2">
@@ -5793,10 +6091,10 @@
       </p:sp>
       <p:sp>
         <p:nvSpPr>
-          <p:cNvPr id="11" name="CuadroTexto 10">
-            <a:extLst>
-              <a:ext uri="{FF2B5EF4-FFF2-40B4-BE49-F238E27FC236}">
-                <a16:creationId xmlns:a16="http://schemas.microsoft.com/office/drawing/2014/main" id="{0FAB5EEA-9BEA-23A2-3295-C6ABA213B66F}"/>
+          <p:cNvPr id="10" name="CuadroTexto 9">
+            <a:extLst>
+              <a:ext uri="{FF2B5EF4-FFF2-40B4-BE49-F238E27FC236}">
+                <a16:creationId xmlns:a16="http://schemas.microsoft.com/office/drawing/2014/main" id="{4E36B8EE-44CE-DB63-0B52-2EAE2F64E384}"/>
               </a:ext>
             </a:extLst>
           </p:cNvPr>
@@ -5805,8 +6103,8 @@
         </p:nvSpPr>
         <p:spPr>
           <a:xfrm>
-            <a:off x="8318500" y="1587500"/>
-            <a:ext cx="2921000" cy="2123658"/>
+            <a:off x="4546600" y="1333500"/>
+            <a:ext cx="3086100" cy="3454792"/>
           </a:xfrm>
           <a:prstGeom prst="rect">
             <a:avLst/>
@@ -5820,25 +6118,138 @@
           <a:lstStyle/>
           <a:p>
             <a:r>
-              <a:rPr lang="es-CL" sz="1200">
+              <a:rPr lang="es-MX" sz="1150">
                 <a:solidFill>
                   <a:srgbClr val="FFFFFF"/>
                 </a:solidFill>
                 <a:latin typeface="Segoe UI" panose="020B0502040204020203" pitchFamily="34" charset="0"/>
               </a:rPr>
-              <a:t>INTEGRACIÃ“N CON OFIMÃTICA
-â€¢ Servicio: ExportService especializado en exportaciÃ³n tabular.
-â€¢ CodificaciÃ³n: UTF-8 con BOM (Byte Order Mark 0xEF, 0xBB, 0xBF).
-â€¢ Delimitador: Punto y coma (;) nativo de Excel en espaÃ±ol.
-â€¢ Cobertura: Atrasos, salidas anticipadas e inasistencias exportables en 1 clic.</a:t>
+              <a:t>BASE DE DATOS Y PERSISTENCIA
+• Motor: SQLite 3 relacional embebido local (asistencia.db).
+• ORM: Entity Framework Core 10 con consultas LINQ optimizadas.
+• Inicializador: DatabaseInitializer genera tablas e índices automáticamente.
+• Usuario Semilla: Cuenta admin@empresa.cl creada en primer arranque con clave BCrypt.
+• Integridad: Restricción compuesta que bloquea marcajes duplicados en el mismo día.
+</a:t>
             </a:r>
+            <a:endParaRPr lang="es-CL" sz="1150">
+              <a:solidFill>
+                <a:srgbClr val="FFFFFF"/>
+              </a:solidFill>
+              <a:latin typeface="Segoe UI" panose="020B0502040204020203" pitchFamily="34" charset="0"/>
+            </a:endParaRPr>
+          </a:p>
+        </p:txBody>
+      </p:sp>
+      <p:sp>
+        <p:nvSpPr>
+          <p:cNvPr id="11" name="Rectángulo 10">
+            <a:extLst>
+              <a:ext uri="{FF2B5EF4-FFF2-40B4-BE49-F238E27FC236}">
+                <a16:creationId xmlns:a16="http://schemas.microsoft.com/office/drawing/2014/main" id="{2E0817A4-FB6B-17B9-4564-3B7031716436}"/>
+              </a:ext>
+            </a:extLst>
+          </p:cNvPr>
+          <p:cNvSpPr/>
+          <p:nvPr/>
+        </p:nvSpPr>
+        <p:spPr>
+          <a:xfrm>
+            <a:off x="8077200" y="1143000"/>
+            <a:ext cx="3467100" cy="5207000"/>
+          </a:xfrm>
+          <a:prstGeom prst="rect">
+            <a:avLst/>
+          </a:prstGeom>
+          <a:solidFill>
+            <a:srgbClr val="1A1A2E"/>
+          </a:solidFill>
+          <a:ln>
+            <a:solidFill>
+              <a:srgbClr val="2A2A4A"/>
+            </a:solidFill>
+          </a:ln>
+        </p:spPr>
+        <p:style>
+          <a:lnRef idx="2">
+            <a:schemeClr val="accent1">
+              <a:shade val="15000"/>
+            </a:schemeClr>
+          </a:lnRef>
+          <a:fillRef idx="1">
+            <a:schemeClr val="accent1"/>
+          </a:fillRef>
+          <a:effectRef idx="0">
+            <a:schemeClr val="accent1"/>
+          </a:effectRef>
+          <a:fontRef idx="minor">
+            <a:schemeClr val="lt1"/>
+          </a:fontRef>
+        </p:style>
+        <p:txBody>
+          <a:bodyPr rtlCol="0" anchor="ctr"/>
+          <a:lstStyle/>
+          <a:p>
+            <a:pPr algn="ctr"/>
+            <a:endParaRPr lang="es-CL"/>
+          </a:p>
+        </p:txBody>
+      </p:sp>
+      <p:sp>
+        <p:nvSpPr>
+          <p:cNvPr id="12" name="CuadroTexto 11">
+            <a:extLst>
+              <a:ext uri="{FF2B5EF4-FFF2-40B4-BE49-F238E27FC236}">
+                <a16:creationId xmlns:a16="http://schemas.microsoft.com/office/drawing/2014/main" id="{D2EA5651-68C7-596B-2194-C7999198C8E4}"/>
+              </a:ext>
+            </a:extLst>
+          </p:cNvPr>
+          <p:cNvSpPr txBox="1"/>
+          <p:nvPr/>
+        </p:nvSpPr>
+        <p:spPr>
+          <a:xfrm>
+            <a:off x="8267700" y="1333500"/>
+            <a:ext cx="3086100" cy="2923877"/>
+          </a:xfrm>
+          <a:prstGeom prst="rect">
+            <a:avLst/>
+          </a:prstGeom>
+          <a:noFill/>
+        </p:spPr>
+        <p:txBody>
+          <a:bodyPr vert="horz" wrap="square" rtlCol="0">
+            <a:spAutoFit/>
+          </a:bodyPr>
+          <a:lstStyle/>
+          <a:p>
+            <a:r>
+              <a:rPr lang="es-MX" sz="1150">
+                <a:solidFill>
+                  <a:srgbClr val="FFFFFF"/>
+                </a:solidFill>
+                <a:latin typeface="Segoe UI" panose="020B0502040204020203" pitchFamily="34" charset="0"/>
+              </a:rPr>
+              <a:t>INTEGRACIÓN CON OFIMÁTICA
+• Servicio Especializado: ExportService para generación de planillas tabulares.
+• Codificación: UTF-8 con BOM (Byte Order Mark) para apertura transparente en Microsoft Excel.
+• Delimitador: Punto y coma (;) estándar para configuraciones regionales en español.
+• Funcionalidad: Exportación de atrasos, salidas e inasistencias en 1 clic.
+</a:t>
+            </a:r>
+            <a:endParaRPr lang="es-CL" sz="1150">
+              <a:solidFill>
+                <a:srgbClr val="FFFFFF"/>
+              </a:solidFill>
+              <a:latin typeface="Segoe UI" panose="020B0502040204020203" pitchFamily="34" charset="0"/>
+            </a:endParaRPr>
           </a:p>
         </p:txBody>
       </p:sp>
     </p:spTree>
     <p:extLst>
       <p:ext uri="{BB962C8B-B14F-4D97-AF65-F5344CB8AC3E}">
-        <p14:creationId xmlns:p14="http://schemas.microsoft.com/office/powerpoint/2010/main" val="2878623339"/>
+        <p14:creationId xmlns:p14="http://schemas.microsoft.com/office/powerpoint/2010/main" val="1237509738"/>
       </p:ext>
     </p:extLst>
   </p:cSld>
@@ -5870,7 +6281,7 @@
           <p:cNvPr id="2" name="Rectángulo 1">
             <a:extLst>
               <a:ext uri="{FF2B5EF4-FFF2-40B4-BE49-F238E27FC236}">
-                <a16:creationId xmlns:a16="http://schemas.microsoft.com/office/drawing/2014/main" id="{60F72C35-69B5-D9BE-9247-1EBBCC0F3775}"/>
+                <a16:creationId xmlns:a16="http://schemas.microsoft.com/office/drawing/2014/main" id="{0C632E0C-1699-E339-1854-1DFFBDFA8BD3}"/>
               </a:ext>
             </a:extLst>
           </p:cNvPr>
@@ -5938,7 +6349,7 @@
           <p:cNvPr id="3" name="Rectángulo 2">
             <a:extLst>
               <a:ext uri="{FF2B5EF4-FFF2-40B4-BE49-F238E27FC236}">
-                <a16:creationId xmlns:a16="http://schemas.microsoft.com/office/drawing/2014/main" id="{59AE4ADA-91F3-BD0D-DAA5-34EDA096E05A}"/>
+                <a16:creationId xmlns:a16="http://schemas.microsoft.com/office/drawing/2014/main" id="{74C64A31-5A53-97B3-F1A9-D817E0EB9566}"/>
               </a:ext>
             </a:extLst>
           </p:cNvPr>
@@ -5947,8 +6358,8 @@
         </p:nvSpPr>
         <p:spPr>
           <a:xfrm>
-            <a:off x="508000" y="317500"/>
-            <a:ext cx="76200" cy="571500"/>
+            <a:off x="0" y="0"/>
+            <a:ext cx="12192000" cy="50800"/>
           </a:xfrm>
           <a:prstGeom prst="rect">
             <a:avLst/>
@@ -6003,10 +6414,78 @@
       </p:sp>
       <p:sp>
         <p:nvSpPr>
-          <p:cNvPr id="4" name="CuadroTexto 3">
-            <a:extLst>
-              <a:ext uri="{FF2B5EF4-FFF2-40B4-BE49-F238E27FC236}">
-                <a16:creationId xmlns:a16="http://schemas.microsoft.com/office/drawing/2014/main" id="{14B8FED2-7002-42F3-D25C-66E3720AA920}"/>
+          <p:cNvPr id="4" name="Rectángulo 3">
+            <a:extLst>
+              <a:ext uri="{FF2B5EF4-FFF2-40B4-BE49-F238E27FC236}">
+                <a16:creationId xmlns:a16="http://schemas.microsoft.com/office/drawing/2014/main" id="{53AE3B8B-422F-3DFF-7DA7-1DB5296F2A96}"/>
+              </a:ext>
+            </a:extLst>
+          </p:cNvPr>
+          <p:cNvSpPr/>
+          <p:nvPr/>
+        </p:nvSpPr>
+        <p:spPr>
+          <a:xfrm>
+            <a:off x="508000" y="304800"/>
+            <a:ext cx="76200" cy="533400"/>
+          </a:xfrm>
+          <a:prstGeom prst="rect">
+            <a:avLst/>
+          </a:prstGeom>
+          <a:solidFill>
+            <a:srgbClr val="00D2FF"/>
+          </a:solidFill>
+          <a:ln w="19050" cap="flat" cmpd="sng" algn="ctr">
+            <a:noFill/>
+            <a:prstDash val="solid"/>
+            <a:miter lim="800000"/>
+          </a:ln>
+          <a:effectLst/>
+          <a:extLst>
+            <a:ext uri="{91240B29-F687-4F45-9708-019B960494DF}">
+              <a14:hiddenLine xmlns:a14="http://schemas.microsoft.com/office/drawing/2010/main" w="19050" cap="flat" cmpd="sng" algn="ctr">
+                <a:solidFill>
+                  <a:schemeClr val="accent1">
+                    <a:shade val="15000"/>
+                  </a:schemeClr>
+                </a:solidFill>
+                <a:prstDash val="solid"/>
+                <a:miter lim="800000"/>
+              </a14:hiddenLine>
+            </a:ext>
+          </a:extLst>
+        </p:spPr>
+        <p:style>
+          <a:lnRef idx="2">
+            <a:schemeClr val="accent1">
+              <a:shade val="15000"/>
+            </a:schemeClr>
+          </a:lnRef>
+          <a:fillRef idx="1">
+            <a:schemeClr val="accent1"/>
+          </a:fillRef>
+          <a:effectRef idx="0">
+            <a:schemeClr val="accent1"/>
+          </a:effectRef>
+          <a:fontRef idx="minor">
+            <a:schemeClr val="lt1"/>
+          </a:fontRef>
+        </p:style>
+        <p:txBody>
+          <a:bodyPr rtlCol="0" anchor="ctr"/>
+          <a:lstStyle/>
+          <a:p>
+            <a:pPr algn="ctr"/>
+            <a:endParaRPr lang="es-CL"/>
+          </a:p>
+        </p:txBody>
+      </p:sp>
+      <p:sp>
+        <p:nvSpPr>
+          <p:cNvPr id="5" name="CuadroTexto 4">
+            <a:extLst>
+              <a:ext uri="{FF2B5EF4-FFF2-40B4-BE49-F238E27FC236}">
+                <a16:creationId xmlns:a16="http://schemas.microsoft.com/office/drawing/2014/main" id="{C2B72E7B-1C6D-589E-4707-E2ABD2C33046}"/>
               </a:ext>
             </a:extLst>
           </p:cNvPr>
@@ -6015,8 +6494,8 @@
         </p:nvSpPr>
         <p:spPr>
           <a:xfrm>
-            <a:off x="698500" y="254000"/>
-            <a:ext cx="10795000" cy="430887"/>
+            <a:off x="698500" y="228600"/>
+            <a:ext cx="10922000" cy="415498"/>
           </a:xfrm>
           <a:prstGeom prst="rect">
             <a:avLst/>
@@ -6030,23 +6509,29 @@
           <a:lstStyle/>
           <a:p>
             <a:r>
-              <a:rPr lang="es-CL" sz="2200" b="1">
+              <a:rPr lang="es-MX" sz="2100" b="1">
                 <a:solidFill>
                   <a:srgbClr val="FFFFFF"/>
                 </a:solidFill>
                 <a:latin typeface="Segoe UI" panose="020B0502040204020203" pitchFamily="34" charset="0"/>
               </a:rPr>
-              <a:t>4. Video Tutorial del Proceso de InstalaciÃ³n y ValidaciÃ³n</a:t>
+              <a:t>4. Video Tutorial del Proceso de Instalación y Validación</a:t>
             </a:r>
-          </a:p>
-        </p:txBody>
-      </p:sp>
-      <p:sp>
-        <p:nvSpPr>
-          <p:cNvPr id="5" name="CuadroTexto 4">
-            <a:extLst>
-              <a:ext uri="{FF2B5EF4-FFF2-40B4-BE49-F238E27FC236}">
-                <a16:creationId xmlns:a16="http://schemas.microsoft.com/office/drawing/2014/main" id="{1694C17D-D6F2-831D-2A12-C8CB303D133D}"/>
+            <a:endParaRPr lang="es-CL" sz="2100" b="1">
+              <a:solidFill>
+                <a:srgbClr val="FFFFFF"/>
+              </a:solidFill>
+              <a:latin typeface="Segoe UI" panose="020B0502040204020203" pitchFamily="34" charset="0"/>
+            </a:endParaRPr>
+          </a:p>
+        </p:txBody>
+      </p:sp>
+      <p:sp>
+        <p:nvSpPr>
+          <p:cNvPr id="6" name="CuadroTexto 5">
+            <a:extLst>
+              <a:ext uri="{FF2B5EF4-FFF2-40B4-BE49-F238E27FC236}">
+                <a16:creationId xmlns:a16="http://schemas.microsoft.com/office/drawing/2014/main" id="{A96A833F-D254-AA40-E1C3-6A1E73B7AB6B}"/>
               </a:ext>
             </a:extLst>
           </p:cNvPr>
@@ -6055,8 +6540,8 @@
         </p:nvSpPr>
         <p:spPr>
           <a:xfrm>
-            <a:off x="698500" y="660400"/>
-            <a:ext cx="10795000" cy="276999"/>
+            <a:off x="698500" y="609600"/>
+            <a:ext cx="10922000" cy="269304"/>
           </a:xfrm>
           <a:prstGeom prst="rect">
             <a:avLst/>
@@ -6070,17 +6555,17 @@
           <a:lstStyle/>
           <a:p>
             <a:r>
-              <a:rPr lang="es-MX" sz="1200">
+              <a:rPr lang="es-MX" sz="1150">
                 <a:solidFill>
-                  <a:srgbClr val="8892B0"/>
+                  <a:srgbClr val="00D2FF"/>
                 </a:solidFill>
                 <a:latin typeface="Segoe UI" panose="020B0502040204020203" pitchFamily="34" charset="0"/>
               </a:rPr>
-              <a:t>Evidencia audiovisual del computador operativo, despliegue y funcionamiento</a:t>
+              <a:t>Demostración audiovisual del computador operativo, despliegue y funcionamiento</a:t>
             </a:r>
-            <a:endParaRPr lang="es-CL" sz="1200">
+            <a:endParaRPr lang="es-CL" sz="1150">
               <a:solidFill>
-                <a:srgbClr val="8892B0"/>
+                <a:srgbClr val="00D2FF"/>
               </a:solidFill>
               <a:latin typeface="Segoe UI" panose="020B0502040204020203" pitchFamily="34" charset="0"/>
             </a:endParaRPr>
@@ -6089,10 +6574,10 @@
       </p:sp>
       <p:sp>
         <p:nvSpPr>
-          <p:cNvPr id="6" name="Rectángulo 5">
-            <a:extLst>
-              <a:ext uri="{FF2B5EF4-FFF2-40B4-BE49-F238E27FC236}">
-                <a16:creationId xmlns:a16="http://schemas.microsoft.com/office/drawing/2014/main" id="{E003578E-BF47-D51D-4A2D-29BE259CA856}"/>
+          <p:cNvPr id="7" name="Rectángulo 6">
+            <a:extLst>
+              <a:ext uri="{FF2B5EF4-FFF2-40B4-BE49-F238E27FC236}">
+                <a16:creationId xmlns:a16="http://schemas.microsoft.com/office/drawing/2014/main" id="{B627E340-888C-6F5F-FAD4-2FC51F5117A0}"/>
               </a:ext>
             </a:extLst>
           </p:cNvPr>
@@ -6101,8 +6586,8 @@
         </p:nvSpPr>
         <p:spPr>
           <a:xfrm>
-            <a:off x="762000" y="1397000"/>
-            <a:ext cx="10668000" cy="4699000"/>
+            <a:off x="635000" y="1143000"/>
+            <a:ext cx="10922000" cy="5207000"/>
           </a:xfrm>
           <a:prstGeom prst="rect">
             <a:avLst/>
@@ -6143,10 +6628,10 @@
       </p:sp>
       <p:sp>
         <p:nvSpPr>
-          <p:cNvPr id="7" name="CuadroTexto 6">
-            <a:extLst>
-              <a:ext uri="{FF2B5EF4-FFF2-40B4-BE49-F238E27FC236}">
-                <a16:creationId xmlns:a16="http://schemas.microsoft.com/office/drawing/2014/main" id="{C9C3F1C1-420F-11C3-46C2-029464DFDEA3}"/>
+          <p:cNvPr id="8" name="CuadroTexto 7">
+            <a:extLst>
+              <a:ext uri="{FF2B5EF4-FFF2-40B4-BE49-F238E27FC236}">
+                <a16:creationId xmlns:a16="http://schemas.microsoft.com/office/drawing/2014/main" id="{ED50D361-8AF0-9766-C2EC-5F3118F96377}"/>
               </a:ext>
             </a:extLst>
           </p:cNvPr>
@@ -6155,8 +6640,8 @@
         </p:nvSpPr>
         <p:spPr>
           <a:xfrm>
-            <a:off x="1143000" y="1651000"/>
-            <a:ext cx="9906000" cy="2893100"/>
+            <a:off x="952500" y="1333500"/>
+            <a:ext cx="10287000" cy="3277820"/>
           </a:xfrm>
           <a:prstGeom prst="rect">
             <a:avLst/>
@@ -6170,28 +6655,35 @@
           <a:lstStyle/>
           <a:p>
             <a:r>
-              <a:rPr lang="es-CL" sz="1300">
+              <a:rPr lang="es-MX" sz="1150">
                 <a:solidFill>
                   <a:srgbClr val="FFFFFF"/>
                 </a:solidFill>
                 <a:latin typeface="Segoe UI" panose="020B0502040204020203" pitchFamily="34" charset="0"/>
               </a:rPr>
               <a:t>ENLACE DIRECTO AL VIDEO TUTORIAL (AULA VIRTUAL / YOUTUBE / DRIVE):
-https://youtu.be/ejemplo-enlace-video-asistencia (Reemplazar con el enlace de grabaciÃ³n definitiva)
+https://youtu.be/ejemplo-enlace-video-asistencia (Reemplazar con enlace final de grabación)
 ESTRUCTURA DEL VIDEO DEMOSTRATIVO (TIPO TUTORIAL):
-1. Min 00:00 - 01:15 (FabiÃ¡n Mora): PresentaciÃ³n del equipo, contexto del caso empresarial y demostraciÃ³n del computador operativo con Windows 11.
-2. Min 01:15 - 02:45 (FabiÃ¡n Mora): Proceso de instalaciÃ³n de .NET 10 Desktop Runtime, permisos NTFS e inicializaciÃ³n de SQLite.
-3. Min 02:45 - 05:30 (AgustÃ­n CaÃ±as): DemostraciÃ³n en vivo de la aplicaciÃ³n WPF: Login admin/empleado, marcaje de asistencia, bloqueo de doble marcaje y gestiÃ³n de usuarios CRUD.
-4. Min 05:30 - 07:15 (Paul Ferrada): GeneraciÃ³n de reportes con filtros automÃ¡ticos (atrasos &gt; 9:30 AM, salidas anticipadas &lt; 17:30 PM, inasistencias) y exportaciÃ³n a Excel en vivo.
-5. Min 07:15 - 08:30 (Paul Ferrada y Equipo): EjecuciÃ³n de 19 pruebas unitarias automatizadas (dotnet test) y cierre con sello valÃ³rico.</a:t>
+• Min 00:00 - 01:15 (Fabián Mora): Presentación del equipo, contexto del caso empresarial y comprobación del computador operativo con Windows 11.
+• Min 01:15 - 02:45 (Fabián Mora): Proceso de instalación de .NET 10 Desktop Runtime, permisos NTFS e inicialización de base de datos SQLite.
+• Min 02:45 - 05:30 (Agustín Cañas): Demostración en vivo de la aplicación: Login admin/empleado, marcaje de asistencia, bloqueo de doble entrada y gestión de usuarios CRUD.
+• Min 05:30 - 07:15 (Paul Ferrada): Generación de reportes con filtros automáticos (atrasos &gt; 9:30 AM, salidas &lt; 17:30 PM, inasistencias) y exportación directa a Microsoft Excel.
+• Min 07:15 - 08:30 (Paul Ferrada y Equipo): Ejecución en consola de 19 pruebas unitarias automatizadas (dotnet test) y cierre con sello valórico Tomista.
+</a:t>
             </a:r>
+            <a:endParaRPr lang="es-CL" sz="1150">
+              <a:solidFill>
+                <a:srgbClr val="FFFFFF"/>
+              </a:solidFill>
+              <a:latin typeface="Segoe UI" panose="020B0502040204020203" pitchFamily="34" charset="0"/>
+            </a:endParaRPr>
           </a:p>
         </p:txBody>
       </p:sp>
     </p:spTree>
     <p:extLst>
       <p:ext uri="{BB962C8B-B14F-4D97-AF65-F5344CB8AC3E}">
-        <p14:creationId xmlns:p14="http://schemas.microsoft.com/office/powerpoint/2010/main" val="1376777024"/>
+        <p14:creationId xmlns:p14="http://schemas.microsoft.com/office/powerpoint/2010/main" val="2046040407"/>
       </p:ext>
     </p:extLst>
   </p:cSld>
@@ -6223,7 +6715,7 @@
           <p:cNvPr id="2" name="Rectángulo 1">
             <a:extLst>
               <a:ext uri="{FF2B5EF4-FFF2-40B4-BE49-F238E27FC236}">
-                <a16:creationId xmlns:a16="http://schemas.microsoft.com/office/drawing/2014/main" id="{A6F42F42-09BA-AA9E-E5C6-A14629B8F46D}"/>
+                <a16:creationId xmlns:a16="http://schemas.microsoft.com/office/drawing/2014/main" id="{D77A35E8-8D9E-FEA2-48DA-864B1939F310}"/>
               </a:ext>
             </a:extLst>
           </p:cNvPr>
@@ -6291,7 +6783,7 @@
           <p:cNvPr id="3" name="Rectángulo 2">
             <a:extLst>
               <a:ext uri="{FF2B5EF4-FFF2-40B4-BE49-F238E27FC236}">
-                <a16:creationId xmlns:a16="http://schemas.microsoft.com/office/drawing/2014/main" id="{DE11E7A1-879A-61A7-3BB5-BCCAFB5DF821}"/>
+                <a16:creationId xmlns:a16="http://schemas.microsoft.com/office/drawing/2014/main" id="{CC29D8D3-903F-3FF5-3B93-5C302C7FF6B7}"/>
               </a:ext>
             </a:extLst>
           </p:cNvPr>
@@ -6300,8 +6792,8 @@
         </p:nvSpPr>
         <p:spPr>
           <a:xfrm>
-            <a:off x="508000" y="317500"/>
-            <a:ext cx="76200" cy="571500"/>
+            <a:off x="0" y="0"/>
+            <a:ext cx="12192000" cy="50800"/>
           </a:xfrm>
           <a:prstGeom prst="rect">
             <a:avLst/>
@@ -6356,10 +6848,78 @@
       </p:sp>
       <p:sp>
         <p:nvSpPr>
-          <p:cNvPr id="4" name="CuadroTexto 3">
-            <a:extLst>
-              <a:ext uri="{FF2B5EF4-FFF2-40B4-BE49-F238E27FC236}">
-                <a16:creationId xmlns:a16="http://schemas.microsoft.com/office/drawing/2014/main" id="{B56F4769-CDD4-E0EC-EFDF-C0FEF603345F}"/>
+          <p:cNvPr id="4" name="Rectángulo 3">
+            <a:extLst>
+              <a:ext uri="{FF2B5EF4-FFF2-40B4-BE49-F238E27FC236}">
+                <a16:creationId xmlns:a16="http://schemas.microsoft.com/office/drawing/2014/main" id="{D2046764-0DD3-E2EB-CEA2-3D6062792C87}"/>
+              </a:ext>
+            </a:extLst>
+          </p:cNvPr>
+          <p:cNvSpPr/>
+          <p:nvPr/>
+        </p:nvSpPr>
+        <p:spPr>
+          <a:xfrm>
+            <a:off x="508000" y="304800"/>
+            <a:ext cx="76200" cy="533400"/>
+          </a:xfrm>
+          <a:prstGeom prst="rect">
+            <a:avLst/>
+          </a:prstGeom>
+          <a:solidFill>
+            <a:srgbClr val="00D2FF"/>
+          </a:solidFill>
+          <a:ln w="19050" cap="flat" cmpd="sng" algn="ctr">
+            <a:noFill/>
+            <a:prstDash val="solid"/>
+            <a:miter lim="800000"/>
+          </a:ln>
+          <a:effectLst/>
+          <a:extLst>
+            <a:ext uri="{91240B29-F687-4F45-9708-019B960494DF}">
+              <a14:hiddenLine xmlns:a14="http://schemas.microsoft.com/office/drawing/2010/main" w="19050" cap="flat" cmpd="sng" algn="ctr">
+                <a:solidFill>
+                  <a:schemeClr val="accent1">
+                    <a:shade val="15000"/>
+                  </a:schemeClr>
+                </a:solidFill>
+                <a:prstDash val="solid"/>
+                <a:miter lim="800000"/>
+              </a14:hiddenLine>
+            </a:ext>
+          </a:extLst>
+        </p:spPr>
+        <p:style>
+          <a:lnRef idx="2">
+            <a:schemeClr val="accent1">
+              <a:shade val="15000"/>
+            </a:schemeClr>
+          </a:lnRef>
+          <a:fillRef idx="1">
+            <a:schemeClr val="accent1"/>
+          </a:fillRef>
+          <a:effectRef idx="0">
+            <a:schemeClr val="accent1"/>
+          </a:effectRef>
+          <a:fontRef idx="minor">
+            <a:schemeClr val="lt1"/>
+          </a:fontRef>
+        </p:style>
+        <p:txBody>
+          <a:bodyPr rtlCol="0" anchor="ctr"/>
+          <a:lstStyle/>
+          <a:p>
+            <a:pPr algn="ctr"/>
+            <a:endParaRPr lang="es-CL"/>
+          </a:p>
+        </p:txBody>
+      </p:sp>
+      <p:sp>
+        <p:nvSpPr>
+          <p:cNvPr id="5" name="CuadroTexto 4">
+            <a:extLst>
+              <a:ext uri="{FF2B5EF4-FFF2-40B4-BE49-F238E27FC236}">
+                <a16:creationId xmlns:a16="http://schemas.microsoft.com/office/drawing/2014/main" id="{A30B86CD-E56D-817F-1373-4CEAF677D5D6}"/>
               </a:ext>
             </a:extLst>
           </p:cNvPr>
@@ -6368,8 +6928,8 @@
         </p:nvSpPr>
         <p:spPr>
           <a:xfrm>
-            <a:off x="698500" y="254000"/>
-            <a:ext cx="10795000" cy="430887"/>
+            <a:off x="698500" y="228600"/>
+            <a:ext cx="10922000" cy="415498"/>
           </a:xfrm>
           <a:prstGeom prst="rect">
             <a:avLst/>
@@ -6383,15 +6943,15 @@
           <a:lstStyle/>
           <a:p>
             <a:r>
-              <a:rPr lang="es-MX" sz="2200" b="1">
+              <a:rPr lang="es-MX" sz="2100" b="1">
                 <a:solidFill>
                   <a:srgbClr val="FFFFFF"/>
                 </a:solidFill>
                 <a:latin typeface="Segoe UI" panose="020B0502040204020203" pitchFamily="34" charset="0"/>
               </a:rPr>
-              <a:t>5. ValidaciÃ³n TÃ©cnica y Suite de Pruebas xUnit (Actividad 2.5)</a:t>
+              <a:t>5. Validación Técnica y Suite de Pruebas xUnit (Actividad 2.5)</a:t>
             </a:r>
-            <a:endParaRPr lang="es-CL" sz="2200" b="1">
+            <a:endParaRPr lang="es-CL" sz="2100" b="1">
               <a:solidFill>
                 <a:srgbClr val="FFFFFF"/>
               </a:solidFill>
@@ -6402,10 +6962,10 @@
       </p:sp>
       <p:sp>
         <p:nvSpPr>
-          <p:cNvPr id="5" name="CuadroTexto 4">
-            <a:extLst>
-              <a:ext uri="{FF2B5EF4-FFF2-40B4-BE49-F238E27FC236}">
-                <a16:creationId xmlns:a16="http://schemas.microsoft.com/office/drawing/2014/main" id="{D9705677-F385-8FFB-3722-BD76ABDD7C17}"/>
+          <p:cNvPr id="6" name="CuadroTexto 5">
+            <a:extLst>
+              <a:ext uri="{FF2B5EF4-FFF2-40B4-BE49-F238E27FC236}">
+                <a16:creationId xmlns:a16="http://schemas.microsoft.com/office/drawing/2014/main" id="{9882199B-8A3F-EBF9-C3AB-10B3CA76A85F}"/>
               </a:ext>
             </a:extLst>
           </p:cNvPr>
@@ -6414,8 +6974,8 @@
         </p:nvSpPr>
         <p:spPr>
           <a:xfrm>
-            <a:off x="698500" y="660400"/>
-            <a:ext cx="10795000" cy="276999"/>
+            <a:off x="698500" y="609600"/>
+            <a:ext cx="10922000" cy="269304"/>
           </a:xfrm>
           <a:prstGeom prst="rect">
             <a:avLst/>
@@ -6429,17 +6989,17 @@
           <a:lstStyle/>
           <a:p>
             <a:r>
-              <a:rPr lang="es-MX" sz="1200">
+              <a:rPr lang="es-MX" sz="1150">
                 <a:solidFill>
-                  <a:srgbClr val="8892B0"/>
+                  <a:srgbClr val="00D2FF"/>
                 </a:solidFill>
                 <a:latin typeface="Segoe UI" panose="020B0502040204020203" pitchFamily="34" charset="0"/>
               </a:rPr>
-              <a:t>19 Pruebas Unitarias Automatizadas aprobadas con 100% de Ã©xito</a:t>
+              <a:t>19 Pruebas Unitarias Automatizadas aprobadas con 100% de éxito</a:t>
             </a:r>
-            <a:endParaRPr lang="es-CL" sz="1200">
+            <a:endParaRPr lang="es-CL" sz="1150">
               <a:solidFill>
-                <a:srgbClr val="8892B0"/>
+                <a:srgbClr val="00D2FF"/>
               </a:solidFill>
               <a:latin typeface="Segoe UI" panose="020B0502040204020203" pitchFamily="34" charset="0"/>
             </a:endParaRPr>
@@ -6448,10 +7008,10 @@
       </p:sp>
       <p:graphicFrame>
         <p:nvGraphicFramePr>
-          <p:cNvPr id="6" name="Tabla 5">
-            <a:extLst>
-              <a:ext uri="{FF2B5EF4-FFF2-40B4-BE49-F238E27FC236}">
-                <a16:creationId xmlns:a16="http://schemas.microsoft.com/office/drawing/2014/main" id="{B3E87C9D-6D6A-A2A8-E80A-F30D4297193B}"/>
+          <p:cNvPr id="7" name="Tabla 6">
+            <a:extLst>
+              <a:ext uri="{FF2B5EF4-FFF2-40B4-BE49-F238E27FC236}">
+                <a16:creationId xmlns:a16="http://schemas.microsoft.com/office/drawing/2014/main" id="{BE461808-E702-CAD0-CAED-ED3A86206F92}"/>
               </a:ext>
             </a:extLst>
           </p:cNvPr>
@@ -6461,14 +7021,14 @@
           <p:nvPr>
             <p:extLst>
               <p:ext uri="{D42A27DB-BD31-4B8C-83A1-F6EECF244321}">
-                <p14:modId xmlns:p14="http://schemas.microsoft.com/office/powerpoint/2010/main" val="2477050052"/>
+                <p14:modId xmlns:p14="http://schemas.microsoft.com/office/powerpoint/2010/main" val="3482121065"/>
               </p:ext>
             </p:extLst>
           </p:nvPr>
         </p:nvGraphicFramePr>
         <p:xfrm>
-          <a:off x="762000" y="1397000"/>
-          <a:ext cx="10668000" cy="4572000"/>
+          <a:off x="635000" y="1206500"/>
+          <a:ext cx="10922000" cy="5016500"/>
         </p:xfrm>
         <a:graphic>
           <a:graphicData uri="http://schemas.openxmlformats.org/drawingml/2006/table">
@@ -6477,43 +7037,43 @@
                 <a:tableStyleId>{5C22544A-7EE6-4342-B048-85BDC9FD1C3A}</a:tableStyleId>
               </a:tblPr>
               <a:tblGrid>
-                <a:gridCol w="2133600">
+                <a:gridCol w="2184400">
                   <a:extLst>
                     <a:ext uri="{9D8B030D-6E8A-4147-A177-3AD203B41FA5}">
-                      <a16:colId xmlns:a16="http://schemas.microsoft.com/office/drawing/2014/main" val="664654210"/>
+                      <a16:colId xmlns:a16="http://schemas.microsoft.com/office/drawing/2014/main" val="1742483028"/>
                     </a:ext>
                   </a:extLst>
                 </a:gridCol>
-                <a:gridCol w="2133600">
+                <a:gridCol w="2184400">
                   <a:extLst>
                     <a:ext uri="{9D8B030D-6E8A-4147-A177-3AD203B41FA5}">
-                      <a16:colId xmlns:a16="http://schemas.microsoft.com/office/drawing/2014/main" val="2966571309"/>
+                      <a16:colId xmlns:a16="http://schemas.microsoft.com/office/drawing/2014/main" val="2859561047"/>
                     </a:ext>
                   </a:extLst>
                 </a:gridCol>
-                <a:gridCol w="2133600">
+                <a:gridCol w="2184400">
                   <a:extLst>
                     <a:ext uri="{9D8B030D-6E8A-4147-A177-3AD203B41FA5}">
-                      <a16:colId xmlns:a16="http://schemas.microsoft.com/office/drawing/2014/main" val="971221815"/>
+                      <a16:colId xmlns:a16="http://schemas.microsoft.com/office/drawing/2014/main" val="852907122"/>
                     </a:ext>
                   </a:extLst>
                 </a:gridCol>
-                <a:gridCol w="2133600">
+                <a:gridCol w="2184400">
                   <a:extLst>
                     <a:ext uri="{9D8B030D-6E8A-4147-A177-3AD203B41FA5}">
-                      <a16:colId xmlns:a16="http://schemas.microsoft.com/office/drawing/2014/main" val="3159298681"/>
+                      <a16:colId xmlns:a16="http://schemas.microsoft.com/office/drawing/2014/main" val="4243434100"/>
                     </a:ext>
                   </a:extLst>
                 </a:gridCol>
-                <a:gridCol w="2133600">
+                <a:gridCol w="2184400">
                   <a:extLst>
                     <a:ext uri="{9D8B030D-6E8A-4147-A177-3AD203B41FA5}">
-                      <a16:colId xmlns:a16="http://schemas.microsoft.com/office/drawing/2014/main" val="3491191595"/>
+                      <a16:colId xmlns:a16="http://schemas.microsoft.com/office/drawing/2014/main" val="1864367297"/>
                     </a:ext>
                   </a:extLst>
                 </a:gridCol>
               </a:tblGrid>
-              <a:tr h="762000">
+              <a:tr h="836083">
                 <a:tc>
                   <a:txBody>
                     <a:bodyPr/>
@@ -6524,8 +7084,9 @@
                           <a:solidFill>
                             <a:srgbClr val="00D2FF"/>
                           </a:solidFill>
+                          <a:latin typeface="Segoe UI" panose="020B0502040204020203" pitchFamily="34" charset="0"/>
                         </a:rPr>
-                        <a:t>MÃ³dulo de Prueba (xUnit)</a:t>
+                        <a:t>Módulo de Prueba (xUnit)</a:t>
                       </a:r>
                     </a:p>
                   </a:txBody>
@@ -6545,6 +7106,7 @@
                           <a:solidFill>
                             <a:srgbClr val="00D2FF"/>
                           </a:solidFill>
+                          <a:latin typeface="Segoe UI" panose="020B0502040204020203" pitchFamily="34" charset="0"/>
                         </a:rPr>
                         <a:t>Pruebas Ejecutadas</a:t>
                       </a:r>
@@ -6566,6 +7128,7 @@
                           <a:solidFill>
                             <a:srgbClr val="00D2FF"/>
                           </a:solidFill>
+                          <a:latin typeface="Segoe UI" panose="020B0502040204020203" pitchFamily="34" charset="0"/>
                         </a:rPr>
                         <a:t>Superadas</a:t>
                       </a:r>
@@ -6587,6 +7150,7 @@
                           <a:solidFill>
                             <a:srgbClr val="00D2FF"/>
                           </a:solidFill>
+                          <a:latin typeface="Segoe UI" panose="020B0502040204020203" pitchFamily="34" charset="0"/>
                         </a:rPr>
                         <a:t>Fallidas</a:t>
                       </a:r>
@@ -6608,6 +7172,7 @@
                           <a:solidFill>
                             <a:srgbClr val="00D2FF"/>
                           </a:solidFill>
+                          <a:latin typeface="Segoe UI" panose="020B0502040204020203" pitchFamily="34" charset="0"/>
                         </a:rPr>
                         <a:t>Resultado Operativo</a:t>
                       </a:r>
@@ -6621,23 +7186,24 @@
                 </a:tc>
                 <a:extLst>
                   <a:ext uri="{0D108BD9-81ED-4DB2-BD59-A6C34878D82A}">
-                    <a16:rowId xmlns:a16="http://schemas.microsoft.com/office/drawing/2014/main" val="464457887"/>
+                    <a16:rowId xmlns:a16="http://schemas.microsoft.com/office/drawing/2014/main" val="348030957"/>
                   </a:ext>
                 </a:extLst>
               </a:tr>
-              <a:tr h="762000">
+              <a:tr h="836083">
                 <a:tc>
                   <a:txBody>
                     <a:bodyPr/>
                     <a:lstStyle/>
                     <a:p>
                       <a:r>
-                        <a:rPr lang="es-CL" sz="1100">
+                        <a:rPr lang="es-CL" sz="1150">
                           <a:solidFill>
                             <a:srgbClr val="FFFFFF"/>
                           </a:solidFill>
+                          <a:latin typeface="Segoe UI" panose="020B0502040204020203" pitchFamily="34" charset="0"/>
                         </a:rPr>
-                        <a:t>AuthServiceTests (AutenticaciÃ³n y SesiÃ³n)</a:t>
+                        <a:t>AuthServiceTests (Autenticación y Sesión)</a:t>
                       </a:r>
                     </a:p>
                   </a:txBody>
@@ -6653,10 +7219,11 @@
                     <a:lstStyle/>
                     <a:p>
                       <a:r>
-                        <a:rPr lang="es-CL" sz="1100">
+                        <a:rPr lang="es-CL" sz="1150">
                           <a:solidFill>
                             <a:srgbClr val="FFFFFF"/>
                           </a:solidFill>
+                          <a:latin typeface="Segoe UI" panose="020B0502040204020203" pitchFamily="34" charset="0"/>
                         </a:rPr>
                         <a:t>3 pruebas</a:t>
                       </a:r>
@@ -6674,10 +7241,11 @@
                     <a:lstStyle/>
                     <a:p>
                       <a:r>
-                        <a:rPr lang="es-CL" sz="1100">
+                        <a:rPr lang="es-CL" sz="1150">
                           <a:solidFill>
                             <a:srgbClr val="64FFDA"/>
                           </a:solidFill>
+                          <a:latin typeface="Segoe UI" panose="020B0502040204020203" pitchFamily="34" charset="0"/>
                         </a:rPr>
                         <a:t>3</a:t>
                       </a:r>
@@ -6695,10 +7263,11 @@
                     <a:lstStyle/>
                     <a:p>
                       <a:r>
-                        <a:rPr lang="es-CL" sz="1100">
+                        <a:rPr lang="es-CL" sz="1150">
                           <a:solidFill>
                             <a:srgbClr val="64FFDA"/>
                           </a:solidFill>
+                          <a:latin typeface="Segoe UI" panose="020B0502040204020203" pitchFamily="34" charset="0"/>
                         </a:rPr>
                         <a:t>0</a:t>
                       </a:r>
@@ -6716,10 +7285,11 @@
                     <a:lstStyle/>
                     <a:p>
                       <a:r>
-                        <a:rPr lang="es-CL" sz="1100">
+                        <a:rPr lang="es-CL" sz="1150">
                           <a:solidFill>
                             <a:srgbClr val="64FFDA"/>
                           </a:solidFill>
+                          <a:latin typeface="Segoe UI" panose="020B0502040204020203" pitchFamily="34" charset="0"/>
                         </a:rPr>
                         <a:t>Aprobado (100%)</a:t>
                       </a:r>
@@ -6733,21 +7303,22 @@
                 </a:tc>
                 <a:extLst>
                   <a:ext uri="{0D108BD9-81ED-4DB2-BD59-A6C34878D82A}">
-                    <a16:rowId xmlns:a16="http://schemas.microsoft.com/office/drawing/2014/main" val="1801489695"/>
+                    <a16:rowId xmlns:a16="http://schemas.microsoft.com/office/drawing/2014/main" val="3786047379"/>
                   </a:ext>
                 </a:extLst>
               </a:tr>
-              <a:tr h="762000">
+              <a:tr h="836083">
                 <a:tc>
                   <a:txBody>
                     <a:bodyPr/>
                     <a:lstStyle/>
                     <a:p>
                       <a:r>
-                        <a:rPr lang="es-CL" sz="1100">
+                        <a:rPr lang="es-CL" sz="1150">
                           <a:solidFill>
                             <a:srgbClr val="FFFFFF"/>
                           </a:solidFill>
+                          <a:latin typeface="Segoe UI" panose="020B0502040204020203" pitchFamily="34" charset="0"/>
                         </a:rPr>
                         <a:t>AsistenciaServiceTests (Marcaje y Restricciones)</a:t>
                       </a:r>
@@ -6765,10 +7336,11 @@
                     <a:lstStyle/>
                     <a:p>
                       <a:r>
-                        <a:rPr lang="es-CL" sz="1100">
+                        <a:rPr lang="es-CL" sz="1150">
                           <a:solidFill>
                             <a:srgbClr val="FFFFFF"/>
                           </a:solidFill>
+                          <a:latin typeface="Segoe UI" panose="020B0502040204020203" pitchFamily="34" charset="0"/>
                         </a:rPr>
                         <a:t>4 pruebas</a:t>
                       </a:r>
@@ -6786,10 +7358,11 @@
                     <a:lstStyle/>
                     <a:p>
                       <a:r>
-                        <a:rPr lang="es-CL" sz="1100">
+                        <a:rPr lang="es-CL" sz="1150">
                           <a:solidFill>
                             <a:srgbClr val="64FFDA"/>
                           </a:solidFill>
+                          <a:latin typeface="Segoe UI" panose="020B0502040204020203" pitchFamily="34" charset="0"/>
                         </a:rPr>
                         <a:t>4</a:t>
                       </a:r>
@@ -6807,10 +7380,11 @@
                     <a:lstStyle/>
                     <a:p>
                       <a:r>
-                        <a:rPr lang="es-CL" sz="1100">
+                        <a:rPr lang="es-CL" sz="1150">
                           <a:solidFill>
                             <a:srgbClr val="64FFDA"/>
                           </a:solidFill>
+                          <a:latin typeface="Segoe UI" panose="020B0502040204020203" pitchFamily="34" charset="0"/>
                         </a:rPr>
                         <a:t>0</a:t>
                       </a:r>
@@ -6828,10 +7402,11 @@
                     <a:lstStyle/>
                     <a:p>
                       <a:r>
-                        <a:rPr lang="es-CL" sz="1100">
+                        <a:rPr lang="es-CL" sz="1150">
                           <a:solidFill>
                             <a:srgbClr val="64FFDA"/>
                           </a:solidFill>
+                          <a:latin typeface="Segoe UI" panose="020B0502040204020203" pitchFamily="34" charset="0"/>
                         </a:rPr>
                         <a:t>Aprobado (100%)</a:t>
                       </a:r>
@@ -6845,28 +7420,30 @@
                 </a:tc>
                 <a:extLst>
                   <a:ext uri="{0D108BD9-81ED-4DB2-BD59-A6C34878D82A}">
-                    <a16:rowId xmlns:a16="http://schemas.microsoft.com/office/drawing/2014/main" val="953050735"/>
+                    <a16:rowId xmlns:a16="http://schemas.microsoft.com/office/drawing/2014/main" val="1051914526"/>
                   </a:ext>
                 </a:extLst>
               </a:tr>
-              <a:tr h="762000">
+              <a:tr h="836083">
                 <a:tc>
                   <a:txBody>
                     <a:bodyPr/>
                     <a:lstStyle/>
                     <a:p>
                       <a:r>
-                        <a:rPr lang="es-MX" sz="1100">
+                        <a:rPr lang="es-MX" sz="1150">
                           <a:solidFill>
                             <a:srgbClr val="FFFFFF"/>
                           </a:solidFill>
+                          <a:latin typeface="Segoe UI" panose="020B0502040204020203" pitchFamily="34" charset="0"/>
                         </a:rPr>
-                        <a:t>UsuarioServiceTests (GestiÃ³n y CRUD de Usuarios)</a:t>
+                        <a:t>UsuarioServiceTests (Gestión y CRUD de Usuarios)</a:t>
                       </a:r>
-                      <a:endParaRPr lang="es-CL" sz="1100">
+                      <a:endParaRPr lang="es-CL" sz="1150">
                         <a:solidFill>
                           <a:srgbClr val="FFFFFF"/>
                         </a:solidFill>
+                        <a:latin typeface="Segoe UI" panose="020B0502040204020203" pitchFamily="34" charset="0"/>
                       </a:endParaRPr>
                     </a:p>
                   </a:txBody>
@@ -6882,10 +7459,11 @@
                     <a:lstStyle/>
                     <a:p>
                       <a:r>
-                        <a:rPr lang="es-CL" sz="1100">
+                        <a:rPr lang="es-CL" sz="1150">
                           <a:solidFill>
                             <a:srgbClr val="FFFFFF"/>
                           </a:solidFill>
+                          <a:latin typeface="Segoe UI" panose="020B0502040204020203" pitchFamily="34" charset="0"/>
                         </a:rPr>
                         <a:t>4 pruebas</a:t>
                       </a:r>
@@ -6903,10 +7481,11 @@
                     <a:lstStyle/>
                     <a:p>
                       <a:r>
-                        <a:rPr lang="es-CL" sz="1100">
+                        <a:rPr lang="es-CL" sz="1150">
                           <a:solidFill>
                             <a:srgbClr val="64FFDA"/>
                           </a:solidFill>
+                          <a:latin typeface="Segoe UI" panose="020B0502040204020203" pitchFamily="34" charset="0"/>
                         </a:rPr>
                         <a:t>4</a:t>
                       </a:r>
@@ -6924,10 +7503,11 @@
                     <a:lstStyle/>
                     <a:p>
                       <a:r>
-                        <a:rPr lang="es-CL" sz="1100">
+                        <a:rPr lang="es-CL" sz="1150">
                           <a:solidFill>
                             <a:srgbClr val="64FFDA"/>
                           </a:solidFill>
+                          <a:latin typeface="Segoe UI" panose="020B0502040204020203" pitchFamily="34" charset="0"/>
                         </a:rPr>
                         <a:t>0</a:t>
                       </a:r>
@@ -6945,10 +7525,11 @@
                     <a:lstStyle/>
                     <a:p>
                       <a:r>
-                        <a:rPr lang="es-CL" sz="1100">
+                        <a:rPr lang="es-CL" sz="1150">
                           <a:solidFill>
                             <a:srgbClr val="64FFDA"/>
                           </a:solidFill>
+                          <a:latin typeface="Segoe UI" panose="020B0502040204020203" pitchFamily="34" charset="0"/>
                         </a:rPr>
                         <a:t>Aprobado (100%)</a:t>
                       </a:r>
@@ -6962,28 +7543,30 @@
                 </a:tc>
                 <a:extLst>
                   <a:ext uri="{0D108BD9-81ED-4DB2-BD59-A6C34878D82A}">
-                    <a16:rowId xmlns:a16="http://schemas.microsoft.com/office/drawing/2014/main" val="1768398537"/>
+                    <a16:rowId xmlns:a16="http://schemas.microsoft.com/office/drawing/2014/main" val="2935220264"/>
                   </a:ext>
                 </a:extLst>
               </a:tr>
-              <a:tr h="762000">
+              <a:tr h="836083">
                 <a:tc>
                   <a:txBody>
                     <a:bodyPr/>
                     <a:lstStyle/>
                     <a:p>
                       <a:r>
-                        <a:rPr lang="pt-BR" sz="1100">
+                        <a:rPr lang="pt-BR" sz="1150">
                           <a:solidFill>
                             <a:srgbClr val="FFFFFF"/>
                           </a:solidFill>
+                          <a:latin typeface="Segoe UI" panose="020B0502040204020203" pitchFamily="34" charset="0"/>
                         </a:rPr>
                         <a:t>ReporteServiceTests (Atrasos, Salidas e Inasistencias)</a:t>
                       </a:r>
-                      <a:endParaRPr lang="es-CL" sz="1100">
+                      <a:endParaRPr lang="es-CL" sz="1150">
                         <a:solidFill>
                           <a:srgbClr val="FFFFFF"/>
                         </a:solidFill>
+                        <a:latin typeface="Segoe UI" panose="020B0502040204020203" pitchFamily="34" charset="0"/>
                       </a:endParaRPr>
                     </a:p>
                   </a:txBody>
@@ -6999,10 +7582,11 @@
                     <a:lstStyle/>
                     <a:p>
                       <a:r>
-                        <a:rPr lang="es-CL" sz="1100">
+                        <a:rPr lang="es-CL" sz="1150">
                           <a:solidFill>
                             <a:srgbClr val="FFFFFF"/>
                           </a:solidFill>
+                          <a:latin typeface="Segoe UI" panose="020B0502040204020203" pitchFamily="34" charset="0"/>
                         </a:rPr>
                         <a:t>3 pruebas</a:t>
                       </a:r>
@@ -7020,10 +7604,11 @@
                     <a:lstStyle/>
                     <a:p>
                       <a:r>
-                        <a:rPr lang="es-CL" sz="1100">
+                        <a:rPr lang="es-CL" sz="1150">
                           <a:solidFill>
                             <a:srgbClr val="64FFDA"/>
                           </a:solidFill>
+                          <a:latin typeface="Segoe UI" panose="020B0502040204020203" pitchFamily="34" charset="0"/>
                         </a:rPr>
                         <a:t>3</a:t>
                       </a:r>
@@ -7041,10 +7626,11 @@
                     <a:lstStyle/>
                     <a:p>
                       <a:r>
-                        <a:rPr lang="es-CL" sz="1100">
+                        <a:rPr lang="es-CL" sz="1150">
                           <a:solidFill>
                             <a:srgbClr val="64FFDA"/>
                           </a:solidFill>
+                          <a:latin typeface="Segoe UI" panose="020B0502040204020203" pitchFamily="34" charset="0"/>
                         </a:rPr>
                         <a:t>0</a:t>
                       </a:r>
@@ -7062,10 +7648,11 @@
                     <a:lstStyle/>
                     <a:p>
                       <a:r>
-                        <a:rPr lang="es-CL" sz="1100">
+                        <a:rPr lang="es-CL" sz="1150">
                           <a:solidFill>
                             <a:srgbClr val="64FFDA"/>
                           </a:solidFill>
+                          <a:latin typeface="Segoe UI" panose="020B0502040204020203" pitchFamily="34" charset="0"/>
                         </a:rPr>
                         <a:t>Aprobado (100%)</a:t>
                       </a:r>
@@ -7079,24 +7666,31 @@
                 </a:tc>
                 <a:extLst>
                   <a:ext uri="{0D108BD9-81ED-4DB2-BD59-A6C34878D82A}">
-                    <a16:rowId xmlns:a16="http://schemas.microsoft.com/office/drawing/2014/main" val="33025334"/>
+                    <a16:rowId xmlns:a16="http://schemas.microsoft.com/office/drawing/2014/main" val="2898637371"/>
                   </a:ext>
                 </a:extLst>
               </a:tr>
-              <a:tr h="762000">
+              <a:tr h="836083">
                 <a:tc>
                   <a:txBody>
                     <a:bodyPr/>
                     <a:lstStyle/>
                     <a:p>
                       <a:r>
-                        <a:rPr lang="es-CL" sz="1100">
+                        <a:rPr lang="es-MX" sz="1150">
                           <a:solidFill>
                             <a:srgbClr val="FFFFFF"/>
                           </a:solidFill>
+                          <a:latin typeface="Segoe UI" panose="020B0502040204020203" pitchFamily="34" charset="0"/>
                         </a:rPr>
-                        <a:t>ExportServiceTests (ExportaciÃ³n CSV y UTF-8 BOM)</a:t>
+                        <a:t>ExportServiceTests (Exportación CSV y UTF-8 BOM)</a:t>
                       </a:r>
+                      <a:endParaRPr lang="es-CL" sz="1150">
+                        <a:solidFill>
+                          <a:srgbClr val="FFFFFF"/>
+                        </a:solidFill>
+                        <a:latin typeface="Segoe UI" panose="020B0502040204020203" pitchFamily="34" charset="0"/>
+                      </a:endParaRPr>
                     </a:p>
                   </a:txBody>
                   <a:tcPr>
@@ -7111,10 +7705,11 @@
                     <a:lstStyle/>
                     <a:p>
                       <a:r>
-                        <a:rPr lang="es-CL" sz="1100">
+                        <a:rPr lang="es-CL" sz="1150">
                           <a:solidFill>
                             <a:srgbClr val="FFFFFF"/>
                           </a:solidFill>
+                          <a:latin typeface="Segoe UI" panose="020B0502040204020203" pitchFamily="34" charset="0"/>
                         </a:rPr>
                         <a:t>5 pruebas</a:t>
                       </a:r>
@@ -7132,10 +7727,11 @@
                     <a:lstStyle/>
                     <a:p>
                       <a:r>
-                        <a:rPr lang="es-CL" sz="1100">
+                        <a:rPr lang="es-CL" sz="1150">
                           <a:solidFill>
                             <a:srgbClr val="64FFDA"/>
                           </a:solidFill>
+                          <a:latin typeface="Segoe UI" panose="020B0502040204020203" pitchFamily="34" charset="0"/>
                         </a:rPr>
                         <a:t>5</a:t>
                       </a:r>
@@ -7153,10 +7749,11 @@
                     <a:lstStyle/>
                     <a:p>
                       <a:r>
-                        <a:rPr lang="es-CL" sz="1100">
+                        <a:rPr lang="es-CL" sz="1150">
                           <a:solidFill>
                             <a:srgbClr val="64FFDA"/>
                           </a:solidFill>
+                          <a:latin typeface="Segoe UI" panose="020B0502040204020203" pitchFamily="34" charset="0"/>
                         </a:rPr>
                         <a:t>0</a:t>
                       </a:r>
@@ -7174,10 +7771,11 @@
                     <a:lstStyle/>
                     <a:p>
                       <a:r>
-                        <a:rPr lang="es-CL" sz="1100">
+                        <a:rPr lang="es-CL" sz="1150">
                           <a:solidFill>
                             <a:srgbClr val="64FFDA"/>
                           </a:solidFill>
+                          <a:latin typeface="Segoe UI" panose="020B0502040204020203" pitchFamily="34" charset="0"/>
                         </a:rPr>
                         <a:t>Aprobado (100%)</a:t>
                       </a:r>
@@ -7191,7 +7789,7 @@
                 </a:tc>
                 <a:extLst>
                   <a:ext uri="{0D108BD9-81ED-4DB2-BD59-A6C34878D82A}">
-                    <a16:rowId xmlns:a16="http://schemas.microsoft.com/office/drawing/2014/main" val="2937195049"/>
+                    <a16:rowId xmlns:a16="http://schemas.microsoft.com/office/drawing/2014/main" val="2396854933"/>
                   </a:ext>
                 </a:extLst>
               </a:tr>
@@ -7202,7 +7800,7 @@
     </p:spTree>
     <p:extLst>
       <p:ext uri="{BB962C8B-B14F-4D97-AF65-F5344CB8AC3E}">
-        <p14:creationId xmlns:p14="http://schemas.microsoft.com/office/powerpoint/2010/main" val="513588820"/>
+        <p14:creationId xmlns:p14="http://schemas.microsoft.com/office/powerpoint/2010/main" val="2910037814"/>
       </p:ext>
     </p:extLst>
   </p:cSld>
@@ -7234,7 +7832,7 @@
           <p:cNvPr id="2" name="Rectángulo 1">
             <a:extLst>
               <a:ext uri="{FF2B5EF4-FFF2-40B4-BE49-F238E27FC236}">
-                <a16:creationId xmlns:a16="http://schemas.microsoft.com/office/drawing/2014/main" id="{CC97C5C3-D4B1-42A0-455F-38CA182FC0E2}"/>
+                <a16:creationId xmlns:a16="http://schemas.microsoft.com/office/drawing/2014/main" id="{92497A41-ED5D-AE1A-5093-5C1CF1BDAC77}"/>
               </a:ext>
             </a:extLst>
           </p:cNvPr>
@@ -7302,7 +7900,7 @@
           <p:cNvPr id="3" name="Rectángulo 2">
             <a:extLst>
               <a:ext uri="{FF2B5EF4-FFF2-40B4-BE49-F238E27FC236}">
-                <a16:creationId xmlns:a16="http://schemas.microsoft.com/office/drawing/2014/main" id="{995637F9-38E7-9E92-3856-C24AF33BED35}"/>
+                <a16:creationId xmlns:a16="http://schemas.microsoft.com/office/drawing/2014/main" id="{8DFC948A-2386-9BBE-82D7-3FFF4F19B52A}"/>
               </a:ext>
             </a:extLst>
           </p:cNvPr>
@@ -7311,8 +7909,8 @@
         </p:nvSpPr>
         <p:spPr>
           <a:xfrm>
-            <a:off x="508000" y="317500"/>
-            <a:ext cx="76200" cy="571500"/>
+            <a:off x="0" y="0"/>
+            <a:ext cx="12192000" cy="50800"/>
           </a:xfrm>
           <a:prstGeom prst="rect">
             <a:avLst/>
@@ -7367,10 +7965,78 @@
       </p:sp>
       <p:sp>
         <p:nvSpPr>
-          <p:cNvPr id="4" name="CuadroTexto 3">
-            <a:extLst>
-              <a:ext uri="{FF2B5EF4-FFF2-40B4-BE49-F238E27FC236}">
-                <a16:creationId xmlns:a16="http://schemas.microsoft.com/office/drawing/2014/main" id="{3E1BAA3A-3500-0C91-899E-869F5CE92C7A}"/>
+          <p:cNvPr id="4" name="Rectángulo 3">
+            <a:extLst>
+              <a:ext uri="{FF2B5EF4-FFF2-40B4-BE49-F238E27FC236}">
+                <a16:creationId xmlns:a16="http://schemas.microsoft.com/office/drawing/2014/main" id="{D139615F-E36D-8666-32CF-CCB23A7BF121}"/>
+              </a:ext>
+            </a:extLst>
+          </p:cNvPr>
+          <p:cNvSpPr/>
+          <p:nvPr/>
+        </p:nvSpPr>
+        <p:spPr>
+          <a:xfrm>
+            <a:off x="508000" y="304800"/>
+            <a:ext cx="76200" cy="533400"/>
+          </a:xfrm>
+          <a:prstGeom prst="rect">
+            <a:avLst/>
+          </a:prstGeom>
+          <a:solidFill>
+            <a:srgbClr val="00D2FF"/>
+          </a:solidFill>
+          <a:ln w="19050" cap="flat" cmpd="sng" algn="ctr">
+            <a:noFill/>
+            <a:prstDash val="solid"/>
+            <a:miter lim="800000"/>
+          </a:ln>
+          <a:effectLst/>
+          <a:extLst>
+            <a:ext uri="{91240B29-F687-4F45-9708-019B960494DF}">
+              <a14:hiddenLine xmlns:a14="http://schemas.microsoft.com/office/drawing/2010/main" w="19050" cap="flat" cmpd="sng" algn="ctr">
+                <a:solidFill>
+                  <a:schemeClr val="accent1">
+                    <a:shade val="15000"/>
+                  </a:schemeClr>
+                </a:solidFill>
+                <a:prstDash val="solid"/>
+                <a:miter lim="800000"/>
+              </a14:hiddenLine>
+            </a:ext>
+          </a:extLst>
+        </p:spPr>
+        <p:style>
+          <a:lnRef idx="2">
+            <a:schemeClr val="accent1">
+              <a:shade val="15000"/>
+            </a:schemeClr>
+          </a:lnRef>
+          <a:fillRef idx="1">
+            <a:schemeClr val="accent1"/>
+          </a:fillRef>
+          <a:effectRef idx="0">
+            <a:schemeClr val="accent1"/>
+          </a:effectRef>
+          <a:fontRef idx="minor">
+            <a:schemeClr val="lt1"/>
+          </a:fontRef>
+        </p:style>
+        <p:txBody>
+          <a:bodyPr rtlCol="0" anchor="ctr"/>
+          <a:lstStyle/>
+          <a:p>
+            <a:pPr algn="ctr"/>
+            <a:endParaRPr lang="es-CL"/>
+          </a:p>
+        </p:txBody>
+      </p:sp>
+      <p:sp>
+        <p:nvSpPr>
+          <p:cNvPr id="5" name="CuadroTexto 4">
+            <a:extLst>
+              <a:ext uri="{FF2B5EF4-FFF2-40B4-BE49-F238E27FC236}">
+                <a16:creationId xmlns:a16="http://schemas.microsoft.com/office/drawing/2014/main" id="{E3654304-35F1-DDAE-A210-1201AC2004A4}"/>
               </a:ext>
             </a:extLst>
           </p:cNvPr>
@@ -7379,8 +8045,8 @@
         </p:nvSpPr>
         <p:spPr>
           <a:xfrm>
-            <a:off x="698500" y="254000"/>
-            <a:ext cx="10795000" cy="430887"/>
+            <a:off x="698500" y="228600"/>
+            <a:ext cx="10922000" cy="415498"/>
           </a:xfrm>
           <a:prstGeom prst="rect">
             <a:avLst/>
@@ -7394,7 +8060,7 @@
           <a:lstStyle/>
           <a:p>
             <a:r>
-              <a:rPr lang="es-CL" sz="2200" b="1">
+              <a:rPr lang="es-CL" sz="2100" b="1">
                 <a:solidFill>
                   <a:srgbClr val="FFFFFF"/>
                 </a:solidFill>
@@ -7407,10 +8073,10 @@
       </p:sp>
       <p:sp>
         <p:nvSpPr>
-          <p:cNvPr id="5" name="CuadroTexto 4">
-            <a:extLst>
-              <a:ext uri="{FF2B5EF4-FFF2-40B4-BE49-F238E27FC236}">
-                <a16:creationId xmlns:a16="http://schemas.microsoft.com/office/drawing/2014/main" id="{42D67EAC-A356-8801-0794-314A12D90E0D}"/>
+          <p:cNvPr id="6" name="CuadroTexto 5">
+            <a:extLst>
+              <a:ext uri="{FF2B5EF4-FFF2-40B4-BE49-F238E27FC236}">
+                <a16:creationId xmlns:a16="http://schemas.microsoft.com/office/drawing/2014/main" id="{60774875-DE43-C737-8BB9-C6C43F4BE17C}"/>
               </a:ext>
             </a:extLst>
           </p:cNvPr>
@@ -7419,8 +8085,8 @@
         </p:nvSpPr>
         <p:spPr>
           <a:xfrm>
-            <a:off x="698500" y="660400"/>
-            <a:ext cx="10795000" cy="276999"/>
+            <a:off x="698500" y="609600"/>
+            <a:ext cx="10922000" cy="269304"/>
           </a:xfrm>
           <a:prstGeom prst="rect">
             <a:avLst/>
@@ -7434,17 +8100,17 @@
           <a:lstStyle/>
           <a:p>
             <a:r>
-              <a:rPr lang="es-MX" sz="1200">
+              <a:rPr lang="es-MX" sz="1150">
                 <a:solidFill>
-                  <a:srgbClr val="8892B0"/>
+                  <a:srgbClr val="00D2FF"/>
                 </a:solidFill>
                 <a:latin typeface="Segoe UI" panose="020B0502040204020203" pitchFamily="34" charset="0"/>
               </a:rPr>
-              <a:t>AuditorÃ­a formal de 20 criterios tÃ©cnicos y funcionales del equipo y software</a:t>
+              <a:t>Auditoría formal de 20 criterios técnicos y funcionales del equipo y software</a:t>
             </a:r>
-            <a:endParaRPr lang="es-CL" sz="1200">
+            <a:endParaRPr lang="es-CL" sz="1150">
               <a:solidFill>
-                <a:srgbClr val="8892B0"/>
+                <a:srgbClr val="00D2FF"/>
               </a:solidFill>
               <a:latin typeface="Segoe UI" panose="020B0502040204020203" pitchFamily="34" charset="0"/>
             </a:endParaRPr>
@@ -7453,10 +8119,10 @@
       </p:sp>
       <p:graphicFrame>
         <p:nvGraphicFramePr>
-          <p:cNvPr id="6" name="Tabla 5">
-            <a:extLst>
-              <a:ext uri="{FF2B5EF4-FFF2-40B4-BE49-F238E27FC236}">
-                <a16:creationId xmlns:a16="http://schemas.microsoft.com/office/drawing/2014/main" id="{B35DAC78-AF0F-6425-725E-27575409BE40}"/>
+          <p:cNvPr id="7" name="Tabla 6">
+            <a:extLst>
+              <a:ext uri="{FF2B5EF4-FFF2-40B4-BE49-F238E27FC236}">
+                <a16:creationId xmlns:a16="http://schemas.microsoft.com/office/drawing/2014/main" id="{1DA71AD8-3B23-F896-08F0-E29DC44B5981}"/>
               </a:ext>
             </a:extLst>
           </p:cNvPr>
@@ -7466,14 +8132,14 @@
           <p:nvPr>
             <p:extLst>
               <p:ext uri="{D42A27DB-BD31-4B8C-83A1-F6EECF244321}">
-                <p14:modId xmlns:p14="http://schemas.microsoft.com/office/powerpoint/2010/main" val="2659679701"/>
+                <p14:modId xmlns:p14="http://schemas.microsoft.com/office/powerpoint/2010/main" val="3029323440"/>
               </p:ext>
             </p:extLst>
           </p:nvPr>
         </p:nvGraphicFramePr>
         <p:xfrm>
-          <a:off x="762000" y="1397000"/>
-          <a:ext cx="10668000" cy="4572000"/>
+          <a:off x="635000" y="1206500"/>
+          <a:ext cx="10922000" cy="5016500"/>
         </p:xfrm>
         <a:graphic>
           <a:graphicData uri="http://schemas.openxmlformats.org/drawingml/2006/table">
@@ -7482,36 +8148,36 @@
                 <a:tableStyleId>{5C22544A-7EE6-4342-B048-85BDC9FD1C3A}</a:tableStyleId>
               </a:tblPr>
               <a:tblGrid>
-                <a:gridCol w="2667000">
+                <a:gridCol w="2730500">
                   <a:extLst>
                     <a:ext uri="{9D8B030D-6E8A-4147-A177-3AD203B41FA5}">
-                      <a16:colId xmlns:a16="http://schemas.microsoft.com/office/drawing/2014/main" val="2347174493"/>
+                      <a16:colId xmlns:a16="http://schemas.microsoft.com/office/drawing/2014/main" val="350272659"/>
                     </a:ext>
                   </a:extLst>
                 </a:gridCol>
-                <a:gridCol w="2667000">
+                <a:gridCol w="2730500">
                   <a:extLst>
                     <a:ext uri="{9D8B030D-6E8A-4147-A177-3AD203B41FA5}">
-                      <a16:colId xmlns:a16="http://schemas.microsoft.com/office/drawing/2014/main" val="2963857409"/>
+                      <a16:colId xmlns:a16="http://schemas.microsoft.com/office/drawing/2014/main" val="3942156977"/>
                     </a:ext>
                   </a:extLst>
                 </a:gridCol>
-                <a:gridCol w="2667000">
+                <a:gridCol w="2730500">
                   <a:extLst>
                     <a:ext uri="{9D8B030D-6E8A-4147-A177-3AD203B41FA5}">
-                      <a16:colId xmlns:a16="http://schemas.microsoft.com/office/drawing/2014/main" val="144469791"/>
+                      <a16:colId xmlns:a16="http://schemas.microsoft.com/office/drawing/2014/main" val="268750294"/>
                     </a:ext>
                   </a:extLst>
                 </a:gridCol>
-                <a:gridCol w="2667000">
+                <a:gridCol w="2730500">
                   <a:extLst>
                     <a:ext uri="{9D8B030D-6E8A-4147-A177-3AD203B41FA5}">
-                      <a16:colId xmlns:a16="http://schemas.microsoft.com/office/drawing/2014/main" val="3279408275"/>
+                      <a16:colId xmlns:a16="http://schemas.microsoft.com/office/drawing/2014/main" val="3554757031"/>
                     </a:ext>
                   </a:extLst>
                 </a:gridCol>
               </a:tblGrid>
-              <a:tr h="762000">
+              <a:tr h="836083">
                 <a:tc>
                   <a:txBody>
                     <a:bodyPr/>
@@ -7522,6 +8188,7 @@
                           <a:solidFill>
                             <a:srgbClr val="00D2FF"/>
                           </a:solidFill>
+                          <a:latin typeface="Segoe UI" panose="020B0502040204020203" pitchFamily="34" charset="0"/>
                         </a:rPr>
                         <a:t>Fase Evaluada</a:t>
                       </a:r>
@@ -7543,6 +8210,7 @@
                           <a:solidFill>
                             <a:srgbClr val="00D2FF"/>
                           </a:solidFill>
+                          <a:latin typeface="Segoe UI" panose="020B0502040204020203" pitchFamily="34" charset="0"/>
                         </a:rPr>
                         <a:t>Criterios Verificados</a:t>
                       </a:r>
@@ -7564,6 +8232,7 @@
                           <a:solidFill>
                             <a:srgbClr val="00D2FF"/>
                           </a:solidFill>
+                          <a:latin typeface="Segoe UI" panose="020B0502040204020203" pitchFamily="34" charset="0"/>
                         </a:rPr>
                         <a:t>Estado Obtenido</a:t>
                       </a:r>
@@ -7585,6 +8254,7 @@
                           <a:solidFill>
                             <a:srgbClr val="00D2FF"/>
                           </a:solidFill>
+                          <a:latin typeface="Segoe UI" panose="020B0502040204020203" pitchFamily="34" charset="0"/>
                         </a:rPr>
                         <a:t>Responsable</a:t>
                       </a:r>
@@ -7598,23 +8268,24 @@
                 </a:tc>
                 <a:extLst>
                   <a:ext uri="{0D108BD9-81ED-4DB2-BD59-A6C34878D82A}">
-                    <a16:rowId xmlns:a16="http://schemas.microsoft.com/office/drawing/2014/main" val="1759993749"/>
+                    <a16:rowId xmlns:a16="http://schemas.microsoft.com/office/drawing/2014/main" val="2548057857"/>
                   </a:ext>
                 </a:extLst>
               </a:tr>
-              <a:tr h="762000">
+              <a:tr h="836083">
                 <a:tc>
                   <a:txBody>
                     <a:bodyPr/>
                     <a:lstStyle/>
                     <a:p>
                       <a:r>
-                        <a:rPr lang="es-CL" sz="1100">
+                        <a:rPr lang="es-CL" sz="1150">
                           <a:solidFill>
                             <a:srgbClr val="FFFFFF"/>
                           </a:solidFill>
+                          <a:latin typeface="Segoe UI" panose="020B0502040204020203" pitchFamily="34" charset="0"/>
                         </a:rPr>
-                        <a:t>Fase 1: Pre-InstalaciÃ³n</a:t>
+                        <a:t>Fase 1: Pre-Instalación</a:t>
                       </a:r>
                     </a:p>
                   </a:txBody>
@@ -7630,17 +8301,19 @@
                     <a:lstStyle/>
                     <a:p>
                       <a:r>
-                        <a:rPr lang="es-MX" sz="1100">
+                        <a:rPr lang="es-MX" sz="1150">
                           <a:solidFill>
                             <a:srgbClr val="FFFFFF"/>
                           </a:solidFill>
+                          <a:latin typeface="Segoe UI" panose="020B0502040204020203" pitchFamily="34" charset="0"/>
                         </a:rPr>
                         <a:t>Integridad del SO Windows, .NET 10 Runtime, NTP horario y espacio SSD.</a:t>
                       </a:r>
-                      <a:endParaRPr lang="es-CL" sz="1100">
+                      <a:endParaRPr lang="es-CL" sz="1150">
                         <a:solidFill>
                           <a:srgbClr val="FFFFFF"/>
                         </a:solidFill>
+                        <a:latin typeface="Segoe UI" panose="020B0502040204020203" pitchFamily="34" charset="0"/>
                       </a:endParaRPr>
                     </a:p>
                   </a:txBody>
@@ -7656,10 +8329,11 @@
                     <a:lstStyle/>
                     <a:p>
                       <a:r>
-                        <a:rPr lang="es-CL" sz="1100">
+                        <a:rPr lang="es-CL" sz="1150">
                           <a:solidFill>
                             <a:srgbClr val="64FFDA"/>
                           </a:solidFill>
+                          <a:latin typeface="Segoe UI" panose="020B0502040204020203" pitchFamily="34" charset="0"/>
                         </a:rPr>
                         <a:t>4/4 Conformes (100%)</a:t>
                       </a:r>
@@ -7677,12 +8351,13 @@
                     <a:lstStyle/>
                     <a:p>
                       <a:r>
-                        <a:rPr lang="es-CL" sz="1100">
+                        <a:rPr lang="es-CL" sz="1150">
                           <a:solidFill>
                             <a:srgbClr val="FFFFFF"/>
                           </a:solidFill>
+                          <a:latin typeface="Segoe UI" panose="020B0502040204020203" pitchFamily="34" charset="0"/>
                         </a:rPr>
-                        <a:t>FabiÃ¡n Mora</a:t>
+                        <a:t>Fabián Mora</a:t>
                       </a:r>
                     </a:p>
                   </a:txBody>
@@ -7694,24 +8369,31 @@
                 </a:tc>
                 <a:extLst>
                   <a:ext uri="{0D108BD9-81ED-4DB2-BD59-A6C34878D82A}">
-                    <a16:rowId xmlns:a16="http://schemas.microsoft.com/office/drawing/2014/main" val="2231231026"/>
+                    <a16:rowId xmlns:a16="http://schemas.microsoft.com/office/drawing/2014/main" val="549908024"/>
                   </a:ext>
                 </a:extLst>
               </a:tr>
-              <a:tr h="762000">
+              <a:tr h="836083">
                 <a:tc>
                   <a:txBody>
                     <a:bodyPr/>
                     <a:lstStyle/>
                     <a:p>
                       <a:r>
-                        <a:rPr lang="es-CL" sz="1100">
+                        <a:rPr lang="es-MX" sz="1150">
                           <a:solidFill>
                             <a:srgbClr val="FFFFFF"/>
                           </a:solidFill>
+                          <a:latin typeface="Segoe UI" panose="020B0502040204020203" pitchFamily="34" charset="0"/>
                         </a:rPr>
-                        <a:t>Fase 2: InstalaciÃ³n y BD</a:t>
+                        <a:t>Fase 2: Instalación y BD</a:t>
                       </a:r>
+                      <a:endParaRPr lang="es-CL" sz="1150">
+                        <a:solidFill>
+                          <a:srgbClr val="FFFFFF"/>
+                        </a:solidFill>
+                        <a:latin typeface="Segoe UI" panose="020B0502040204020203" pitchFamily="34" charset="0"/>
+                      </a:endParaRPr>
                     </a:p>
                   </a:txBody>
                   <a:tcPr>
@@ -7726,10 +8408,11 @@
                     <a:lstStyle/>
                     <a:p>
                       <a:r>
-                        <a:rPr lang="es-CL" sz="1100">
+                        <a:rPr lang="es-CL" sz="1150">
                           <a:solidFill>
                             <a:srgbClr val="FFFFFF"/>
                           </a:solidFill>
+                          <a:latin typeface="Segoe UI" panose="020B0502040204020203" pitchFamily="34" charset="0"/>
                         </a:rPr>
                         <a:t>Permisos NTFS, SQLite asistencia.db, DatabaseInitializer y hash BCrypt.</a:t>
                       </a:r>
@@ -7747,10 +8430,11 @@
                     <a:lstStyle/>
                     <a:p>
                       <a:r>
-                        <a:rPr lang="es-CL" sz="1100">
+                        <a:rPr lang="es-CL" sz="1150">
                           <a:solidFill>
                             <a:srgbClr val="64FFDA"/>
                           </a:solidFill>
+                          <a:latin typeface="Segoe UI" panose="020B0502040204020203" pitchFamily="34" charset="0"/>
                         </a:rPr>
                         <a:t>4/4 Conformes (100%)</a:t>
                       </a:r>
@@ -7768,12 +8452,13 @@
                     <a:lstStyle/>
                     <a:p>
                       <a:r>
-                        <a:rPr lang="es-CL" sz="1100">
+                        <a:rPr lang="es-CL" sz="1150">
                           <a:solidFill>
                             <a:srgbClr val="FFFFFF"/>
                           </a:solidFill>
+                          <a:latin typeface="Segoe UI" panose="020B0502040204020203" pitchFamily="34" charset="0"/>
                         </a:rPr>
-                        <a:t>FabiÃ¡n Mora / Paul Ferrada</a:t>
+                        <a:t>Fabián Mora / Paul Ferrada</a:t>
                       </a:r>
                     </a:p>
                   </a:txBody>
@@ -7785,28 +8470,30 @@
                 </a:tc>
                 <a:extLst>
                   <a:ext uri="{0D108BD9-81ED-4DB2-BD59-A6C34878D82A}">
-                    <a16:rowId xmlns:a16="http://schemas.microsoft.com/office/drawing/2014/main" val="934522270"/>
+                    <a16:rowId xmlns:a16="http://schemas.microsoft.com/office/drawing/2014/main" val="3249049479"/>
                   </a:ext>
                 </a:extLst>
               </a:tr>
-              <a:tr h="762000">
+              <a:tr h="836083">
                 <a:tc>
                   <a:txBody>
                     <a:bodyPr/>
                     <a:lstStyle/>
                     <a:p>
                       <a:r>
-                        <a:rPr lang="es-MX" sz="1100">
+                        <a:rPr lang="es-MX" sz="1150">
                           <a:solidFill>
                             <a:srgbClr val="FFFFFF"/>
                           </a:solidFill>
+                          <a:latin typeface="Segoe UI" panose="020B0502040204020203" pitchFamily="34" charset="0"/>
                         </a:rPr>
                         <a:t>Fase 3: Interfaz y Funcionalidad</a:t>
                       </a:r>
-                      <a:endParaRPr lang="es-CL" sz="1100">
+                      <a:endParaRPr lang="es-CL" sz="1150">
                         <a:solidFill>
                           <a:srgbClr val="FFFFFF"/>
                         </a:solidFill>
+                        <a:latin typeface="Segoe UI" panose="020B0502040204020203" pitchFamily="34" charset="0"/>
                       </a:endParaRPr>
                     </a:p>
                   </a:txBody>
@@ -7822,17 +8509,19 @@
                     <a:lstStyle/>
                     <a:p>
                       <a:r>
-                        <a:rPr lang="es-MX" sz="1100">
+                        <a:rPr lang="es-MX" sz="1150">
                           <a:solidFill>
                             <a:srgbClr val="FFFFFF"/>
                           </a:solidFill>
+                          <a:latin typeface="Segoe UI" panose="020B0502040204020203" pitchFamily="34" charset="0"/>
                         </a:rPr>
-                        <a:t>Login, marcaje entrada/salida Ãºnico diario, gestiÃ³n CRUD de usuarios.</a:t>
+                        <a:t>Login, marcaje entrada/salida único diario, gestión CRUD de usuarios.</a:t>
                       </a:r>
-                      <a:endParaRPr lang="es-CL" sz="1100">
+                      <a:endParaRPr lang="es-CL" sz="1150">
                         <a:solidFill>
                           <a:srgbClr val="FFFFFF"/>
                         </a:solidFill>
+                        <a:latin typeface="Segoe UI" panose="020B0502040204020203" pitchFamily="34" charset="0"/>
                       </a:endParaRPr>
                     </a:p>
                   </a:txBody>
@@ -7848,10 +8537,11 @@
                     <a:lstStyle/>
                     <a:p>
                       <a:r>
-                        <a:rPr lang="es-CL" sz="1100">
+                        <a:rPr lang="es-CL" sz="1150">
                           <a:solidFill>
                             <a:srgbClr val="64FFDA"/>
                           </a:solidFill>
+                          <a:latin typeface="Segoe UI" panose="020B0502040204020203" pitchFamily="34" charset="0"/>
                         </a:rPr>
                         <a:t>5/5 Conformes (100%)</a:t>
                       </a:r>
@@ -7869,12 +8559,13 @@
                     <a:lstStyle/>
                     <a:p>
                       <a:r>
-                        <a:rPr lang="es-CL" sz="1100">
+                        <a:rPr lang="es-CL" sz="1150">
                           <a:solidFill>
                             <a:srgbClr val="FFFFFF"/>
                           </a:solidFill>
+                          <a:latin typeface="Segoe UI" panose="020B0502040204020203" pitchFamily="34" charset="0"/>
                         </a:rPr>
-                        <a:t>AgustÃ­n CaÃ±as</a:t>
+                        <a:t>Agustín Cañas</a:t>
                       </a:r>
                     </a:p>
                   </a:txBody>
@@ -7886,28 +8577,30 @@
                 </a:tc>
                 <a:extLst>
                   <a:ext uri="{0D108BD9-81ED-4DB2-BD59-A6C34878D82A}">
-                    <a16:rowId xmlns:a16="http://schemas.microsoft.com/office/drawing/2014/main" val="2595101902"/>
+                    <a16:rowId xmlns:a16="http://schemas.microsoft.com/office/drawing/2014/main" val="1352454296"/>
                   </a:ext>
                 </a:extLst>
               </a:tr>
-              <a:tr h="762000">
+              <a:tr h="836083">
                 <a:tc>
                   <a:txBody>
                     <a:bodyPr/>
                     <a:lstStyle/>
                     <a:p>
                       <a:r>
-                        <a:rPr lang="es-MX" sz="1100">
+                        <a:rPr lang="es-MX" sz="1150">
                           <a:solidFill>
                             <a:srgbClr val="FFFFFF"/>
                           </a:solidFill>
+                          <a:latin typeface="Segoe UI" panose="020B0502040204020203" pitchFamily="34" charset="0"/>
                         </a:rPr>
-                        <a:t>Fase 4: Reportes y OfimÃ¡tica</a:t>
+                        <a:t>Fase 4: Reportes y Ofimática</a:t>
                       </a:r>
-                      <a:endParaRPr lang="es-CL" sz="1100">
+                      <a:endParaRPr lang="es-CL" sz="1150">
                         <a:solidFill>
                           <a:srgbClr val="FFFFFF"/>
                         </a:solidFill>
+                        <a:latin typeface="Segoe UI" panose="020B0502040204020203" pitchFamily="34" charset="0"/>
                       </a:endParaRPr>
                     </a:p>
                   </a:txBody>
@@ -7923,13 +8616,20 @@
                     <a:lstStyle/>
                     <a:p>
                       <a:r>
-                        <a:rPr lang="es-CL" sz="1100">
+                        <a:rPr lang="es-MX" sz="1150">
                           <a:solidFill>
                             <a:srgbClr val="FFFFFF"/>
                           </a:solidFill>
+                          <a:latin typeface="Segoe UI" panose="020B0502040204020203" pitchFamily="34" charset="0"/>
                         </a:rPr>
-                        <a:t>Filtros de atrasos &gt; 9:30, salidas &lt; 17:30, inasistencias y exportaciÃ³n Excel.</a:t>
+                        <a:t>Filtros de atrasos &gt; 9:30, salidas &lt; 17:30, inasistencias y exportación Excel.</a:t>
                       </a:r>
+                      <a:endParaRPr lang="es-CL" sz="1150">
+                        <a:solidFill>
+                          <a:srgbClr val="FFFFFF"/>
+                        </a:solidFill>
+                        <a:latin typeface="Segoe UI" panose="020B0502040204020203" pitchFamily="34" charset="0"/>
+                      </a:endParaRPr>
                     </a:p>
                   </a:txBody>
                   <a:tcPr>
@@ -7944,10 +8644,11 @@
                     <a:lstStyle/>
                     <a:p>
                       <a:r>
-                        <a:rPr lang="es-CL" sz="1100">
+                        <a:rPr lang="es-CL" sz="1150">
                           <a:solidFill>
                             <a:srgbClr val="64FFDA"/>
                           </a:solidFill>
+                          <a:latin typeface="Segoe UI" panose="020B0502040204020203" pitchFamily="34" charset="0"/>
                         </a:rPr>
                         <a:t>4/4 Conformes (100%)</a:t>
                       </a:r>
@@ -7965,10 +8666,11 @@
                     <a:lstStyle/>
                     <a:p>
                       <a:r>
-                        <a:rPr lang="es-CL" sz="1100">
+                        <a:rPr lang="es-CL" sz="1150">
                           <a:solidFill>
                             <a:srgbClr val="FFFFFF"/>
                           </a:solidFill>
+                          <a:latin typeface="Segoe UI" panose="020B0502040204020203" pitchFamily="34" charset="0"/>
                         </a:rPr>
                         <a:t>Paul Ferrada</a:t>
                       </a:r>
@@ -7982,28 +8684,30 @@
                 </a:tc>
                 <a:extLst>
                   <a:ext uri="{0D108BD9-81ED-4DB2-BD59-A6C34878D82A}">
-                    <a16:rowId xmlns:a16="http://schemas.microsoft.com/office/drawing/2014/main" val="1873459749"/>
+                    <a16:rowId xmlns:a16="http://schemas.microsoft.com/office/drawing/2014/main" val="3961112130"/>
                   </a:ext>
                 </a:extLst>
               </a:tr>
-              <a:tr h="762000">
+              <a:tr h="836083">
                 <a:tc>
                   <a:txBody>
                     <a:bodyPr/>
                     <a:lstStyle/>
                     <a:p>
                       <a:r>
-                        <a:rPr lang="es-MX" sz="1100">
+                        <a:rPr lang="es-MX" sz="1150">
                           <a:solidFill>
                             <a:srgbClr val="FFFFFF"/>
                           </a:solidFill>
+                          <a:latin typeface="Segoe UI" panose="020B0502040204020203" pitchFamily="34" charset="0"/>
                         </a:rPr>
-                        <a:t>Fase 5: ValidaciÃ³n y Contingencia</a:t>
+                        <a:t>Fase 5: Validación y Contingencia</a:t>
                       </a:r>
-                      <a:endParaRPr lang="es-CL" sz="1100">
+                      <a:endParaRPr lang="es-CL" sz="1150">
                         <a:solidFill>
                           <a:srgbClr val="FFFFFF"/>
                         </a:solidFill>
+                        <a:latin typeface="Segoe UI" panose="020B0502040204020203" pitchFamily="34" charset="0"/>
                       </a:endParaRPr>
                     </a:p>
                   </a:txBody>
@@ -8019,17 +8723,19 @@
                     <a:lstStyle/>
                     <a:p>
                       <a:r>
-                        <a:rPr lang="es-MX" sz="1100">
+                        <a:rPr lang="es-MX" sz="1150">
                           <a:solidFill>
                             <a:srgbClr val="FFFFFF"/>
                           </a:solidFill>
+                          <a:latin typeface="Segoe UI" panose="020B0502040204020203" pitchFamily="34" charset="0"/>
                         </a:rPr>
                         <a:t>19 pruebas xUnit aprobadas, captura global de errores y plan de backup.</a:t>
                       </a:r>
-                      <a:endParaRPr lang="es-CL" sz="1100">
+                      <a:endParaRPr lang="es-CL" sz="1150">
                         <a:solidFill>
                           <a:srgbClr val="FFFFFF"/>
                         </a:solidFill>
+                        <a:latin typeface="Segoe UI" panose="020B0502040204020203" pitchFamily="34" charset="0"/>
                       </a:endParaRPr>
                     </a:p>
                   </a:txBody>
@@ -8045,10 +8751,11 @@
                     <a:lstStyle/>
                     <a:p>
                       <a:r>
-                        <a:rPr lang="es-CL" sz="1100">
+                        <a:rPr lang="es-CL" sz="1150">
                           <a:solidFill>
                             <a:srgbClr val="64FFDA"/>
                           </a:solidFill>
+                          <a:latin typeface="Segoe UI" panose="020B0502040204020203" pitchFamily="34" charset="0"/>
                         </a:rPr>
                         <a:t>3/3 Conformes (100%)</a:t>
                       </a:r>
@@ -8066,10 +8773,11 @@
                     <a:lstStyle/>
                     <a:p>
                       <a:r>
-                        <a:rPr lang="es-CL" sz="1100">
+                        <a:rPr lang="es-CL" sz="1150">
                           <a:solidFill>
                             <a:srgbClr val="FFFFFF"/>
                           </a:solidFill>
+                          <a:latin typeface="Segoe UI" panose="020B0502040204020203" pitchFamily="34" charset="0"/>
                         </a:rPr>
                         <a:t>Equipo Completo</a:t>
                       </a:r>
@@ -8083,7 +8791,7 @@
                 </a:tc>
                 <a:extLst>
                   <a:ext uri="{0D108BD9-81ED-4DB2-BD59-A6C34878D82A}">
-                    <a16:rowId xmlns:a16="http://schemas.microsoft.com/office/drawing/2014/main" val="3768082304"/>
+                    <a16:rowId xmlns:a16="http://schemas.microsoft.com/office/drawing/2014/main" val="2023209610"/>
                   </a:ext>
                 </a:extLst>
               </a:tr>
@@ -8094,7 +8802,7 @@
     </p:spTree>
     <p:extLst>
       <p:ext uri="{BB962C8B-B14F-4D97-AF65-F5344CB8AC3E}">
-        <p14:creationId xmlns:p14="http://schemas.microsoft.com/office/powerpoint/2010/main" val="3318624109"/>
+        <p14:creationId xmlns:p14="http://schemas.microsoft.com/office/powerpoint/2010/main" val="922680712"/>
       </p:ext>
     </p:extLst>
   </p:cSld>
@@ -8126,7 +8834,7 @@
           <p:cNvPr id="2" name="Rectángulo 1">
             <a:extLst>
               <a:ext uri="{FF2B5EF4-FFF2-40B4-BE49-F238E27FC236}">
-                <a16:creationId xmlns:a16="http://schemas.microsoft.com/office/drawing/2014/main" id="{A986229D-EDBE-34E7-C1E7-893AE0F3F717}"/>
+                <a16:creationId xmlns:a16="http://schemas.microsoft.com/office/drawing/2014/main" id="{292D89B8-E915-3CE5-7C0D-A3B6843A3CCC}"/>
               </a:ext>
             </a:extLst>
           </p:cNvPr>
@@ -8194,7 +8902,7 @@
           <p:cNvPr id="3" name="Rectángulo 2">
             <a:extLst>
               <a:ext uri="{FF2B5EF4-FFF2-40B4-BE49-F238E27FC236}">
-                <a16:creationId xmlns:a16="http://schemas.microsoft.com/office/drawing/2014/main" id="{8955DE76-AFAF-EEB2-4FE9-773BC7D7CA2A}"/>
+                <a16:creationId xmlns:a16="http://schemas.microsoft.com/office/drawing/2014/main" id="{6497C5CA-8761-1E54-7D92-DC092ABC4EA0}"/>
               </a:ext>
             </a:extLst>
           </p:cNvPr>
@@ -8203,8 +8911,8 @@
         </p:nvSpPr>
         <p:spPr>
           <a:xfrm>
-            <a:off x="508000" y="317500"/>
-            <a:ext cx="76200" cy="571500"/>
+            <a:off x="0" y="0"/>
+            <a:ext cx="12192000" cy="50800"/>
           </a:xfrm>
           <a:prstGeom prst="rect">
             <a:avLst/>
@@ -8259,118 +8967,26 @@
       </p:sp>
       <p:sp>
         <p:nvSpPr>
-          <p:cNvPr id="4" name="CuadroTexto 3">
-            <a:extLst>
-              <a:ext uri="{FF2B5EF4-FFF2-40B4-BE49-F238E27FC236}">
-                <a16:creationId xmlns:a16="http://schemas.microsoft.com/office/drawing/2014/main" id="{FF328EF0-7B67-E9FC-37AD-4F81C79825E9}"/>
-              </a:ext>
-            </a:extLst>
-          </p:cNvPr>
-          <p:cNvSpPr txBox="1"/>
+          <p:cNvPr id="4" name="Rectángulo 3">
+            <a:extLst>
+              <a:ext uri="{FF2B5EF4-FFF2-40B4-BE49-F238E27FC236}">
+                <a16:creationId xmlns:a16="http://schemas.microsoft.com/office/drawing/2014/main" id="{961D92CB-A90F-02A3-21B9-D160B01E9455}"/>
+              </a:ext>
+            </a:extLst>
+          </p:cNvPr>
+          <p:cNvSpPr/>
           <p:nvPr/>
         </p:nvSpPr>
         <p:spPr>
           <a:xfrm>
-            <a:off x="698500" y="254000"/>
-            <a:ext cx="10795000" cy="430887"/>
-          </a:xfrm>
-          <a:prstGeom prst="rect">
-            <a:avLst/>
-          </a:prstGeom>
-          <a:noFill/>
-        </p:spPr>
-        <p:txBody>
-          <a:bodyPr vert="horz" rtlCol="0">
-            <a:spAutoFit/>
-          </a:bodyPr>
-          <a:lstStyle/>
-          <a:p>
-            <a:r>
-              <a:rPr lang="es-MX" sz="2200" b="1">
-                <a:solidFill>
-                  <a:srgbClr val="FFFFFF"/>
-                </a:solidFill>
-                <a:latin typeface="Segoe UI" panose="020B0502040204020203" pitchFamily="34" charset="0"/>
-              </a:rPr>
-              <a:t>7. Conclusiones y Oportunidades de Mejora</a:t>
-            </a:r>
-            <a:endParaRPr lang="es-CL" sz="2200" b="1">
-              <a:solidFill>
-                <a:srgbClr val="FFFFFF"/>
-              </a:solidFill>
-              <a:latin typeface="Segoe UI" panose="020B0502040204020203" pitchFamily="34" charset="0"/>
-            </a:endParaRPr>
-          </a:p>
-        </p:txBody>
-      </p:sp>
-      <p:sp>
-        <p:nvSpPr>
-          <p:cNvPr id="5" name="CuadroTexto 4">
-            <a:extLst>
-              <a:ext uri="{FF2B5EF4-FFF2-40B4-BE49-F238E27FC236}">
-                <a16:creationId xmlns:a16="http://schemas.microsoft.com/office/drawing/2014/main" id="{67BB6C72-1AE9-A559-184A-50C3E758F3EE}"/>
-              </a:ext>
-            </a:extLst>
-          </p:cNvPr>
-          <p:cNvSpPr txBox="1"/>
-          <p:nvPr/>
-        </p:nvSpPr>
-        <p:spPr>
-          <a:xfrm>
-            <a:off x="698500" y="660400"/>
-            <a:ext cx="10795000" cy="276999"/>
-          </a:xfrm>
-          <a:prstGeom prst="rect">
-            <a:avLst/>
-          </a:prstGeom>
-          <a:noFill/>
-        </p:spPr>
-        <p:txBody>
-          <a:bodyPr vert="horz" rtlCol="0">
-            <a:spAutoFit/>
-          </a:bodyPr>
-          <a:lstStyle/>
-          <a:p>
-            <a:r>
-              <a:rPr lang="es-MX" sz="1200">
-                <a:solidFill>
-                  <a:srgbClr val="8892B0"/>
-                </a:solidFill>
-                <a:latin typeface="Segoe UI" panose="020B0502040204020203" pitchFamily="34" charset="0"/>
-              </a:rPr>
-              <a:t>Lecciones aprendidas, continuidad operacional y sello valÃ³rico institucional</a:t>
-            </a:r>
-            <a:endParaRPr lang="es-CL" sz="1200">
-              <a:solidFill>
-                <a:srgbClr val="8892B0"/>
-              </a:solidFill>
-              <a:latin typeface="Segoe UI" panose="020B0502040204020203" pitchFamily="34" charset="0"/>
-            </a:endParaRPr>
-          </a:p>
-        </p:txBody>
-      </p:sp>
-      <p:sp>
-        <p:nvSpPr>
-          <p:cNvPr id="6" name="Rectángulo 5">
-            <a:extLst>
-              <a:ext uri="{FF2B5EF4-FFF2-40B4-BE49-F238E27FC236}">
-                <a16:creationId xmlns:a16="http://schemas.microsoft.com/office/drawing/2014/main" id="{F4913C86-15A1-B8D0-0A06-FCA768F31C02}"/>
-              </a:ext>
-            </a:extLst>
-          </p:cNvPr>
-          <p:cNvSpPr/>
-          <p:nvPr/>
-        </p:nvSpPr>
-        <p:spPr>
-          <a:xfrm>
-            <a:off x="762000" y="1397000"/>
-            <a:ext cx="5080000" cy="4699000"/>
+            <a:off x="508000" y="304800"/>
+            <a:ext cx="76200" cy="533400"/>
           </a:xfrm>
           <a:prstGeom prst="rect">
             <a:avLst/>
           </a:prstGeom>
           <a:solidFill>
-            <a:srgbClr val="1A1A2E"/>
+            <a:srgbClr val="00D2FF"/>
           </a:solidFill>
           <a:ln w="19050" cap="flat" cmpd="sng" algn="ctr">
             <a:noFill/>
@@ -8419,10 +9035,10 @@
       </p:sp>
       <p:sp>
         <p:nvSpPr>
-          <p:cNvPr id="7" name="CuadroTexto 6">
-            <a:extLst>
-              <a:ext uri="{FF2B5EF4-FFF2-40B4-BE49-F238E27FC236}">
-                <a16:creationId xmlns:a16="http://schemas.microsoft.com/office/drawing/2014/main" id="{A01CD7E7-2F78-9F6A-B194-49264E1DC926}"/>
+          <p:cNvPr id="5" name="CuadroTexto 4">
+            <a:extLst>
+              <a:ext uri="{FF2B5EF4-FFF2-40B4-BE49-F238E27FC236}">
+                <a16:creationId xmlns:a16="http://schemas.microsoft.com/office/drawing/2014/main" id="{CC45BE07-AB61-F539-428E-49B6EA0F1DEC}"/>
               </a:ext>
             </a:extLst>
           </p:cNvPr>
@@ -8431,8 +9047,8 @@
         </p:nvSpPr>
         <p:spPr>
           <a:xfrm>
-            <a:off x="1016000" y="1651000"/>
-            <a:ext cx="4572000" cy="2492990"/>
+            <a:off x="698500" y="228600"/>
+            <a:ext cx="10922000" cy="415498"/>
           </a:xfrm>
           <a:prstGeom prst="rect">
             <a:avLst/>
@@ -8440,24 +9056,21 @@
           <a:noFill/>
         </p:spPr>
         <p:txBody>
-          <a:bodyPr vert="horz" wrap="square" rtlCol="0">
+          <a:bodyPr vert="horz" rtlCol="0">
             <a:spAutoFit/>
           </a:bodyPr>
           <a:lstStyle/>
           <a:p>
             <a:r>
-              <a:rPr lang="es-MX" sz="1300">
+              <a:rPr lang="es-MX" sz="2100" b="1">
                 <a:solidFill>
                   <a:srgbClr val="FFFFFF"/>
                 </a:solidFill>
                 <a:latin typeface="Segoe UI" panose="020B0502040204020203" pitchFamily="34" charset="0"/>
               </a:rPr>
-              <a:t>CONCLUSIONES PRINCIPALES
-â€¢ Continuidad Garantizada: El computador y el sistema se encuentran 100% operativos, estables y protegidos ante fallos de conectividad.
-â€¢ Eficiencia en RRHH: La exportaciÃ³n nativa a Excel automatiza el cÃ¡lculo de liquidaciones reduciendo tiempos administrativos.
-â€¢ Sello ValÃ³rico Tomista: La Excelencia y Esfuerzo en el cÃ³digo riguroso, junto a la Fraternidad y Solidaridad en la coordinaciÃ³n grupal, superaron las malas prÃ¡cticas evidenciadas en el caso.</a:t>
+              <a:t>7. Conclusiones y Oportunidades de Mejora</a:t>
             </a:r>
-            <a:endParaRPr lang="es-CL" sz="1300">
+            <a:endParaRPr lang="es-CL" sz="2100" b="1">
               <a:solidFill>
                 <a:srgbClr val="FFFFFF"/>
               </a:solidFill>
@@ -8468,10 +9081,56 @@
       </p:sp>
       <p:sp>
         <p:nvSpPr>
-          <p:cNvPr id="8" name="Rectángulo 7">
-            <a:extLst>
-              <a:ext uri="{FF2B5EF4-FFF2-40B4-BE49-F238E27FC236}">
-                <a16:creationId xmlns:a16="http://schemas.microsoft.com/office/drawing/2014/main" id="{6D826B3A-184A-D960-0CB6-6D8520A601C2}"/>
+          <p:cNvPr id="6" name="CuadroTexto 5">
+            <a:extLst>
+              <a:ext uri="{FF2B5EF4-FFF2-40B4-BE49-F238E27FC236}">
+                <a16:creationId xmlns:a16="http://schemas.microsoft.com/office/drawing/2014/main" id="{3D83D386-E3AE-61C5-F80C-0CE39284E3B0}"/>
+              </a:ext>
+            </a:extLst>
+          </p:cNvPr>
+          <p:cNvSpPr txBox="1"/>
+          <p:nvPr/>
+        </p:nvSpPr>
+        <p:spPr>
+          <a:xfrm>
+            <a:off x="698500" y="609600"/>
+            <a:ext cx="10922000" cy="269304"/>
+          </a:xfrm>
+          <a:prstGeom prst="rect">
+            <a:avLst/>
+          </a:prstGeom>
+          <a:noFill/>
+        </p:spPr>
+        <p:txBody>
+          <a:bodyPr vert="horz" rtlCol="0">
+            <a:spAutoFit/>
+          </a:bodyPr>
+          <a:lstStyle/>
+          <a:p>
+            <a:r>
+              <a:rPr lang="es-MX" sz="1150">
+                <a:solidFill>
+                  <a:srgbClr val="00D2FF"/>
+                </a:solidFill>
+                <a:latin typeface="Segoe UI" panose="020B0502040204020203" pitchFamily="34" charset="0"/>
+              </a:rPr>
+              <a:t>Lecciones aprendidas, continuidad operacional y sello valórico institucional</a:t>
+            </a:r>
+            <a:endParaRPr lang="es-CL" sz="1150">
+              <a:solidFill>
+                <a:srgbClr val="00D2FF"/>
+              </a:solidFill>
+              <a:latin typeface="Segoe UI" panose="020B0502040204020203" pitchFamily="34" charset="0"/>
+            </a:endParaRPr>
+          </a:p>
+        </p:txBody>
+      </p:sp>
+      <p:sp>
+        <p:nvSpPr>
+          <p:cNvPr id="7" name="Rectángulo 6">
+            <a:extLst>
+              <a:ext uri="{FF2B5EF4-FFF2-40B4-BE49-F238E27FC236}">
+                <a16:creationId xmlns:a16="http://schemas.microsoft.com/office/drawing/2014/main" id="{7760D643-E164-4F02-55E5-D5D7230D0BE3}"/>
               </a:ext>
             </a:extLst>
           </p:cNvPr>
@@ -8480,8 +9139,8 @@
         </p:nvSpPr>
         <p:spPr>
           <a:xfrm>
-            <a:off x="6350000" y="1397000"/>
-            <a:ext cx="5080000" cy="4699000"/>
+            <a:off x="635000" y="1143000"/>
+            <a:ext cx="5270500" cy="5207000"/>
           </a:xfrm>
           <a:prstGeom prst="rect">
             <a:avLst/>
@@ -8489,25 +9148,11 @@
           <a:solidFill>
             <a:srgbClr val="1A1A2E"/>
           </a:solidFill>
-          <a:ln w="19050" cap="flat" cmpd="sng" algn="ctr">
-            <a:noFill/>
-            <a:prstDash val="solid"/>
-            <a:miter lim="800000"/>
+          <a:ln>
+            <a:solidFill>
+              <a:srgbClr val="2A2A4A"/>
+            </a:solidFill>
           </a:ln>
-          <a:effectLst/>
-          <a:extLst>
-            <a:ext uri="{91240B29-F687-4F45-9708-019B960494DF}">
-              <a14:hiddenLine xmlns:a14="http://schemas.microsoft.com/office/drawing/2010/main" w="19050" cap="flat" cmpd="sng" algn="ctr">
-                <a:solidFill>
-                  <a:schemeClr val="accent1">
-                    <a:shade val="15000"/>
-                  </a:schemeClr>
-                </a:solidFill>
-                <a:prstDash val="solid"/>
-                <a:miter lim="800000"/>
-              </a14:hiddenLine>
-            </a:ext>
-          </a:extLst>
         </p:spPr>
         <p:style>
           <a:lnRef idx="2">
@@ -8536,10 +9181,10 @@
       </p:sp>
       <p:sp>
         <p:nvSpPr>
-          <p:cNvPr id="9" name="CuadroTexto 8">
-            <a:extLst>
-              <a:ext uri="{FF2B5EF4-FFF2-40B4-BE49-F238E27FC236}">
-                <a16:creationId xmlns:a16="http://schemas.microsoft.com/office/drawing/2014/main" id="{54081562-2D3E-EA07-46F0-545E0E83A590}"/>
+          <p:cNvPr id="8" name="CuadroTexto 7">
+            <a:extLst>
+              <a:ext uri="{FF2B5EF4-FFF2-40B4-BE49-F238E27FC236}">
+                <a16:creationId xmlns:a16="http://schemas.microsoft.com/office/drawing/2014/main" id="{58E35675-52DD-4429-7EA3-486A25FB13B8}"/>
               </a:ext>
             </a:extLst>
           </p:cNvPr>
@@ -8548,8 +9193,8 @@
         </p:nvSpPr>
         <p:spPr>
           <a:xfrm>
-            <a:off x="6604000" y="1651000"/>
-            <a:ext cx="4572000" cy="2893100"/>
+            <a:off x="889000" y="1333500"/>
+            <a:ext cx="4762500" cy="2677656"/>
           </a:xfrm>
           <a:prstGeom prst="rect">
             <a:avLst/>
@@ -8563,25 +9208,136 @@
           <a:lstStyle/>
           <a:p>
             <a:r>
-              <a:rPr lang="es-CL" sz="1300">
+              <a:rPr lang="es-MX" sz="1200">
+                <a:solidFill>
+                  <a:srgbClr val="FFFFFF"/>
+                </a:solidFill>
+                <a:latin typeface="Segoe UI" panose="020B0502040204020203" pitchFamily="34" charset="0"/>
+              </a:rPr>
+              <a:t>CONCLUSIONES PRINCIPALES
+• Continuidad Garantizada: El computador y el sistema se encuentran 100% operativos, estables y protegidos ante fallos de conectividad.
+• Eficiencia en RRHH: La exportación nativa a Excel automatiza el cálculo de liquidaciones reduciendo tiempos administrativos.
+• Sello Valórico Tomista: La Excelencia y Esfuerzo en el código riguroso, junto a la Fraternidad y Solidaridad en la coordinación grupal, superaron las malas prácticas evidenciadas en el caso.
+</a:t>
+            </a:r>
+            <a:endParaRPr lang="es-CL" sz="1200">
+              <a:solidFill>
+                <a:srgbClr val="FFFFFF"/>
+              </a:solidFill>
+              <a:latin typeface="Segoe UI" panose="020B0502040204020203" pitchFamily="34" charset="0"/>
+            </a:endParaRPr>
+          </a:p>
+        </p:txBody>
+      </p:sp>
+      <p:sp>
+        <p:nvSpPr>
+          <p:cNvPr id="9" name="Rectángulo 8">
+            <a:extLst>
+              <a:ext uri="{FF2B5EF4-FFF2-40B4-BE49-F238E27FC236}">
+                <a16:creationId xmlns:a16="http://schemas.microsoft.com/office/drawing/2014/main" id="{DFEE484F-6E6A-416D-4ECC-36377E28F4E9}"/>
+              </a:ext>
+            </a:extLst>
+          </p:cNvPr>
+          <p:cNvSpPr/>
+          <p:nvPr/>
+        </p:nvSpPr>
+        <p:spPr>
+          <a:xfrm>
+            <a:off x="6286500" y="1143000"/>
+            <a:ext cx="5270500" cy="5207000"/>
+          </a:xfrm>
+          <a:prstGeom prst="rect">
+            <a:avLst/>
+          </a:prstGeom>
+          <a:solidFill>
+            <a:srgbClr val="1A1A2E"/>
+          </a:solidFill>
+          <a:ln>
+            <a:solidFill>
+              <a:srgbClr val="2A2A4A"/>
+            </a:solidFill>
+          </a:ln>
+        </p:spPr>
+        <p:style>
+          <a:lnRef idx="2">
+            <a:schemeClr val="accent1">
+              <a:shade val="15000"/>
+            </a:schemeClr>
+          </a:lnRef>
+          <a:fillRef idx="1">
+            <a:schemeClr val="accent1"/>
+          </a:fillRef>
+          <a:effectRef idx="0">
+            <a:schemeClr val="accent1"/>
+          </a:effectRef>
+          <a:fontRef idx="minor">
+            <a:schemeClr val="lt1"/>
+          </a:fontRef>
+        </p:style>
+        <p:txBody>
+          <a:bodyPr rtlCol="0" anchor="ctr"/>
+          <a:lstStyle/>
+          <a:p>
+            <a:pPr algn="ctr"/>
+            <a:endParaRPr lang="es-CL"/>
+          </a:p>
+        </p:txBody>
+      </p:sp>
+      <p:sp>
+        <p:nvSpPr>
+          <p:cNvPr id="10" name="CuadroTexto 9">
+            <a:extLst>
+              <a:ext uri="{FF2B5EF4-FFF2-40B4-BE49-F238E27FC236}">
+                <a16:creationId xmlns:a16="http://schemas.microsoft.com/office/drawing/2014/main" id="{B7355745-E341-034C-01E7-E130FE1A0DBB}"/>
+              </a:ext>
+            </a:extLst>
+          </p:cNvPr>
+          <p:cNvSpPr txBox="1"/>
+          <p:nvPr/>
+        </p:nvSpPr>
+        <p:spPr>
+          <a:xfrm>
+            <a:off x="6540500" y="1333500"/>
+            <a:ext cx="4762500" cy="3046988"/>
+          </a:xfrm>
+          <a:prstGeom prst="rect">
+            <a:avLst/>
+          </a:prstGeom>
+          <a:noFill/>
+        </p:spPr>
+        <p:txBody>
+          <a:bodyPr vert="horz" wrap="square" rtlCol="0">
+            <a:spAutoFit/>
+          </a:bodyPr>
+          <a:lstStyle/>
+          <a:p>
+            <a:r>
+              <a:rPr lang="es-MX" sz="1200">
                 <a:solidFill>
                   <a:srgbClr val="FFFFFF"/>
                 </a:solidFill>
                 <a:latin typeface="Segoe UI" panose="020B0502040204020203" pitchFamily="34" charset="0"/>
               </a:rPr>
               <a:t>OPORTUNIDADES DE MEJORA
-â€¢ SincronizaciÃ³n Cloud HÃ­brida: Sincronizar periÃ³dicamente la base local SQLite con una instancia centralizada en Azure SQL o PostgreSQL.
-â€¢ Marcaje FÃ­sico / RFID: Integrar lectores de credenciales RFID o biomÃ©tricos para hacer aÃºn mÃ¡s Ã¡gil el flujo de entrada.
-â€¢ Alertas AutomÃ¡ticas por Correo: NotificaciÃ³n inmediata a supervisores ante atrasos reiterados o inasistencias injustificadas.
-â€¢ Instalador MSIX / Inno Setup: Empaquetar prerrequisitos para despliegue automatizado en nuevas sucursales.</a:t>
+• Sincronización Cloud Híbrida: Sincronizar periódicamente la base local SQLite con una instancia centralizada en Azure SQL o PostgreSQL.
+• Marcaje Físico / RFID: Integrar lectores de credenciales RFID o biométricos para hacer aún más ágil el flujo de entrada.
+• Alertas Automáticas por Correo: Notificación inmediata a supervisores ante atrasos reiterados o inasistencias injustificadas.
+• Instalador MSIX / Inno Setup: Empaquetar prerrequisitos para despliegue automatizado en nuevas sucursales.
+</a:t>
             </a:r>
+            <a:endParaRPr lang="es-CL" sz="1200">
+              <a:solidFill>
+                <a:srgbClr val="FFFFFF"/>
+              </a:solidFill>
+              <a:latin typeface="Segoe UI" panose="020B0502040204020203" pitchFamily="34" charset="0"/>
+            </a:endParaRPr>
           </a:p>
         </p:txBody>
       </p:sp>
     </p:spTree>
     <p:extLst>
       <p:ext uri="{BB962C8B-B14F-4D97-AF65-F5344CB8AC3E}">
-        <p14:creationId xmlns:p14="http://schemas.microsoft.com/office/powerpoint/2010/main" val="1641411876"/>
+        <p14:creationId xmlns:p14="http://schemas.microsoft.com/office/powerpoint/2010/main" val="660893358"/>
       </p:ext>
     </p:extLst>
   </p:cSld>
